--- a/content/05-teaching-resources/slides/core/11-electrical-and-electronic-principles.pptx
+++ b/content/05-teaching-resources/slides/core/11-electrical-and-electronic-principles.pptx
@@ -9,12 +9,18 @@
     <p:sldId id="257" r:id="rId8"/>
     <p:sldId id="258" r:id="rId9"/>
     <p:sldId id="259" r:id="rId10"/>
-    <p:sldId id="260" r:id="rId12"/>
+    <p:sldId id="260" r:id="rId11"/>
     <p:sldId id="261" r:id="rId13"/>
     <p:sldId id="262" r:id="rId14"/>
     <p:sldId id="263" r:id="rId15"/>
     <p:sldId id="264" r:id="rId16"/>
     <p:sldId id="265" r:id="rId17"/>
+    <p:sldId id="266" r:id="rId18"/>
+    <p:sldId id="267" r:id="rId19"/>
+    <p:sldId id="268" r:id="rId20"/>
+    <p:sldId id="269" r:id="rId21"/>
+    <p:sldId id="270" r:id="rId22"/>
+    <p:sldId id="271" r:id="rId23"/>
   </p:sldIdLst>
   <p:sldSz cx="12191695" cy="6858000" type="screen4x3"/>
   <p:notesSz cx="6858000" cy="9144000"/>
@@ -511,7 +517,22 @@
           <a:lstStyle/>
           <a:p>
             <a:r>
-              <a:t>Kirchhoff's current law: current into a junction equals current out. Voltage law: voltages around a loop sum to zero.</a:t>
+              <a:t>Answers:</a:t>
+            </a:r>
+          </a:p>
+          <a:p>
+            <a:r>
+              <a:t>1. V = I x R.</a:t>
+            </a:r>
+          </a:p>
+          <a:p>
+            <a:r>
+              <a:t>2. The ohm.</a:t>
+            </a:r>
+          </a:p>
+          <a:p>
+            <a:r>
+              <a:t>3. 460 W.</a:t>
             </a:r>
           </a:p>
         </p:txBody>
@@ -581,7 +602,7 @@
           <a:lstStyle/>
           <a:p>
             <a:r>
-              <a:t>Give students a few minutes to answer on mini whiteboards or paper, then reveal the answers on the next slide.</a:t>
+              <a:t>Kirchhoff's current law: current into a junction equals current out. Voltage law: voltages around a loop sum to zero.</a:t>
             </a:r>
           </a:p>
         </p:txBody>
@@ -651,7 +672,22 @@
           <a:lstStyle/>
           <a:p>
             <a:r>
-              <a:t>Talk through any answers the class found difficult.</a:t>
+              <a:t>Answers:</a:t>
+            </a:r>
+          </a:p>
+          <a:p>
+            <a:r>
+              <a:t>1. The current.</a:t>
+            </a:r>
+          </a:p>
+          <a:p>
+            <a:r>
+              <a:t>2. 3 ohms.</a:t>
+            </a:r>
+          </a:p>
+          <a:p>
+            <a:r>
+              <a:t>3. Each device gets full voltage and works independently.</a:t>
             </a:r>
           </a:p>
         </p:txBody>
@@ -677,6 +713,231 @@
 </file>
 
 <file path=ppt/notesSlides/notesSlide4.xml><?xml version="1.0" encoding="utf-8"?>
+<p:notes xmlns:a="http://schemas.openxmlformats.org/drawingml/2006/main" xmlns:p="http://schemas.openxmlformats.org/presentationml/2006/main" xmlns:r="http://schemas.openxmlformats.org/officeDocument/2006/relationships">
+  <p:cSld>
+    <p:spTree>
+      <p:nvGrpSpPr>
+        <p:cNvPr id="1" name=""/>
+        <p:cNvGrpSpPr/>
+        <p:nvPr/>
+      </p:nvGrpSpPr>
+      <p:grpSpPr>
+        <a:xfrm>
+          <a:off x="0" y="0"/>
+          <a:ext cx="0" cy="0"/>
+          <a:chOff x="0" y="0"/>
+          <a:chExt cx="0" cy="0"/>
+        </a:xfrm>
+      </p:grpSpPr>
+      <p:sp>
+        <p:nvSpPr>
+          <p:cNvPr id="2" name="Slide Image Placeholder 1"/>
+          <p:cNvSpPr>
+            <a:spLocks noGrp="1"/>
+          </p:cNvSpPr>
+          <p:nvPr>
+            <p:ph type="sldImg" idx="2"/>
+          </p:nvPr>
+        </p:nvSpPr>
+        <p:spPr/>
+      </p:sp>
+      <p:sp>
+        <p:nvSpPr>
+          <p:cNvPr id="3" name="Notes Placeholder 2"/>
+          <p:cNvSpPr>
+            <a:spLocks noGrp="1"/>
+          </p:cNvSpPr>
+          <p:nvPr>
+            <p:ph type="body" idx="3" sz="quarter"/>
+          </p:nvPr>
+        </p:nvSpPr>
+        <p:spPr/>
+        <p:txBody>
+          <a:bodyPr/>
+          <a:lstStyle/>
+          <a:p>
+            <a:r>
+              <a:t>Answers:</a:t>
+            </a:r>
+          </a:p>
+          <a:p>
+            <a:r>
+              <a:t>1. One that varies continuously.</a:t>
+            </a:r>
+          </a:p>
+          <a:p>
+            <a:r>
+              <a:t>2. E.g. resist noise, easy to process.</a:t>
+            </a:r>
+          </a:p>
+          <a:p>
+            <a:r>
+              <a:t>3. Converts analogue signals to digital.</a:t>
+            </a:r>
+          </a:p>
+        </p:txBody>
+      </p:sp>
+      <p:sp>
+        <p:nvSpPr>
+          <p:cNvPr id="4" name="Slide Number Placeholder 3"/>
+          <p:cNvSpPr>
+            <a:spLocks noGrp="1"/>
+          </p:cNvSpPr>
+          <p:nvPr>
+            <p:ph type="sldNum" idx="5" sz="quarter"/>
+          </p:nvPr>
+        </p:nvSpPr>
+        <p:spPr/>
+      </p:sp>
+    </p:spTree>
+  </p:cSld>
+  <p:clrMapOvr>
+    <a:masterClrMapping/>
+  </p:clrMapOvr>
+</p:notes>
+</file>
+
+<file path=ppt/notesSlides/notesSlide5.xml><?xml version="1.0" encoding="utf-8"?>
+<p:notes xmlns:a="http://schemas.openxmlformats.org/drawingml/2006/main" xmlns:p="http://schemas.openxmlformats.org/presentationml/2006/main" xmlns:r="http://schemas.openxmlformats.org/officeDocument/2006/relationships">
+  <p:cSld>
+    <p:spTree>
+      <p:nvGrpSpPr>
+        <p:cNvPr id="1" name=""/>
+        <p:cNvGrpSpPr/>
+        <p:nvPr/>
+      </p:nvGrpSpPr>
+      <p:grpSpPr>
+        <a:xfrm>
+          <a:off x="0" y="0"/>
+          <a:ext cx="0" cy="0"/>
+          <a:chOff x="0" y="0"/>
+          <a:chExt cx="0" cy="0"/>
+        </a:xfrm>
+      </p:grpSpPr>
+      <p:sp>
+        <p:nvSpPr>
+          <p:cNvPr id="2" name="Slide Image Placeholder 1"/>
+          <p:cNvSpPr>
+            <a:spLocks noGrp="1"/>
+          </p:cNvSpPr>
+          <p:nvPr>
+            <p:ph type="sldImg" idx="2"/>
+          </p:nvPr>
+        </p:nvSpPr>
+        <p:spPr/>
+      </p:sp>
+      <p:sp>
+        <p:nvSpPr>
+          <p:cNvPr id="3" name="Notes Placeholder 2"/>
+          <p:cNvSpPr>
+            <a:spLocks noGrp="1"/>
+          </p:cNvSpPr>
+          <p:nvPr>
+            <p:ph type="body" idx="3" sz="quarter"/>
+          </p:nvPr>
+        </p:nvSpPr>
+        <p:spPr/>
+        <p:txBody>
+          <a:bodyPr/>
+          <a:lstStyle/>
+          <a:p>
+            <a:r>
+              <a:t>Give students a few minutes to answer on mini whiteboards or paper, then reveal the answers on the next slide.</a:t>
+            </a:r>
+          </a:p>
+        </p:txBody>
+      </p:sp>
+      <p:sp>
+        <p:nvSpPr>
+          <p:cNvPr id="4" name="Slide Number Placeholder 3"/>
+          <p:cNvSpPr>
+            <a:spLocks noGrp="1"/>
+          </p:cNvSpPr>
+          <p:nvPr>
+            <p:ph type="sldNum" idx="5" sz="quarter"/>
+          </p:nvPr>
+        </p:nvSpPr>
+        <p:spPr/>
+      </p:sp>
+    </p:spTree>
+  </p:cSld>
+  <p:clrMapOvr>
+    <a:masterClrMapping/>
+  </p:clrMapOvr>
+</p:notes>
+</file>
+
+<file path=ppt/notesSlides/notesSlide6.xml><?xml version="1.0" encoding="utf-8"?>
+<p:notes xmlns:a="http://schemas.openxmlformats.org/drawingml/2006/main" xmlns:p="http://schemas.openxmlformats.org/presentationml/2006/main" xmlns:r="http://schemas.openxmlformats.org/officeDocument/2006/relationships">
+  <p:cSld>
+    <p:spTree>
+      <p:nvGrpSpPr>
+        <p:cNvPr id="1" name=""/>
+        <p:cNvGrpSpPr/>
+        <p:nvPr/>
+      </p:nvGrpSpPr>
+      <p:grpSpPr>
+        <a:xfrm>
+          <a:off x="0" y="0"/>
+          <a:ext cx="0" cy="0"/>
+          <a:chOff x="0" y="0"/>
+          <a:chExt cx="0" cy="0"/>
+        </a:xfrm>
+      </p:grpSpPr>
+      <p:sp>
+        <p:nvSpPr>
+          <p:cNvPr id="2" name="Slide Image Placeholder 1"/>
+          <p:cNvSpPr>
+            <a:spLocks noGrp="1"/>
+          </p:cNvSpPr>
+          <p:nvPr>
+            <p:ph type="sldImg" idx="2"/>
+          </p:nvPr>
+        </p:nvSpPr>
+        <p:spPr/>
+      </p:sp>
+      <p:sp>
+        <p:nvSpPr>
+          <p:cNvPr id="3" name="Notes Placeholder 2"/>
+          <p:cNvSpPr>
+            <a:spLocks noGrp="1"/>
+          </p:cNvSpPr>
+          <p:nvPr>
+            <p:ph type="body" idx="3" sz="quarter"/>
+          </p:nvPr>
+        </p:nvSpPr>
+        <p:spPr/>
+        <p:txBody>
+          <a:bodyPr/>
+          <a:lstStyle/>
+          <a:p>
+            <a:r>
+              <a:t>Talk through any answers the class found difficult.</a:t>
+            </a:r>
+          </a:p>
+        </p:txBody>
+      </p:sp>
+      <p:sp>
+        <p:nvSpPr>
+          <p:cNvPr id="4" name="Slide Number Placeholder 3"/>
+          <p:cNvSpPr>
+            <a:spLocks noGrp="1"/>
+          </p:cNvSpPr>
+          <p:nvPr>
+            <p:ph type="sldNum" idx="5" sz="quarter"/>
+          </p:nvPr>
+        </p:nvSpPr>
+        <p:spPr/>
+      </p:sp>
+    </p:spTree>
+  </p:cSld>
+  <p:clrMapOvr>
+    <a:masterClrMapping/>
+  </p:clrMapOvr>
+</p:notes>
+</file>
+
+<file path=ppt/notesSlides/notesSlide7.xml><?xml version="1.0" encoding="utf-8"?>
 <p:notes xmlns:a="http://schemas.openxmlformats.org/drawingml/2006/main" xmlns:p="http://schemas.openxmlformats.org/presentationml/2006/main" xmlns:r="http://schemas.openxmlformats.org/officeDocument/2006/relationships">
   <p:cSld>
     <p:spTree>
@@ -4052,6 +4313,3455 @@
     <p:bg>
       <p:bgPr>
         <a:solidFill>
+          <a:srgbClr val="FFFFFF"/>
+        </a:solidFill>
+        <a:effectLst/>
+      </p:bgPr>
+    </p:bg>
+    <p:spTree>
+      <p:nvGrpSpPr>
+        <p:cNvPr id="1" name=""/>
+        <p:cNvGrpSpPr/>
+        <p:nvPr/>
+      </p:nvGrpSpPr>
+      <p:grpSpPr/>
+      <p:sp>
+        <p:nvSpPr>
+          <p:cNvPr id="2" name="TextBox 1"/>
+          <p:cNvSpPr txBox="1"/>
+          <p:nvPr/>
+        </p:nvSpPr>
+        <p:spPr>
+          <a:xfrm>
+            <a:off x="548640" y="320040"/>
+            <a:ext cx="11094415" cy="274320"/>
+          </a:xfrm>
+          <a:prstGeom prst="rect">
+            <a:avLst/>
+          </a:prstGeom>
+          <a:noFill/>
+        </p:spPr>
+        <p:txBody>
+          <a:bodyPr wrap="square" anchor="t" lIns="0" rIns="0" tIns="0" bIns="0"/>
+          <a:lstStyle/>
+          <a:p>
+            <a:pPr algn="l"/>
+            <a:r>
+              <a:rPr sz="1100" b="1" i="0">
+                <a:solidFill>
+                  <a:srgbClr val="54595D"/>
+                </a:solidFill>
+                <a:latin typeface="Calibri"/>
+              </a:rPr>
+              <a:t>ENGINEERING CORE  ·  Core topic 8</a:t>
+            </a:r>
+          </a:p>
+        </p:txBody>
+      </p:sp>
+      <p:sp>
+        <p:nvSpPr>
+          <p:cNvPr id="3" name="TextBox 2"/>
+          <p:cNvSpPr txBox="1"/>
+          <p:nvPr/>
+        </p:nvSpPr>
+        <p:spPr>
+          <a:xfrm>
+            <a:off x="548640" y="566928"/>
+            <a:ext cx="11094415" cy="822960"/>
+          </a:xfrm>
+          <a:prstGeom prst="rect">
+            <a:avLst/>
+          </a:prstGeom>
+          <a:noFill/>
+        </p:spPr>
+        <p:txBody>
+          <a:bodyPr wrap="square" anchor="ctr" lIns="0" rIns="0" tIns="0" bIns="0"/>
+          <a:lstStyle/>
+          <a:p>
+            <a:pPr algn="l"/>
+            <a:r>
+              <a:rPr sz="3200" b="1" i="0">
+                <a:solidFill>
+                  <a:srgbClr val="03306E"/>
+                </a:solidFill>
+                <a:latin typeface="Cambria"/>
+              </a:rPr>
+              <a:t>Signals</a:t>
+            </a:r>
+          </a:p>
+        </p:txBody>
+      </p:sp>
+      <p:sp>
+        <p:nvSpPr>
+          <p:cNvPr id="4" name="TextBox 3"/>
+          <p:cNvSpPr txBox="1"/>
+          <p:nvPr/>
+        </p:nvSpPr>
+        <p:spPr>
+          <a:xfrm>
+            <a:off x="548640" y="6446520"/>
+            <a:ext cx="8229600" cy="274320"/>
+          </a:xfrm>
+          <a:prstGeom prst="rect">
+            <a:avLst/>
+          </a:prstGeom>
+          <a:noFill/>
+        </p:spPr>
+        <p:txBody>
+          <a:bodyPr wrap="square" anchor="t" lIns="0" rIns="0" tIns="0" bIns="0"/>
+          <a:lstStyle/>
+          <a:p>
+            <a:pPr algn="l"/>
+            <a:r>
+              <a:rPr sz="1000" b="0" i="0">
+                <a:solidFill>
+                  <a:srgbClr val="54595D"/>
+                </a:solidFill>
+                <a:latin typeface="Calibri"/>
+              </a:rPr>
+              <a:t>Design and Development for Engineering and Manufacturing T Level  ·  Electrical and Electronic Principles</a:t>
+            </a:r>
+          </a:p>
+        </p:txBody>
+      </p:sp>
+      <p:sp>
+        <p:nvSpPr>
+          <p:cNvPr id="5" name="TextBox 4"/>
+          <p:cNvSpPr txBox="1"/>
+          <p:nvPr/>
+        </p:nvSpPr>
+        <p:spPr>
+          <a:xfrm>
+            <a:off x="10728655" y="6446520"/>
+            <a:ext cx="914400" cy="274320"/>
+          </a:xfrm>
+          <a:prstGeom prst="rect">
+            <a:avLst/>
+          </a:prstGeom>
+          <a:noFill/>
+        </p:spPr>
+        <p:txBody>
+          <a:bodyPr wrap="square" anchor="t" lIns="0" rIns="0" tIns="0" bIns="0"/>
+          <a:lstStyle/>
+          <a:p>
+            <a:pPr algn="r"/>
+            <a:r>
+              <a:rPr sz="1000" b="0" i="0">
+                <a:solidFill>
+                  <a:srgbClr val="54595D"/>
+                </a:solidFill>
+                <a:latin typeface="Calibri"/>
+              </a:rPr>
+              <a:t>10</a:t>
+            </a:r>
+          </a:p>
+        </p:txBody>
+      </p:sp>
+      <p:sp>
+        <p:nvSpPr>
+          <p:cNvPr id="6" name="TextBox 5"/>
+          <p:cNvSpPr txBox="1"/>
+          <p:nvPr/>
+        </p:nvSpPr>
+        <p:spPr>
+          <a:xfrm>
+            <a:off x="548640" y="1554480"/>
+            <a:ext cx="6720840" cy="4617720"/>
+          </a:xfrm>
+          <a:prstGeom prst="rect">
+            <a:avLst/>
+          </a:prstGeom>
+          <a:noFill/>
+        </p:spPr>
+        <p:txBody>
+          <a:bodyPr wrap="square" lIns="0" rIns="0" tIns="0" bIns="0">
+            <a:spAutoFit/>
+          </a:bodyPr>
+          <a:lstStyle/>
+          <a:p>
+            <a:pPr>
+              <a:spcAft>
+                <a:spcPts val="1260"/>
+              </a:spcAft>
+            </a:pPr>
+            <a:r>
+              <a:rPr sz="2100" b="0">
+                <a:solidFill>
+                  <a:srgbClr val="202122"/>
+                </a:solidFill>
+                <a:latin typeface="Calibri"/>
+              </a:rPr>
+              <a:t>An analogue signal varies continuously, like the voltage from a temperature sensor rising smoothly as it warms. It carries fine detail but is easily affected by noise.</a:t>
+            </a:r>
+          </a:p>
+          <a:p>
+            <a:pPr>
+              <a:spcAft>
+                <a:spcPts val="1260"/>
+              </a:spcAft>
+            </a:pPr>
+            <a:r>
+              <a:rPr sz="2100" b="0">
+                <a:solidFill>
+                  <a:srgbClr val="202122"/>
+                </a:solidFill>
+                <a:latin typeface="Calibri"/>
+              </a:rPr>
+              <a:t>A digital signal has discrete levels, usually just on (1) and off (0), like a limit switch. It resists noise and is easy for computers and PLCs to process.</a:t>
+            </a:r>
+          </a:p>
+          <a:p>
+            <a:pPr>
+              <a:spcAft>
+                <a:spcPts val="1260"/>
+              </a:spcAft>
+            </a:pPr>
+            <a:r>
+              <a:rPr sz="2100" b="0">
+                <a:solidFill>
+                  <a:srgbClr val="202122"/>
+                </a:solidFill>
+                <a:latin typeface="Calibri"/>
+              </a:rPr>
+              <a:t>Analogue-to-digital converters turn sensor readings into numbers. Fan-in and fan-out limit how many inputs and outputs a logic gate can connect to. Signals often need conditioning (filtering or amplifying).</a:t>
+            </a:r>
+          </a:p>
+        </p:txBody>
+      </p:sp>
+      <p:sp>
+        <p:nvSpPr>
+          <p:cNvPr id="7" name="Rounded Rectangle 6"/>
+          <p:cNvSpPr/>
+          <p:nvPr/>
+        </p:nvSpPr>
+        <p:spPr>
+          <a:xfrm>
+            <a:off x="7772400" y="1554480"/>
+            <a:ext cx="3867912" cy="4526280"/>
+          </a:xfrm>
+          <a:prstGeom prst="roundRect">
+            <a:avLst>
+              <a:gd name="adj" fmla="val 8000"/>
+            </a:avLst>
+          </a:prstGeom>
+          <a:solidFill>
+            <a:srgbClr val="03306E"/>
+          </a:solidFill>
+          <a:ln>
+            <a:noFill/>
+          </a:ln>
+          <a:effectLst/>
+        </p:spPr>
+        <p:style>
+          <a:lnRef idx="1">
+            <a:schemeClr val="accent1"/>
+          </a:lnRef>
+          <a:fillRef idx="3">
+            <a:schemeClr val="accent1"/>
+          </a:fillRef>
+          <a:effectRef idx="2">
+            <a:schemeClr val="accent1"/>
+          </a:effectRef>
+          <a:fontRef idx="minor">
+            <a:schemeClr val="lt1"/>
+          </a:fontRef>
+        </p:style>
+        <p:txBody>
+          <a:bodyPr rtlCol="0" anchor="ctr"/>
+          <a:lstStyle/>
+          <a:p/>
+        </p:txBody>
+      </p:sp>
+      <p:sp>
+        <p:nvSpPr>
+          <p:cNvPr id="8" name="Oval 7"/>
+          <p:cNvSpPr/>
+          <p:nvPr/>
+        </p:nvSpPr>
+        <p:spPr>
+          <a:xfrm>
+            <a:off x="8046720" y="1828800"/>
+            <a:ext cx="548640" cy="548640"/>
+          </a:xfrm>
+          <a:prstGeom prst="ellipse">
+            <a:avLst/>
+          </a:prstGeom>
+          <a:solidFill>
+            <a:srgbClr val="F2B705"/>
+          </a:solidFill>
+          <a:ln>
+            <a:noFill/>
+          </a:ln>
+          <a:effectLst/>
+        </p:spPr>
+        <p:style>
+          <a:lnRef idx="1">
+            <a:schemeClr val="accent1"/>
+          </a:lnRef>
+          <a:fillRef idx="3">
+            <a:schemeClr val="accent1"/>
+          </a:fillRef>
+          <a:effectRef idx="2">
+            <a:schemeClr val="accent1"/>
+          </a:effectRef>
+          <a:fontRef idx="minor">
+            <a:schemeClr val="lt1"/>
+          </a:fontRef>
+        </p:style>
+        <p:txBody>
+          <a:bodyPr rtlCol="0" anchor="ctr" lIns="0" rIns="0" tIns="0" bIns="0"/>
+          <a:lstStyle/>
+          <a:p>
+            <a:pPr algn="ctr"/>
+            <a:r>
+              <a:rPr sz="1300" b="1">
+                <a:solidFill>
+                  <a:srgbClr val="202122"/>
+                </a:solidFill>
+                <a:latin typeface="Calibri"/>
+              </a:rPr>
+              <a:t>e.g.</a:t>
+            </a:r>
+          </a:p>
+        </p:txBody>
+      </p:sp>
+      <p:sp>
+        <p:nvSpPr>
+          <p:cNvPr id="9" name="TextBox 8"/>
+          <p:cNvSpPr txBox="1"/>
+          <p:nvPr/>
+        </p:nvSpPr>
+        <p:spPr>
+          <a:xfrm>
+            <a:off x="8046720" y="2560320"/>
+            <a:ext cx="3291840" cy="365760"/>
+          </a:xfrm>
+          <a:prstGeom prst="rect">
+            <a:avLst/>
+          </a:prstGeom>
+          <a:noFill/>
+        </p:spPr>
+        <p:txBody>
+          <a:bodyPr wrap="square" anchor="t" lIns="0" rIns="0" tIns="0" bIns="0"/>
+          <a:lstStyle/>
+          <a:p>
+            <a:pPr algn="l"/>
+            <a:r>
+              <a:rPr sz="1300" b="1" i="0">
+                <a:solidFill>
+                  <a:srgbClr val="A9C8F0"/>
+                </a:solidFill>
+                <a:latin typeface="Calibri"/>
+              </a:rPr>
+              <a:t>EXAMPLE</a:t>
+            </a:r>
+          </a:p>
+        </p:txBody>
+      </p:sp>
+      <p:sp>
+        <p:nvSpPr>
+          <p:cNvPr id="10" name="TextBox 9"/>
+          <p:cNvSpPr txBox="1"/>
+          <p:nvPr/>
+        </p:nvSpPr>
+        <p:spPr>
+          <a:xfrm>
+            <a:off x="8046720" y="2971800"/>
+            <a:ext cx="3291840" cy="2971800"/>
+          </a:xfrm>
+          <a:prstGeom prst="rect">
+            <a:avLst/>
+          </a:prstGeom>
+          <a:noFill/>
+        </p:spPr>
+        <p:txBody>
+          <a:bodyPr wrap="square" anchor="t" lIns="0" rIns="0" tIns="0" bIns="0"/>
+          <a:lstStyle/>
+          <a:p>
+            <a:pPr algn="l"/>
+            <a:r>
+              <a:rPr sz="1900" b="0" i="0">
+                <a:solidFill>
+                  <a:srgbClr val="FFFFFF"/>
+                </a:solidFill>
+                <a:latin typeface="Cambria"/>
+              </a:rPr>
+              <a:t>A car's fuel gauge sender produces an analogue voltage; the engine computer converts it to a digital value to display.</a:t>
+            </a:r>
+          </a:p>
+        </p:txBody>
+      </p:sp>
+    </p:spTree>
+  </p:cSld>
+  <p:clrMapOvr>
+    <a:masterClrMapping/>
+  </p:clrMapOvr>
+</p:sld>
+</file>
+
+<file path=ppt/slides/slide11.xml><?xml version="1.0" encoding="utf-8"?>
+<p:sld xmlns:a="http://schemas.openxmlformats.org/drawingml/2006/main" xmlns:p="http://schemas.openxmlformats.org/presentationml/2006/main" xmlns:r="http://schemas.openxmlformats.org/officeDocument/2006/relationships">
+  <p:cSld>
+    <p:bg>
+      <p:bgPr>
+        <a:solidFill>
+          <a:srgbClr val="FFFFFF"/>
+        </a:solidFill>
+        <a:effectLst/>
+      </p:bgPr>
+    </p:bg>
+    <p:spTree>
+      <p:nvGrpSpPr>
+        <p:cNvPr id="1" name=""/>
+        <p:cNvGrpSpPr/>
+        <p:nvPr/>
+      </p:nvGrpSpPr>
+      <p:grpSpPr/>
+      <p:sp>
+        <p:nvSpPr>
+          <p:cNvPr id="2" name="TextBox 1"/>
+          <p:cNvSpPr txBox="1"/>
+          <p:nvPr/>
+        </p:nvSpPr>
+        <p:spPr>
+          <a:xfrm>
+            <a:off x="548640" y="320040"/>
+            <a:ext cx="11094415" cy="274320"/>
+          </a:xfrm>
+          <a:prstGeom prst="rect">
+            <a:avLst/>
+          </a:prstGeom>
+          <a:noFill/>
+        </p:spPr>
+        <p:txBody>
+          <a:bodyPr wrap="square" anchor="t" lIns="0" rIns="0" tIns="0" bIns="0"/>
+          <a:lstStyle/>
+          <a:p>
+            <a:pPr algn="l"/>
+            <a:r>
+              <a:rPr sz="1100" b="1" i="0">
+                <a:solidFill>
+                  <a:srgbClr val="54595D"/>
+                </a:solidFill>
+                <a:latin typeface="Calibri"/>
+              </a:rPr>
+              <a:t>ENGINEERING CORE  ·  Core topic 8</a:t>
+            </a:r>
+          </a:p>
+        </p:txBody>
+      </p:sp>
+      <p:sp>
+        <p:nvSpPr>
+          <p:cNvPr id="3" name="TextBox 2"/>
+          <p:cNvSpPr txBox="1"/>
+          <p:nvPr/>
+        </p:nvSpPr>
+        <p:spPr>
+          <a:xfrm>
+            <a:off x="548640" y="566928"/>
+            <a:ext cx="11094415" cy="822960"/>
+          </a:xfrm>
+          <a:prstGeom prst="rect">
+            <a:avLst/>
+          </a:prstGeom>
+          <a:noFill/>
+        </p:spPr>
+        <p:txBody>
+          <a:bodyPr wrap="square" anchor="ctr" lIns="0" rIns="0" tIns="0" bIns="0"/>
+          <a:lstStyle/>
+          <a:p>
+            <a:pPr algn="l"/>
+            <a:r>
+              <a:rPr sz="3200" b="1" i="0">
+                <a:solidFill>
+                  <a:srgbClr val="03306E"/>
+                </a:solidFill>
+                <a:latin typeface="Cambria"/>
+              </a:rPr>
+              <a:t>Signals</a:t>
+            </a:r>
+          </a:p>
+        </p:txBody>
+      </p:sp>
+      <p:sp>
+        <p:nvSpPr>
+          <p:cNvPr id="4" name="TextBox 3"/>
+          <p:cNvSpPr txBox="1"/>
+          <p:nvPr/>
+        </p:nvSpPr>
+        <p:spPr>
+          <a:xfrm>
+            <a:off x="548640" y="6446520"/>
+            <a:ext cx="8229600" cy="274320"/>
+          </a:xfrm>
+          <a:prstGeom prst="rect">
+            <a:avLst/>
+          </a:prstGeom>
+          <a:noFill/>
+        </p:spPr>
+        <p:txBody>
+          <a:bodyPr wrap="square" anchor="t" lIns="0" rIns="0" tIns="0" bIns="0"/>
+          <a:lstStyle/>
+          <a:p>
+            <a:pPr algn="l"/>
+            <a:r>
+              <a:rPr sz="1000" b="0" i="0">
+                <a:solidFill>
+                  <a:srgbClr val="54595D"/>
+                </a:solidFill>
+                <a:latin typeface="Calibri"/>
+              </a:rPr>
+              <a:t>Design and Development for Engineering and Manufacturing T Level  ·  Electrical and Electronic Principles</a:t>
+            </a:r>
+          </a:p>
+        </p:txBody>
+      </p:sp>
+      <p:sp>
+        <p:nvSpPr>
+          <p:cNvPr id="5" name="TextBox 4"/>
+          <p:cNvSpPr txBox="1"/>
+          <p:nvPr/>
+        </p:nvSpPr>
+        <p:spPr>
+          <a:xfrm>
+            <a:off x="10728655" y="6446520"/>
+            <a:ext cx="914400" cy="274320"/>
+          </a:xfrm>
+          <a:prstGeom prst="rect">
+            <a:avLst/>
+          </a:prstGeom>
+          <a:noFill/>
+        </p:spPr>
+        <p:txBody>
+          <a:bodyPr wrap="square" anchor="t" lIns="0" rIns="0" tIns="0" bIns="0"/>
+          <a:lstStyle/>
+          <a:p>
+            <a:pPr algn="r"/>
+            <a:r>
+              <a:rPr sz="1000" b="0" i="0">
+                <a:solidFill>
+                  <a:srgbClr val="54595D"/>
+                </a:solidFill>
+                <a:latin typeface="Calibri"/>
+              </a:rPr>
+              <a:t>11</a:t>
+            </a:r>
+          </a:p>
+        </p:txBody>
+      </p:sp>
+      <p:sp>
+        <p:nvSpPr>
+          <p:cNvPr id="6" name="Rounded Rectangle 5"/>
+          <p:cNvSpPr/>
+          <p:nvPr/>
+        </p:nvSpPr>
+        <p:spPr>
+          <a:xfrm>
+            <a:off x="548640" y="1600200"/>
+            <a:ext cx="5364327" cy="640080"/>
+          </a:xfrm>
+          <a:prstGeom prst="roundRect">
+            <a:avLst>
+              <a:gd name="adj" fmla="val 15000"/>
+            </a:avLst>
+          </a:prstGeom>
+          <a:solidFill>
+            <a:srgbClr val="03306E"/>
+          </a:solidFill>
+          <a:ln>
+            <a:noFill/>
+          </a:ln>
+          <a:effectLst/>
+        </p:spPr>
+        <p:style>
+          <a:lnRef idx="1">
+            <a:schemeClr val="accent1"/>
+          </a:lnRef>
+          <a:fillRef idx="3">
+            <a:schemeClr val="accent1"/>
+          </a:fillRef>
+          <a:effectRef idx="2">
+            <a:schemeClr val="accent1"/>
+          </a:effectRef>
+          <a:fontRef idx="minor">
+            <a:schemeClr val="lt1"/>
+          </a:fontRef>
+        </p:style>
+        <p:txBody>
+          <a:bodyPr rtlCol="0" anchor="ctr"/>
+          <a:lstStyle/>
+          <a:p/>
+        </p:txBody>
+      </p:sp>
+      <p:sp>
+        <p:nvSpPr>
+          <p:cNvPr id="7" name="TextBox 6"/>
+          <p:cNvSpPr txBox="1"/>
+          <p:nvPr/>
+        </p:nvSpPr>
+        <p:spPr>
+          <a:xfrm>
+            <a:off x="777240" y="1600200"/>
+            <a:ext cx="4907127" cy="640080"/>
+          </a:xfrm>
+          <a:prstGeom prst="rect">
+            <a:avLst/>
+          </a:prstGeom>
+          <a:noFill/>
+        </p:spPr>
+        <p:txBody>
+          <a:bodyPr wrap="square" anchor="ctr" lIns="0" rIns="0" tIns="0" bIns="0"/>
+          <a:lstStyle/>
+          <a:p>
+            <a:pPr algn="l"/>
+            <a:r>
+              <a:rPr sz="2000" b="1" i="0">
+                <a:solidFill>
+                  <a:srgbClr val="FFFFFF"/>
+                </a:solidFill>
+                <a:latin typeface="Calibri"/>
+              </a:rPr>
+              <a:t>Analogue</a:t>
+            </a:r>
+          </a:p>
+        </p:txBody>
+      </p:sp>
+      <p:sp>
+        <p:nvSpPr>
+          <p:cNvPr id="8" name="Rounded Rectangle 7"/>
+          <p:cNvSpPr/>
+          <p:nvPr/>
+        </p:nvSpPr>
+        <p:spPr>
+          <a:xfrm>
+            <a:off x="548640" y="2377440"/>
+            <a:ext cx="5364327" cy="3794760"/>
+          </a:xfrm>
+          <a:prstGeom prst="roundRect">
+            <a:avLst>
+              <a:gd name="adj" fmla="val 4000"/>
+            </a:avLst>
+          </a:prstGeom>
+          <a:solidFill>
+            <a:srgbClr val="EAF3FF"/>
+          </a:solidFill>
+          <a:ln>
+            <a:noFill/>
+          </a:ln>
+          <a:effectLst/>
+        </p:spPr>
+        <p:style>
+          <a:lnRef idx="1">
+            <a:schemeClr val="accent1"/>
+          </a:lnRef>
+          <a:fillRef idx="3">
+            <a:schemeClr val="accent1"/>
+          </a:fillRef>
+          <a:effectRef idx="2">
+            <a:schemeClr val="accent1"/>
+          </a:effectRef>
+          <a:fontRef idx="minor">
+            <a:schemeClr val="lt1"/>
+          </a:fontRef>
+        </p:style>
+        <p:txBody>
+          <a:bodyPr rtlCol="0" anchor="ctr"/>
+          <a:lstStyle/>
+          <a:p/>
+        </p:txBody>
+      </p:sp>
+      <p:sp>
+        <p:nvSpPr>
+          <p:cNvPr id="9" name="TextBox 8"/>
+          <p:cNvSpPr txBox="1"/>
+          <p:nvPr/>
+        </p:nvSpPr>
+        <p:spPr>
+          <a:xfrm>
+            <a:off x="822959" y="2606040"/>
+            <a:ext cx="4815687" cy="3337560"/>
+          </a:xfrm>
+          <a:prstGeom prst="rect">
+            <a:avLst/>
+          </a:prstGeom>
+          <a:noFill/>
+        </p:spPr>
+        <p:txBody>
+          <a:bodyPr wrap="square" lIns="0" rIns="0" tIns="0" bIns="0">
+            <a:spAutoFit/>
+          </a:bodyPr>
+          <a:lstStyle/>
+          <a:p>
+            <a:pPr marL="274320" indent="-274320">
+              <a:spcAft>
+                <a:spcPts val="990"/>
+              </a:spcAft>
+              <a:buClr>
+                <a:srgbClr val="0645AD"/>
+              </a:buClr>
+              <a:buFont typeface="Arial"/>
+              <a:buChar char="•"/>
+            </a:pPr>
+            <a:r>
+              <a:rPr sz="2200" b="0">
+                <a:solidFill>
+                  <a:srgbClr val="202122"/>
+                </a:solidFill>
+                <a:latin typeface="Calibri"/>
+              </a:rPr>
+              <a:t>Continuously variable</a:t>
+            </a:r>
+          </a:p>
+          <a:p>
+            <a:pPr marL="274320" indent="-274320">
+              <a:spcAft>
+                <a:spcPts val="990"/>
+              </a:spcAft>
+              <a:buClr>
+                <a:srgbClr val="0645AD"/>
+              </a:buClr>
+              <a:buFont typeface="Arial"/>
+              <a:buChar char="•"/>
+            </a:pPr>
+            <a:r>
+              <a:rPr sz="2200" b="0">
+                <a:solidFill>
+                  <a:srgbClr val="202122"/>
+                </a:solidFill>
+                <a:latin typeface="Calibri"/>
+              </a:rPr>
+              <a:t>e.g. a thermistor's voltage</a:t>
+            </a:r>
+          </a:p>
+          <a:p>
+            <a:pPr marL="274320" indent="-274320">
+              <a:spcAft>
+                <a:spcPts val="990"/>
+              </a:spcAft>
+              <a:buClr>
+                <a:srgbClr val="0645AD"/>
+              </a:buClr>
+              <a:buFont typeface="Arial"/>
+              <a:buChar char="•"/>
+            </a:pPr>
+            <a:r>
+              <a:rPr sz="2200" b="0">
+                <a:solidFill>
+                  <a:srgbClr val="202122"/>
+                </a:solidFill>
+                <a:latin typeface="Calibri"/>
+              </a:rPr>
+              <a:t>Affected by noise</a:t>
+            </a:r>
+          </a:p>
+        </p:txBody>
+      </p:sp>
+      <p:sp>
+        <p:nvSpPr>
+          <p:cNvPr id="10" name="Rounded Rectangle 9"/>
+          <p:cNvSpPr/>
+          <p:nvPr/>
+        </p:nvSpPr>
+        <p:spPr>
+          <a:xfrm>
+            <a:off x="6278727" y="1600200"/>
+            <a:ext cx="5364327" cy="640080"/>
+          </a:xfrm>
+          <a:prstGeom prst="roundRect">
+            <a:avLst>
+              <a:gd name="adj" fmla="val 15000"/>
+            </a:avLst>
+          </a:prstGeom>
+          <a:solidFill>
+            <a:srgbClr val="0645AD"/>
+          </a:solidFill>
+          <a:ln>
+            <a:noFill/>
+          </a:ln>
+          <a:effectLst/>
+        </p:spPr>
+        <p:style>
+          <a:lnRef idx="1">
+            <a:schemeClr val="accent1"/>
+          </a:lnRef>
+          <a:fillRef idx="3">
+            <a:schemeClr val="accent1"/>
+          </a:fillRef>
+          <a:effectRef idx="2">
+            <a:schemeClr val="accent1"/>
+          </a:effectRef>
+          <a:fontRef idx="minor">
+            <a:schemeClr val="lt1"/>
+          </a:fontRef>
+        </p:style>
+        <p:txBody>
+          <a:bodyPr rtlCol="0" anchor="ctr"/>
+          <a:lstStyle/>
+          <a:p/>
+        </p:txBody>
+      </p:sp>
+      <p:sp>
+        <p:nvSpPr>
+          <p:cNvPr id="11" name="TextBox 10"/>
+          <p:cNvSpPr txBox="1"/>
+          <p:nvPr/>
+        </p:nvSpPr>
+        <p:spPr>
+          <a:xfrm>
+            <a:off x="6507327" y="1600200"/>
+            <a:ext cx="4907127" cy="640080"/>
+          </a:xfrm>
+          <a:prstGeom prst="rect">
+            <a:avLst/>
+          </a:prstGeom>
+          <a:noFill/>
+        </p:spPr>
+        <p:txBody>
+          <a:bodyPr wrap="square" anchor="ctr" lIns="0" rIns="0" tIns="0" bIns="0"/>
+          <a:lstStyle/>
+          <a:p>
+            <a:pPr algn="l"/>
+            <a:r>
+              <a:rPr sz="2000" b="1" i="0">
+                <a:solidFill>
+                  <a:srgbClr val="FFFFFF"/>
+                </a:solidFill>
+                <a:latin typeface="Calibri"/>
+              </a:rPr>
+              <a:t>Digital</a:t>
+            </a:r>
+          </a:p>
+        </p:txBody>
+      </p:sp>
+      <p:sp>
+        <p:nvSpPr>
+          <p:cNvPr id="12" name="Rounded Rectangle 11"/>
+          <p:cNvSpPr/>
+          <p:nvPr/>
+        </p:nvSpPr>
+        <p:spPr>
+          <a:xfrm>
+            <a:off x="6278727" y="2377440"/>
+            <a:ext cx="5364327" cy="3794760"/>
+          </a:xfrm>
+          <a:prstGeom prst="roundRect">
+            <a:avLst>
+              <a:gd name="adj" fmla="val 4000"/>
+            </a:avLst>
+          </a:prstGeom>
+          <a:solidFill>
+            <a:srgbClr val="EAF3FF"/>
+          </a:solidFill>
+          <a:ln>
+            <a:noFill/>
+          </a:ln>
+          <a:effectLst/>
+        </p:spPr>
+        <p:style>
+          <a:lnRef idx="1">
+            <a:schemeClr val="accent1"/>
+          </a:lnRef>
+          <a:fillRef idx="3">
+            <a:schemeClr val="accent1"/>
+          </a:fillRef>
+          <a:effectRef idx="2">
+            <a:schemeClr val="accent1"/>
+          </a:effectRef>
+          <a:fontRef idx="minor">
+            <a:schemeClr val="lt1"/>
+          </a:fontRef>
+        </p:style>
+        <p:txBody>
+          <a:bodyPr rtlCol="0" anchor="ctr"/>
+          <a:lstStyle/>
+          <a:p/>
+        </p:txBody>
+      </p:sp>
+      <p:sp>
+        <p:nvSpPr>
+          <p:cNvPr id="13" name="TextBox 12"/>
+          <p:cNvSpPr txBox="1"/>
+          <p:nvPr/>
+        </p:nvSpPr>
+        <p:spPr>
+          <a:xfrm>
+            <a:off x="6553047" y="2606040"/>
+            <a:ext cx="4815687" cy="3337560"/>
+          </a:xfrm>
+          <a:prstGeom prst="rect">
+            <a:avLst/>
+          </a:prstGeom>
+          <a:noFill/>
+        </p:spPr>
+        <p:txBody>
+          <a:bodyPr wrap="square" lIns="0" rIns="0" tIns="0" bIns="0">
+            <a:spAutoFit/>
+          </a:bodyPr>
+          <a:lstStyle/>
+          <a:p>
+            <a:pPr marL="274320" indent="-274320">
+              <a:spcAft>
+                <a:spcPts val="990"/>
+              </a:spcAft>
+              <a:buClr>
+                <a:srgbClr val="0645AD"/>
+              </a:buClr>
+              <a:buFont typeface="Arial"/>
+              <a:buChar char="•"/>
+            </a:pPr>
+            <a:r>
+              <a:rPr sz="2200" b="1">
+                <a:solidFill>
+                  <a:srgbClr val="202122"/>
+                </a:solidFill>
+                <a:latin typeface="Calibri"/>
+              </a:rPr>
+              <a:t>Discrete levels:</a:t>
+            </a:r>
+            <a:r>
+              <a:rPr sz="2200" b="0">
+                <a:solidFill>
+                  <a:srgbClr val="202122"/>
+                </a:solidFill>
+                <a:latin typeface="Calibri"/>
+              </a:rPr>
+              <a:t> on or off</a:t>
+            </a:r>
+          </a:p>
+          <a:p>
+            <a:pPr marL="274320" indent="-274320">
+              <a:spcAft>
+                <a:spcPts val="990"/>
+              </a:spcAft>
+              <a:buClr>
+                <a:srgbClr val="0645AD"/>
+              </a:buClr>
+              <a:buFont typeface="Arial"/>
+              <a:buChar char="•"/>
+            </a:pPr>
+            <a:r>
+              <a:rPr sz="2200" b="0">
+                <a:solidFill>
+                  <a:srgbClr val="202122"/>
+                </a:solidFill>
+                <a:latin typeface="Calibri"/>
+              </a:rPr>
+              <a:t>e.g. a limit switch</a:t>
+            </a:r>
+          </a:p>
+          <a:p>
+            <a:pPr marL="274320" indent="-274320">
+              <a:spcAft>
+                <a:spcPts val="990"/>
+              </a:spcAft>
+              <a:buClr>
+                <a:srgbClr val="0645AD"/>
+              </a:buClr>
+              <a:buFont typeface="Arial"/>
+              <a:buChar char="•"/>
+            </a:pPr>
+            <a:r>
+              <a:rPr sz="2200" b="0">
+                <a:solidFill>
+                  <a:srgbClr val="202122"/>
+                </a:solidFill>
+                <a:latin typeface="Calibri"/>
+              </a:rPr>
+              <a:t>Robust, easy to process</a:t>
+            </a:r>
+          </a:p>
+          <a:p>
+            <a:pPr marL="274320" indent="-274320">
+              <a:spcAft>
+                <a:spcPts val="990"/>
+              </a:spcAft>
+              <a:buClr>
+                <a:srgbClr val="0645AD"/>
+              </a:buClr>
+              <a:buFont typeface="Arial"/>
+              <a:buChar char="•"/>
+            </a:pPr>
+            <a:r>
+              <a:rPr sz="2200" b="0">
+                <a:solidFill>
+                  <a:srgbClr val="202122"/>
+                </a:solidFill>
+                <a:latin typeface="Calibri"/>
+              </a:rPr>
+              <a:t>Fan in / fan out limits how many gates connect</a:t>
+            </a:r>
+          </a:p>
+        </p:txBody>
+      </p:sp>
+    </p:spTree>
+  </p:cSld>
+  <p:clrMapOvr>
+    <a:masterClrMapping/>
+  </p:clrMapOvr>
+</p:sld>
+</file>
+
+<file path=ppt/slides/slide12.xml><?xml version="1.0" encoding="utf-8"?>
+<p:sld xmlns:a="http://schemas.openxmlformats.org/drawingml/2006/main" xmlns:p="http://schemas.openxmlformats.org/presentationml/2006/main" xmlns:r="http://schemas.openxmlformats.org/officeDocument/2006/relationships">
+  <p:cSld>
+    <p:bg>
+      <p:bgPr>
+        <a:solidFill>
+          <a:srgbClr val="FFFFFF"/>
+        </a:solidFill>
+        <a:effectLst/>
+      </p:bgPr>
+    </p:bg>
+    <p:spTree>
+      <p:nvGrpSpPr>
+        <p:cNvPr id="1" name=""/>
+        <p:cNvGrpSpPr/>
+        <p:nvPr/>
+      </p:nvGrpSpPr>
+      <p:grpSpPr/>
+      <p:sp>
+        <p:nvSpPr>
+          <p:cNvPr id="2" name="TextBox 1"/>
+          <p:cNvSpPr txBox="1"/>
+          <p:nvPr/>
+        </p:nvSpPr>
+        <p:spPr>
+          <a:xfrm>
+            <a:off x="548640" y="320040"/>
+            <a:ext cx="11094415" cy="274320"/>
+          </a:xfrm>
+          <a:prstGeom prst="rect">
+            <a:avLst/>
+          </a:prstGeom>
+          <a:noFill/>
+        </p:spPr>
+        <p:txBody>
+          <a:bodyPr wrap="square" anchor="t" lIns="0" rIns="0" tIns="0" bIns="0"/>
+          <a:lstStyle/>
+          <a:p>
+            <a:pPr algn="l"/>
+            <a:r>
+              <a:rPr sz="1100" b="1" i="0">
+                <a:solidFill>
+                  <a:srgbClr val="54595D"/>
+                </a:solidFill>
+                <a:latin typeface="Calibri"/>
+              </a:rPr>
+              <a:t>ENGINEERING CORE  ·  Core topic 8</a:t>
+            </a:r>
+          </a:p>
+        </p:txBody>
+      </p:sp>
+      <p:sp>
+        <p:nvSpPr>
+          <p:cNvPr id="3" name="TextBox 2"/>
+          <p:cNvSpPr txBox="1"/>
+          <p:nvPr/>
+        </p:nvSpPr>
+        <p:spPr>
+          <a:xfrm>
+            <a:off x="548640" y="566928"/>
+            <a:ext cx="11094415" cy="822960"/>
+          </a:xfrm>
+          <a:prstGeom prst="rect">
+            <a:avLst/>
+          </a:prstGeom>
+          <a:noFill/>
+        </p:spPr>
+        <p:txBody>
+          <a:bodyPr wrap="square" anchor="ctr" lIns="0" rIns="0" tIns="0" bIns="0"/>
+          <a:lstStyle/>
+          <a:p>
+            <a:pPr algn="l"/>
+            <a:r>
+              <a:rPr sz="3200" b="1" i="0">
+                <a:solidFill>
+                  <a:srgbClr val="03306E"/>
+                </a:solidFill>
+                <a:latin typeface="Cambria"/>
+              </a:rPr>
+              <a:t>Quick check: Signals</a:t>
+            </a:r>
+          </a:p>
+        </p:txBody>
+      </p:sp>
+      <p:sp>
+        <p:nvSpPr>
+          <p:cNvPr id="4" name="TextBox 3"/>
+          <p:cNvSpPr txBox="1"/>
+          <p:nvPr/>
+        </p:nvSpPr>
+        <p:spPr>
+          <a:xfrm>
+            <a:off x="548640" y="6446520"/>
+            <a:ext cx="8229600" cy="274320"/>
+          </a:xfrm>
+          <a:prstGeom prst="rect">
+            <a:avLst/>
+          </a:prstGeom>
+          <a:noFill/>
+        </p:spPr>
+        <p:txBody>
+          <a:bodyPr wrap="square" anchor="t" lIns="0" rIns="0" tIns="0" bIns="0"/>
+          <a:lstStyle/>
+          <a:p>
+            <a:pPr algn="l"/>
+            <a:r>
+              <a:rPr sz="1000" b="0" i="0">
+                <a:solidFill>
+                  <a:srgbClr val="54595D"/>
+                </a:solidFill>
+                <a:latin typeface="Calibri"/>
+              </a:rPr>
+              <a:t>Design and Development for Engineering and Manufacturing T Level  ·  Electrical and Electronic Principles</a:t>
+            </a:r>
+          </a:p>
+        </p:txBody>
+      </p:sp>
+      <p:sp>
+        <p:nvSpPr>
+          <p:cNvPr id="5" name="TextBox 4"/>
+          <p:cNvSpPr txBox="1"/>
+          <p:nvPr/>
+        </p:nvSpPr>
+        <p:spPr>
+          <a:xfrm>
+            <a:off x="10728655" y="6446520"/>
+            <a:ext cx="914400" cy="274320"/>
+          </a:xfrm>
+          <a:prstGeom prst="rect">
+            <a:avLst/>
+          </a:prstGeom>
+          <a:noFill/>
+        </p:spPr>
+        <p:txBody>
+          <a:bodyPr wrap="square" anchor="t" lIns="0" rIns="0" tIns="0" bIns="0"/>
+          <a:lstStyle/>
+          <a:p>
+            <a:pPr algn="r"/>
+            <a:r>
+              <a:rPr sz="1000" b="0" i="0">
+                <a:solidFill>
+                  <a:srgbClr val="54595D"/>
+                </a:solidFill>
+                <a:latin typeface="Calibri"/>
+              </a:rPr>
+              <a:t>12</a:t>
+            </a:r>
+          </a:p>
+        </p:txBody>
+      </p:sp>
+      <p:sp>
+        <p:nvSpPr>
+          <p:cNvPr id="6" name="Oval 5"/>
+          <p:cNvSpPr/>
+          <p:nvPr/>
+        </p:nvSpPr>
+        <p:spPr>
+          <a:xfrm>
+            <a:off x="548640" y="1691640"/>
+            <a:ext cx="502920" cy="502920"/>
+          </a:xfrm>
+          <a:prstGeom prst="ellipse">
+            <a:avLst/>
+          </a:prstGeom>
+          <a:solidFill>
+            <a:srgbClr val="F2B705"/>
+          </a:solidFill>
+          <a:ln>
+            <a:noFill/>
+          </a:ln>
+          <a:effectLst/>
+        </p:spPr>
+        <p:style>
+          <a:lnRef idx="1">
+            <a:schemeClr val="accent1"/>
+          </a:lnRef>
+          <a:fillRef idx="3">
+            <a:schemeClr val="accent1"/>
+          </a:fillRef>
+          <a:effectRef idx="2">
+            <a:schemeClr val="accent1"/>
+          </a:effectRef>
+          <a:fontRef idx="minor">
+            <a:schemeClr val="lt1"/>
+          </a:fontRef>
+        </p:style>
+        <p:txBody>
+          <a:bodyPr rtlCol="0" anchor="ctr" lIns="0" rIns="0" tIns="0" bIns="0"/>
+          <a:lstStyle/>
+          <a:p>
+            <a:pPr algn="ctr"/>
+            <a:r>
+              <a:rPr sz="1600" b="1">
+                <a:solidFill>
+                  <a:srgbClr val="202122"/>
+                </a:solidFill>
+                <a:latin typeface="Calibri"/>
+              </a:rPr>
+              <a:t>1</a:t>
+            </a:r>
+          </a:p>
+        </p:txBody>
+      </p:sp>
+      <p:sp>
+        <p:nvSpPr>
+          <p:cNvPr id="7" name="TextBox 6"/>
+          <p:cNvSpPr txBox="1"/>
+          <p:nvPr/>
+        </p:nvSpPr>
+        <p:spPr>
+          <a:xfrm>
+            <a:off x="1371600" y="1645920"/>
+            <a:ext cx="10271455" cy="1188720"/>
+          </a:xfrm>
+          <a:prstGeom prst="rect">
+            <a:avLst/>
+          </a:prstGeom>
+          <a:noFill/>
+        </p:spPr>
+        <p:txBody>
+          <a:bodyPr wrap="square" anchor="t" lIns="0" rIns="0" tIns="0" bIns="0"/>
+          <a:lstStyle/>
+          <a:p>
+            <a:pPr algn="l"/>
+            <a:r>
+              <a:rPr sz="2400" b="0" i="0">
+                <a:solidFill>
+                  <a:srgbClr val="202122"/>
+                </a:solidFill>
+                <a:latin typeface="Calibri"/>
+              </a:rPr>
+              <a:t>What is an analogue signal?</a:t>
+            </a:r>
+          </a:p>
+        </p:txBody>
+      </p:sp>
+      <p:sp>
+        <p:nvSpPr>
+          <p:cNvPr id="8" name="Oval 7"/>
+          <p:cNvSpPr/>
+          <p:nvPr/>
+        </p:nvSpPr>
+        <p:spPr>
+          <a:xfrm>
+            <a:off x="548640" y="3108960"/>
+            <a:ext cx="502920" cy="502920"/>
+          </a:xfrm>
+          <a:prstGeom prst="ellipse">
+            <a:avLst/>
+          </a:prstGeom>
+          <a:solidFill>
+            <a:srgbClr val="F2B705"/>
+          </a:solidFill>
+          <a:ln>
+            <a:noFill/>
+          </a:ln>
+          <a:effectLst/>
+        </p:spPr>
+        <p:style>
+          <a:lnRef idx="1">
+            <a:schemeClr val="accent1"/>
+          </a:lnRef>
+          <a:fillRef idx="3">
+            <a:schemeClr val="accent1"/>
+          </a:fillRef>
+          <a:effectRef idx="2">
+            <a:schemeClr val="accent1"/>
+          </a:effectRef>
+          <a:fontRef idx="minor">
+            <a:schemeClr val="lt1"/>
+          </a:fontRef>
+        </p:style>
+        <p:txBody>
+          <a:bodyPr rtlCol="0" anchor="ctr" lIns="0" rIns="0" tIns="0" bIns="0"/>
+          <a:lstStyle/>
+          <a:p>
+            <a:pPr algn="ctr"/>
+            <a:r>
+              <a:rPr sz="1600" b="1">
+                <a:solidFill>
+                  <a:srgbClr val="202122"/>
+                </a:solidFill>
+                <a:latin typeface="Calibri"/>
+              </a:rPr>
+              <a:t>2</a:t>
+            </a:r>
+          </a:p>
+        </p:txBody>
+      </p:sp>
+      <p:sp>
+        <p:nvSpPr>
+          <p:cNvPr id="9" name="TextBox 8"/>
+          <p:cNvSpPr txBox="1"/>
+          <p:nvPr/>
+        </p:nvSpPr>
+        <p:spPr>
+          <a:xfrm>
+            <a:off x="1371600" y="3063240"/>
+            <a:ext cx="10271455" cy="1188720"/>
+          </a:xfrm>
+          <a:prstGeom prst="rect">
+            <a:avLst/>
+          </a:prstGeom>
+          <a:noFill/>
+        </p:spPr>
+        <p:txBody>
+          <a:bodyPr wrap="square" anchor="t" lIns="0" rIns="0" tIns="0" bIns="0"/>
+          <a:lstStyle/>
+          <a:p>
+            <a:pPr algn="l"/>
+            <a:r>
+              <a:rPr sz="2400" b="0" i="0">
+                <a:solidFill>
+                  <a:srgbClr val="202122"/>
+                </a:solidFill>
+                <a:latin typeface="Calibri"/>
+              </a:rPr>
+              <a:t>Give one advantage of digital signals.</a:t>
+            </a:r>
+          </a:p>
+        </p:txBody>
+      </p:sp>
+      <p:sp>
+        <p:nvSpPr>
+          <p:cNvPr id="10" name="Oval 9"/>
+          <p:cNvSpPr/>
+          <p:nvPr/>
+        </p:nvSpPr>
+        <p:spPr>
+          <a:xfrm>
+            <a:off x="548640" y="4526280"/>
+            <a:ext cx="502920" cy="502920"/>
+          </a:xfrm>
+          <a:prstGeom prst="ellipse">
+            <a:avLst/>
+          </a:prstGeom>
+          <a:solidFill>
+            <a:srgbClr val="F2B705"/>
+          </a:solidFill>
+          <a:ln>
+            <a:noFill/>
+          </a:ln>
+          <a:effectLst/>
+        </p:spPr>
+        <p:style>
+          <a:lnRef idx="1">
+            <a:schemeClr val="accent1"/>
+          </a:lnRef>
+          <a:fillRef idx="3">
+            <a:schemeClr val="accent1"/>
+          </a:fillRef>
+          <a:effectRef idx="2">
+            <a:schemeClr val="accent1"/>
+          </a:effectRef>
+          <a:fontRef idx="minor">
+            <a:schemeClr val="lt1"/>
+          </a:fontRef>
+        </p:style>
+        <p:txBody>
+          <a:bodyPr rtlCol="0" anchor="ctr" lIns="0" rIns="0" tIns="0" bIns="0"/>
+          <a:lstStyle/>
+          <a:p>
+            <a:pPr algn="ctr"/>
+            <a:r>
+              <a:rPr sz="1600" b="1">
+                <a:solidFill>
+                  <a:srgbClr val="202122"/>
+                </a:solidFill>
+                <a:latin typeface="Calibri"/>
+              </a:rPr>
+              <a:t>3</a:t>
+            </a:r>
+          </a:p>
+        </p:txBody>
+      </p:sp>
+      <p:sp>
+        <p:nvSpPr>
+          <p:cNvPr id="11" name="TextBox 10"/>
+          <p:cNvSpPr txBox="1"/>
+          <p:nvPr/>
+        </p:nvSpPr>
+        <p:spPr>
+          <a:xfrm>
+            <a:off x="1371600" y="4480560"/>
+            <a:ext cx="10271455" cy="1188720"/>
+          </a:xfrm>
+          <a:prstGeom prst="rect">
+            <a:avLst/>
+          </a:prstGeom>
+          <a:noFill/>
+        </p:spPr>
+        <p:txBody>
+          <a:bodyPr wrap="square" anchor="t" lIns="0" rIns="0" tIns="0" bIns="0"/>
+          <a:lstStyle/>
+          <a:p>
+            <a:pPr algn="l"/>
+            <a:r>
+              <a:rPr sz="2400" b="0" i="0">
+                <a:solidFill>
+                  <a:srgbClr val="202122"/>
+                </a:solidFill>
+                <a:latin typeface="Calibri"/>
+              </a:rPr>
+              <a:t>What does an ADC do?</a:t>
+            </a:r>
+          </a:p>
+        </p:txBody>
+      </p:sp>
+      <p:sp>
+        <p:nvSpPr>
+          <p:cNvPr id="12" name="TextBox 11"/>
+          <p:cNvSpPr txBox="1"/>
+          <p:nvPr/>
+        </p:nvSpPr>
+        <p:spPr>
+          <a:xfrm>
+            <a:off x="548640" y="5852160"/>
+            <a:ext cx="11094415" cy="365760"/>
+          </a:xfrm>
+          <a:prstGeom prst="rect">
+            <a:avLst/>
+          </a:prstGeom>
+          <a:noFill/>
+        </p:spPr>
+        <p:txBody>
+          <a:bodyPr wrap="square" anchor="t" lIns="0" rIns="0" tIns="0" bIns="0"/>
+          <a:lstStyle/>
+          <a:p>
+            <a:pPr algn="l"/>
+            <a:r>
+              <a:rPr sz="1300" b="0" i="1">
+                <a:solidFill>
+                  <a:srgbClr val="54595D"/>
+                </a:solidFill>
+                <a:latin typeface="Calibri"/>
+              </a:rPr>
+              <a:t>Answer on mini whiteboards or in your book. Answers are in the speaker notes.</a:t>
+            </a:r>
+          </a:p>
+        </p:txBody>
+      </p:sp>
+    </p:spTree>
+  </p:cSld>
+  <p:clrMapOvr>
+    <a:masterClrMapping/>
+  </p:clrMapOvr>
+</p:sld>
+</file>
+
+<file path=ppt/slides/slide13.xml><?xml version="1.0" encoding="utf-8"?>
+<p:sld xmlns:a="http://schemas.openxmlformats.org/drawingml/2006/main" xmlns:p="http://schemas.openxmlformats.org/presentationml/2006/main" xmlns:r="http://schemas.openxmlformats.org/officeDocument/2006/relationships">
+  <p:cSld>
+    <p:bg>
+      <p:bgPr>
+        <a:solidFill>
+          <a:srgbClr val="FFFFFF"/>
+        </a:solidFill>
+        <a:effectLst/>
+      </p:bgPr>
+    </p:bg>
+    <p:spTree>
+      <p:nvGrpSpPr>
+        <p:cNvPr id="1" name=""/>
+        <p:cNvGrpSpPr/>
+        <p:nvPr/>
+      </p:nvGrpSpPr>
+      <p:grpSpPr/>
+      <p:sp>
+        <p:nvSpPr>
+          <p:cNvPr id="2" name="TextBox 1"/>
+          <p:cNvSpPr txBox="1"/>
+          <p:nvPr/>
+        </p:nvSpPr>
+        <p:spPr>
+          <a:xfrm>
+            <a:off x="548640" y="320040"/>
+            <a:ext cx="11094415" cy="274320"/>
+          </a:xfrm>
+          <a:prstGeom prst="rect">
+            <a:avLst/>
+          </a:prstGeom>
+          <a:noFill/>
+        </p:spPr>
+        <p:txBody>
+          <a:bodyPr wrap="square" anchor="t" lIns="0" rIns="0" tIns="0" bIns="0"/>
+          <a:lstStyle/>
+          <a:p>
+            <a:pPr algn="l"/>
+            <a:r>
+              <a:rPr sz="1100" b="1" i="0">
+                <a:solidFill>
+                  <a:srgbClr val="54595D"/>
+                </a:solidFill>
+                <a:latin typeface="Calibri"/>
+              </a:rPr>
+              <a:t>ENGINEERING CORE  ·  Core topic 8</a:t>
+            </a:r>
+          </a:p>
+        </p:txBody>
+      </p:sp>
+      <p:sp>
+        <p:nvSpPr>
+          <p:cNvPr id="3" name="TextBox 2"/>
+          <p:cNvSpPr txBox="1"/>
+          <p:nvPr/>
+        </p:nvSpPr>
+        <p:spPr>
+          <a:xfrm>
+            <a:off x="548640" y="566928"/>
+            <a:ext cx="11094415" cy="822960"/>
+          </a:xfrm>
+          <a:prstGeom prst="rect">
+            <a:avLst/>
+          </a:prstGeom>
+          <a:noFill/>
+        </p:spPr>
+        <p:txBody>
+          <a:bodyPr wrap="square" anchor="ctr" lIns="0" rIns="0" tIns="0" bIns="0"/>
+          <a:lstStyle/>
+          <a:p>
+            <a:pPr algn="l"/>
+            <a:r>
+              <a:rPr sz="3200" b="1" i="0">
+                <a:solidFill>
+                  <a:srgbClr val="03306E"/>
+                </a:solidFill>
+                <a:latin typeface="Cambria"/>
+              </a:rPr>
+              <a:t>Check your understanding</a:t>
+            </a:r>
+          </a:p>
+        </p:txBody>
+      </p:sp>
+      <p:sp>
+        <p:nvSpPr>
+          <p:cNvPr id="4" name="TextBox 3"/>
+          <p:cNvSpPr txBox="1"/>
+          <p:nvPr/>
+        </p:nvSpPr>
+        <p:spPr>
+          <a:xfrm>
+            <a:off x="548640" y="6446520"/>
+            <a:ext cx="8229600" cy="274320"/>
+          </a:xfrm>
+          <a:prstGeom prst="rect">
+            <a:avLst/>
+          </a:prstGeom>
+          <a:noFill/>
+        </p:spPr>
+        <p:txBody>
+          <a:bodyPr wrap="square" anchor="t" lIns="0" rIns="0" tIns="0" bIns="0"/>
+          <a:lstStyle/>
+          <a:p>
+            <a:pPr algn="l"/>
+            <a:r>
+              <a:rPr sz="1000" b="0" i="0">
+                <a:solidFill>
+                  <a:srgbClr val="54595D"/>
+                </a:solidFill>
+                <a:latin typeface="Calibri"/>
+              </a:rPr>
+              <a:t>Design and Development for Engineering and Manufacturing T Level  ·  Electrical and Electronic Principles</a:t>
+            </a:r>
+          </a:p>
+        </p:txBody>
+      </p:sp>
+      <p:sp>
+        <p:nvSpPr>
+          <p:cNvPr id="5" name="TextBox 4"/>
+          <p:cNvSpPr txBox="1"/>
+          <p:nvPr/>
+        </p:nvSpPr>
+        <p:spPr>
+          <a:xfrm>
+            <a:off x="10728655" y="6446520"/>
+            <a:ext cx="914400" cy="274320"/>
+          </a:xfrm>
+          <a:prstGeom prst="rect">
+            <a:avLst/>
+          </a:prstGeom>
+          <a:noFill/>
+        </p:spPr>
+        <p:txBody>
+          <a:bodyPr wrap="square" anchor="t" lIns="0" rIns="0" tIns="0" bIns="0"/>
+          <a:lstStyle/>
+          <a:p>
+            <a:pPr algn="r"/>
+            <a:r>
+              <a:rPr sz="1000" b="0" i="0">
+                <a:solidFill>
+                  <a:srgbClr val="54595D"/>
+                </a:solidFill>
+                <a:latin typeface="Calibri"/>
+              </a:rPr>
+              <a:t>13</a:t>
+            </a:r>
+          </a:p>
+        </p:txBody>
+      </p:sp>
+      <p:sp>
+        <p:nvSpPr>
+          <p:cNvPr id="6" name="Oval 5"/>
+          <p:cNvSpPr/>
+          <p:nvPr/>
+        </p:nvSpPr>
+        <p:spPr>
+          <a:xfrm>
+            <a:off x="548640" y="1618488"/>
+            <a:ext cx="411480" cy="411480"/>
+          </a:xfrm>
+          <a:prstGeom prst="ellipse">
+            <a:avLst/>
+          </a:prstGeom>
+          <a:solidFill>
+            <a:srgbClr val="F2B705"/>
+          </a:solidFill>
+          <a:ln>
+            <a:noFill/>
+          </a:ln>
+          <a:effectLst/>
+        </p:spPr>
+        <p:style>
+          <a:lnRef idx="1">
+            <a:schemeClr val="accent1"/>
+          </a:lnRef>
+          <a:fillRef idx="3">
+            <a:schemeClr val="accent1"/>
+          </a:fillRef>
+          <a:effectRef idx="2">
+            <a:schemeClr val="accent1"/>
+          </a:effectRef>
+          <a:fontRef idx="minor">
+            <a:schemeClr val="lt1"/>
+          </a:fontRef>
+        </p:style>
+        <p:txBody>
+          <a:bodyPr rtlCol="0" anchor="ctr" lIns="0" rIns="0" tIns="0" bIns="0"/>
+          <a:lstStyle/>
+          <a:p>
+            <a:pPr algn="ctr"/>
+            <a:r>
+              <a:rPr sz="1400" b="1">
+                <a:solidFill>
+                  <a:srgbClr val="202122"/>
+                </a:solidFill>
+                <a:latin typeface="Calibri"/>
+              </a:rPr>
+              <a:t>1</a:t>
+            </a:r>
+          </a:p>
+        </p:txBody>
+      </p:sp>
+      <p:sp>
+        <p:nvSpPr>
+          <p:cNvPr id="7" name="TextBox 6"/>
+          <p:cNvSpPr txBox="1"/>
+          <p:nvPr/>
+        </p:nvSpPr>
+        <p:spPr>
+          <a:xfrm>
+            <a:off x="1234440" y="1600200"/>
+            <a:ext cx="10408615" cy="791870"/>
+          </a:xfrm>
+          <a:prstGeom prst="rect">
+            <a:avLst/>
+          </a:prstGeom>
+          <a:noFill/>
+        </p:spPr>
+        <p:txBody>
+          <a:bodyPr wrap="square" anchor="t" lIns="0" rIns="0" tIns="0" bIns="0"/>
+          <a:lstStyle/>
+          <a:p>
+            <a:pPr algn="l"/>
+            <a:r>
+              <a:rPr sz="2200" b="0" i="0">
+                <a:solidFill>
+                  <a:srgbClr val="202122"/>
+                </a:solidFill>
+                <a:latin typeface="Calibri"/>
+              </a:rPr>
+              <a:t>A 12 V supply drives 2 A. What is the resistance?</a:t>
+            </a:r>
+          </a:p>
+        </p:txBody>
+      </p:sp>
+      <p:sp>
+        <p:nvSpPr>
+          <p:cNvPr id="8" name="Oval 7"/>
+          <p:cNvSpPr/>
+          <p:nvPr/>
+        </p:nvSpPr>
+        <p:spPr>
+          <a:xfrm>
+            <a:off x="548640" y="2574950"/>
+            <a:ext cx="411480" cy="411480"/>
+          </a:xfrm>
+          <a:prstGeom prst="ellipse">
+            <a:avLst/>
+          </a:prstGeom>
+          <a:solidFill>
+            <a:srgbClr val="F2B705"/>
+          </a:solidFill>
+          <a:ln>
+            <a:noFill/>
+          </a:ln>
+          <a:effectLst/>
+        </p:spPr>
+        <p:style>
+          <a:lnRef idx="1">
+            <a:schemeClr val="accent1"/>
+          </a:lnRef>
+          <a:fillRef idx="3">
+            <a:schemeClr val="accent1"/>
+          </a:fillRef>
+          <a:effectRef idx="2">
+            <a:schemeClr val="accent1"/>
+          </a:effectRef>
+          <a:fontRef idx="minor">
+            <a:schemeClr val="lt1"/>
+          </a:fontRef>
+        </p:style>
+        <p:txBody>
+          <a:bodyPr rtlCol="0" anchor="ctr" lIns="0" rIns="0" tIns="0" bIns="0"/>
+          <a:lstStyle/>
+          <a:p>
+            <a:pPr algn="ctr"/>
+            <a:r>
+              <a:rPr sz="1400" b="1">
+                <a:solidFill>
+                  <a:srgbClr val="202122"/>
+                </a:solidFill>
+                <a:latin typeface="Calibri"/>
+              </a:rPr>
+              <a:t>2</a:t>
+            </a:r>
+          </a:p>
+        </p:txBody>
+      </p:sp>
+      <p:sp>
+        <p:nvSpPr>
+          <p:cNvPr id="9" name="TextBox 8"/>
+          <p:cNvSpPr txBox="1"/>
+          <p:nvPr/>
+        </p:nvSpPr>
+        <p:spPr>
+          <a:xfrm>
+            <a:off x="1234440" y="2556662"/>
+            <a:ext cx="10408615" cy="791870"/>
+          </a:xfrm>
+          <a:prstGeom prst="rect">
+            <a:avLst/>
+          </a:prstGeom>
+          <a:noFill/>
+        </p:spPr>
+        <p:txBody>
+          <a:bodyPr wrap="square" anchor="t" lIns="0" rIns="0" tIns="0" bIns="0"/>
+          <a:lstStyle/>
+          <a:p>
+            <a:pPr algn="l"/>
+            <a:r>
+              <a:rPr sz="2200" b="0" i="0">
+                <a:solidFill>
+                  <a:srgbClr val="202122"/>
+                </a:solidFill>
+                <a:latin typeface="Calibri"/>
+              </a:rPr>
+              <a:t>Two 10 ohm resistors in series: total resistance?</a:t>
+            </a:r>
+          </a:p>
+        </p:txBody>
+      </p:sp>
+      <p:sp>
+        <p:nvSpPr>
+          <p:cNvPr id="10" name="Oval 9"/>
+          <p:cNvSpPr/>
+          <p:nvPr/>
+        </p:nvSpPr>
+        <p:spPr>
+          <a:xfrm>
+            <a:off x="548640" y="3531412"/>
+            <a:ext cx="411480" cy="411480"/>
+          </a:xfrm>
+          <a:prstGeom prst="ellipse">
+            <a:avLst/>
+          </a:prstGeom>
+          <a:solidFill>
+            <a:srgbClr val="F2B705"/>
+          </a:solidFill>
+          <a:ln>
+            <a:noFill/>
+          </a:ln>
+          <a:effectLst/>
+        </p:spPr>
+        <p:style>
+          <a:lnRef idx="1">
+            <a:schemeClr val="accent1"/>
+          </a:lnRef>
+          <a:fillRef idx="3">
+            <a:schemeClr val="accent1"/>
+          </a:fillRef>
+          <a:effectRef idx="2">
+            <a:schemeClr val="accent1"/>
+          </a:effectRef>
+          <a:fontRef idx="minor">
+            <a:schemeClr val="lt1"/>
+          </a:fontRef>
+        </p:style>
+        <p:txBody>
+          <a:bodyPr rtlCol="0" anchor="ctr" lIns="0" rIns="0" tIns="0" bIns="0"/>
+          <a:lstStyle/>
+          <a:p>
+            <a:pPr algn="ctr"/>
+            <a:r>
+              <a:rPr sz="1400" b="1">
+                <a:solidFill>
+                  <a:srgbClr val="202122"/>
+                </a:solidFill>
+                <a:latin typeface="Calibri"/>
+              </a:rPr>
+              <a:t>3</a:t>
+            </a:r>
+          </a:p>
+        </p:txBody>
+      </p:sp>
+      <p:sp>
+        <p:nvSpPr>
+          <p:cNvPr id="11" name="TextBox 10"/>
+          <p:cNvSpPr txBox="1"/>
+          <p:nvPr/>
+        </p:nvSpPr>
+        <p:spPr>
+          <a:xfrm>
+            <a:off x="1234440" y="3513124"/>
+            <a:ext cx="10408615" cy="791870"/>
+          </a:xfrm>
+          <a:prstGeom prst="rect">
+            <a:avLst/>
+          </a:prstGeom>
+          <a:noFill/>
+        </p:spPr>
+        <p:txBody>
+          <a:bodyPr wrap="square" anchor="t" lIns="0" rIns="0" tIns="0" bIns="0"/>
+          <a:lstStyle/>
+          <a:p>
+            <a:pPr algn="l"/>
+            <a:r>
+              <a:rPr sz="2200" b="0" i="0">
+                <a:solidFill>
+                  <a:srgbClr val="202122"/>
+                </a:solidFill>
+                <a:latin typeface="Calibri"/>
+              </a:rPr>
+              <a:t>Two 10 ohm resistors in parallel: total resistance?</a:t>
+            </a:r>
+          </a:p>
+        </p:txBody>
+      </p:sp>
+      <p:sp>
+        <p:nvSpPr>
+          <p:cNvPr id="12" name="Oval 11"/>
+          <p:cNvSpPr/>
+          <p:nvPr/>
+        </p:nvSpPr>
+        <p:spPr>
+          <a:xfrm>
+            <a:off x="548640" y="4487875"/>
+            <a:ext cx="411480" cy="411480"/>
+          </a:xfrm>
+          <a:prstGeom prst="ellipse">
+            <a:avLst/>
+          </a:prstGeom>
+          <a:solidFill>
+            <a:srgbClr val="F2B705"/>
+          </a:solidFill>
+          <a:ln>
+            <a:noFill/>
+          </a:ln>
+          <a:effectLst/>
+        </p:spPr>
+        <p:style>
+          <a:lnRef idx="1">
+            <a:schemeClr val="accent1"/>
+          </a:lnRef>
+          <a:fillRef idx="3">
+            <a:schemeClr val="accent1"/>
+          </a:fillRef>
+          <a:effectRef idx="2">
+            <a:schemeClr val="accent1"/>
+          </a:effectRef>
+          <a:fontRef idx="minor">
+            <a:schemeClr val="lt1"/>
+          </a:fontRef>
+        </p:style>
+        <p:txBody>
+          <a:bodyPr rtlCol="0" anchor="ctr" lIns="0" rIns="0" tIns="0" bIns="0"/>
+          <a:lstStyle/>
+          <a:p>
+            <a:pPr algn="ctr"/>
+            <a:r>
+              <a:rPr sz="1400" b="1">
+                <a:solidFill>
+                  <a:srgbClr val="202122"/>
+                </a:solidFill>
+                <a:latin typeface="Calibri"/>
+              </a:rPr>
+              <a:t>4</a:t>
+            </a:r>
+          </a:p>
+        </p:txBody>
+      </p:sp>
+      <p:sp>
+        <p:nvSpPr>
+          <p:cNvPr id="13" name="TextBox 12"/>
+          <p:cNvSpPr txBox="1"/>
+          <p:nvPr/>
+        </p:nvSpPr>
+        <p:spPr>
+          <a:xfrm>
+            <a:off x="1234440" y="4469587"/>
+            <a:ext cx="10408615" cy="791870"/>
+          </a:xfrm>
+          <a:prstGeom prst="rect">
+            <a:avLst/>
+          </a:prstGeom>
+          <a:noFill/>
+        </p:spPr>
+        <p:txBody>
+          <a:bodyPr wrap="square" anchor="t" lIns="0" rIns="0" tIns="0" bIns="0"/>
+          <a:lstStyle/>
+          <a:p>
+            <a:pPr algn="l"/>
+            <a:r>
+              <a:rPr sz="2200" b="0" i="0">
+                <a:solidFill>
+                  <a:srgbClr val="202122"/>
+                </a:solidFill>
+                <a:latin typeface="Calibri"/>
+              </a:rPr>
+              <a:t>What does an RCD do?</a:t>
+            </a:r>
+          </a:p>
+        </p:txBody>
+      </p:sp>
+      <p:sp>
+        <p:nvSpPr>
+          <p:cNvPr id="14" name="Oval 13"/>
+          <p:cNvSpPr/>
+          <p:nvPr/>
+        </p:nvSpPr>
+        <p:spPr>
+          <a:xfrm>
+            <a:off x="548640" y="5444337"/>
+            <a:ext cx="411480" cy="411480"/>
+          </a:xfrm>
+          <a:prstGeom prst="ellipse">
+            <a:avLst/>
+          </a:prstGeom>
+          <a:solidFill>
+            <a:srgbClr val="F2B705"/>
+          </a:solidFill>
+          <a:ln>
+            <a:noFill/>
+          </a:ln>
+          <a:effectLst/>
+        </p:spPr>
+        <p:style>
+          <a:lnRef idx="1">
+            <a:schemeClr val="accent1"/>
+          </a:lnRef>
+          <a:fillRef idx="3">
+            <a:schemeClr val="accent1"/>
+          </a:fillRef>
+          <a:effectRef idx="2">
+            <a:schemeClr val="accent1"/>
+          </a:effectRef>
+          <a:fontRef idx="minor">
+            <a:schemeClr val="lt1"/>
+          </a:fontRef>
+        </p:style>
+        <p:txBody>
+          <a:bodyPr rtlCol="0" anchor="ctr" lIns="0" rIns="0" tIns="0" bIns="0"/>
+          <a:lstStyle/>
+          <a:p>
+            <a:pPr algn="ctr"/>
+            <a:r>
+              <a:rPr sz="1400" b="1">
+                <a:solidFill>
+                  <a:srgbClr val="202122"/>
+                </a:solidFill>
+                <a:latin typeface="Calibri"/>
+              </a:rPr>
+              <a:t>5</a:t>
+            </a:r>
+          </a:p>
+        </p:txBody>
+      </p:sp>
+      <p:sp>
+        <p:nvSpPr>
+          <p:cNvPr id="15" name="TextBox 14"/>
+          <p:cNvSpPr txBox="1"/>
+          <p:nvPr/>
+        </p:nvSpPr>
+        <p:spPr>
+          <a:xfrm>
+            <a:off x="1234440" y="5426049"/>
+            <a:ext cx="10408615" cy="791870"/>
+          </a:xfrm>
+          <a:prstGeom prst="rect">
+            <a:avLst/>
+          </a:prstGeom>
+          <a:noFill/>
+        </p:spPr>
+        <p:txBody>
+          <a:bodyPr wrap="square" anchor="t" lIns="0" rIns="0" tIns="0" bIns="0"/>
+          <a:lstStyle/>
+          <a:p>
+            <a:pPr algn="l"/>
+            <a:r>
+              <a:rPr sz="2200" b="0" i="0">
+                <a:solidFill>
+                  <a:srgbClr val="202122"/>
+                </a:solidFill>
+                <a:latin typeface="Calibri"/>
+              </a:rPr>
+              <a:t>What does a diode do?</a:t>
+            </a:r>
+          </a:p>
+        </p:txBody>
+      </p:sp>
+    </p:spTree>
+  </p:cSld>
+  <p:clrMapOvr>
+    <a:masterClrMapping/>
+  </p:clrMapOvr>
+</p:sld>
+</file>
+
+<file path=ppt/slides/slide14.xml><?xml version="1.0" encoding="utf-8"?>
+<p:sld xmlns:a="http://schemas.openxmlformats.org/drawingml/2006/main" xmlns:p="http://schemas.openxmlformats.org/presentationml/2006/main" xmlns:r="http://schemas.openxmlformats.org/officeDocument/2006/relationships">
+  <p:cSld>
+    <p:bg>
+      <p:bgPr>
+        <a:solidFill>
+          <a:srgbClr val="FFFFFF"/>
+        </a:solidFill>
+        <a:effectLst/>
+      </p:bgPr>
+    </p:bg>
+    <p:spTree>
+      <p:nvGrpSpPr>
+        <p:cNvPr id="1" name=""/>
+        <p:cNvGrpSpPr/>
+        <p:nvPr/>
+      </p:nvGrpSpPr>
+      <p:grpSpPr/>
+      <p:sp>
+        <p:nvSpPr>
+          <p:cNvPr id="2" name="TextBox 1"/>
+          <p:cNvSpPr txBox="1"/>
+          <p:nvPr/>
+        </p:nvSpPr>
+        <p:spPr>
+          <a:xfrm>
+            <a:off x="548640" y="320040"/>
+            <a:ext cx="11094415" cy="274320"/>
+          </a:xfrm>
+          <a:prstGeom prst="rect">
+            <a:avLst/>
+          </a:prstGeom>
+          <a:noFill/>
+        </p:spPr>
+        <p:txBody>
+          <a:bodyPr wrap="square" anchor="t" lIns="0" rIns="0" tIns="0" bIns="0"/>
+          <a:lstStyle/>
+          <a:p>
+            <a:pPr algn="l"/>
+            <a:r>
+              <a:rPr sz="1100" b="1" i="0">
+                <a:solidFill>
+                  <a:srgbClr val="54595D"/>
+                </a:solidFill>
+                <a:latin typeface="Calibri"/>
+              </a:rPr>
+              <a:t>ENGINEERING CORE  ·  Core topic 8</a:t>
+            </a:r>
+          </a:p>
+        </p:txBody>
+      </p:sp>
+      <p:sp>
+        <p:nvSpPr>
+          <p:cNvPr id="3" name="TextBox 2"/>
+          <p:cNvSpPr txBox="1"/>
+          <p:nvPr/>
+        </p:nvSpPr>
+        <p:spPr>
+          <a:xfrm>
+            <a:off x="548640" y="566928"/>
+            <a:ext cx="11094415" cy="822960"/>
+          </a:xfrm>
+          <a:prstGeom prst="rect">
+            <a:avLst/>
+          </a:prstGeom>
+          <a:noFill/>
+        </p:spPr>
+        <p:txBody>
+          <a:bodyPr wrap="square" anchor="ctr" lIns="0" rIns="0" tIns="0" bIns="0"/>
+          <a:lstStyle/>
+          <a:p>
+            <a:pPr algn="l"/>
+            <a:r>
+              <a:rPr sz="3200" b="1" i="0">
+                <a:solidFill>
+                  <a:srgbClr val="03306E"/>
+                </a:solidFill>
+                <a:latin typeface="Cambria"/>
+              </a:rPr>
+              <a:t>Answers</a:t>
+            </a:r>
+          </a:p>
+        </p:txBody>
+      </p:sp>
+      <p:sp>
+        <p:nvSpPr>
+          <p:cNvPr id="4" name="TextBox 3"/>
+          <p:cNvSpPr txBox="1"/>
+          <p:nvPr/>
+        </p:nvSpPr>
+        <p:spPr>
+          <a:xfrm>
+            <a:off x="548640" y="6446520"/>
+            <a:ext cx="8229600" cy="274320"/>
+          </a:xfrm>
+          <a:prstGeom prst="rect">
+            <a:avLst/>
+          </a:prstGeom>
+          <a:noFill/>
+        </p:spPr>
+        <p:txBody>
+          <a:bodyPr wrap="square" anchor="t" lIns="0" rIns="0" tIns="0" bIns="0"/>
+          <a:lstStyle/>
+          <a:p>
+            <a:pPr algn="l"/>
+            <a:r>
+              <a:rPr sz="1000" b="0" i="0">
+                <a:solidFill>
+                  <a:srgbClr val="54595D"/>
+                </a:solidFill>
+                <a:latin typeface="Calibri"/>
+              </a:rPr>
+              <a:t>Design and Development for Engineering and Manufacturing T Level  ·  Electrical and Electronic Principles</a:t>
+            </a:r>
+          </a:p>
+        </p:txBody>
+      </p:sp>
+      <p:sp>
+        <p:nvSpPr>
+          <p:cNvPr id="5" name="TextBox 4"/>
+          <p:cNvSpPr txBox="1"/>
+          <p:nvPr/>
+        </p:nvSpPr>
+        <p:spPr>
+          <a:xfrm>
+            <a:off x="10728655" y="6446520"/>
+            <a:ext cx="914400" cy="274320"/>
+          </a:xfrm>
+          <a:prstGeom prst="rect">
+            <a:avLst/>
+          </a:prstGeom>
+          <a:noFill/>
+        </p:spPr>
+        <p:txBody>
+          <a:bodyPr wrap="square" anchor="t" lIns="0" rIns="0" tIns="0" bIns="0"/>
+          <a:lstStyle/>
+          <a:p>
+            <a:pPr algn="r"/>
+            <a:r>
+              <a:rPr sz="1000" b="0" i="0">
+                <a:solidFill>
+                  <a:srgbClr val="54595D"/>
+                </a:solidFill>
+                <a:latin typeface="Calibri"/>
+              </a:rPr>
+              <a:t>14</a:t>
+            </a:r>
+          </a:p>
+        </p:txBody>
+      </p:sp>
+      <p:sp>
+        <p:nvSpPr>
+          <p:cNvPr id="6" name="Oval 5"/>
+          <p:cNvSpPr/>
+          <p:nvPr/>
+        </p:nvSpPr>
+        <p:spPr>
+          <a:xfrm>
+            <a:off x="548640" y="1618488"/>
+            <a:ext cx="411480" cy="411480"/>
+          </a:xfrm>
+          <a:prstGeom prst="ellipse">
+            <a:avLst/>
+          </a:prstGeom>
+          <a:solidFill>
+            <a:srgbClr val="F2B705"/>
+          </a:solidFill>
+          <a:ln>
+            <a:noFill/>
+          </a:ln>
+          <a:effectLst/>
+        </p:spPr>
+        <p:style>
+          <a:lnRef idx="1">
+            <a:schemeClr val="accent1"/>
+          </a:lnRef>
+          <a:fillRef idx="3">
+            <a:schemeClr val="accent1"/>
+          </a:fillRef>
+          <a:effectRef idx="2">
+            <a:schemeClr val="accent1"/>
+          </a:effectRef>
+          <a:fontRef idx="minor">
+            <a:schemeClr val="lt1"/>
+          </a:fontRef>
+        </p:style>
+        <p:txBody>
+          <a:bodyPr rtlCol="0" anchor="ctr" lIns="0" rIns="0" tIns="0" bIns="0"/>
+          <a:lstStyle/>
+          <a:p>
+            <a:pPr algn="ctr"/>
+            <a:r>
+              <a:rPr sz="1400" b="1">
+                <a:solidFill>
+                  <a:srgbClr val="202122"/>
+                </a:solidFill>
+                <a:latin typeface="Calibri"/>
+              </a:rPr>
+              <a:t>1</a:t>
+            </a:r>
+          </a:p>
+        </p:txBody>
+      </p:sp>
+      <p:sp>
+        <p:nvSpPr>
+          <p:cNvPr id="7" name="TextBox 6"/>
+          <p:cNvSpPr txBox="1"/>
+          <p:nvPr/>
+        </p:nvSpPr>
+        <p:spPr>
+          <a:xfrm>
+            <a:off x="1234440" y="1600200"/>
+            <a:ext cx="10408615" cy="791870"/>
+          </a:xfrm>
+          <a:prstGeom prst="rect">
+            <a:avLst/>
+          </a:prstGeom>
+          <a:noFill/>
+        </p:spPr>
+        <p:txBody>
+          <a:bodyPr wrap="square" anchor="t" lIns="0" rIns="0" tIns="0" bIns="0"/>
+          <a:lstStyle/>
+          <a:p>
+            <a:pPr algn="l"/>
+            <a:r>
+              <a:rPr sz="1800" b="0" i="0">
+                <a:solidFill>
+                  <a:srgbClr val="54595D"/>
+                </a:solidFill>
+                <a:latin typeface="Calibri"/>
+              </a:rPr>
+              <a:t>A 12 V supply drives 2 A. What is the resistance?</a:t>
+            </a:r>
+          </a:p>
+          <a:p>
+            <a:r>
+              <a:rPr sz="1800" b="1">
+                <a:solidFill>
+                  <a:srgbClr val="03306E"/>
+                </a:solidFill>
+                <a:latin typeface="Calibri"/>
+              </a:rPr>
+              <a:t>6 ohms.</a:t>
+            </a:r>
+          </a:p>
+        </p:txBody>
+      </p:sp>
+      <p:sp>
+        <p:nvSpPr>
+          <p:cNvPr id="8" name="Oval 7"/>
+          <p:cNvSpPr/>
+          <p:nvPr/>
+        </p:nvSpPr>
+        <p:spPr>
+          <a:xfrm>
+            <a:off x="548640" y="2574950"/>
+            <a:ext cx="411480" cy="411480"/>
+          </a:xfrm>
+          <a:prstGeom prst="ellipse">
+            <a:avLst/>
+          </a:prstGeom>
+          <a:solidFill>
+            <a:srgbClr val="F2B705"/>
+          </a:solidFill>
+          <a:ln>
+            <a:noFill/>
+          </a:ln>
+          <a:effectLst/>
+        </p:spPr>
+        <p:style>
+          <a:lnRef idx="1">
+            <a:schemeClr val="accent1"/>
+          </a:lnRef>
+          <a:fillRef idx="3">
+            <a:schemeClr val="accent1"/>
+          </a:fillRef>
+          <a:effectRef idx="2">
+            <a:schemeClr val="accent1"/>
+          </a:effectRef>
+          <a:fontRef idx="minor">
+            <a:schemeClr val="lt1"/>
+          </a:fontRef>
+        </p:style>
+        <p:txBody>
+          <a:bodyPr rtlCol="0" anchor="ctr" lIns="0" rIns="0" tIns="0" bIns="0"/>
+          <a:lstStyle/>
+          <a:p>
+            <a:pPr algn="ctr"/>
+            <a:r>
+              <a:rPr sz="1400" b="1">
+                <a:solidFill>
+                  <a:srgbClr val="202122"/>
+                </a:solidFill>
+                <a:latin typeface="Calibri"/>
+              </a:rPr>
+              <a:t>2</a:t>
+            </a:r>
+          </a:p>
+        </p:txBody>
+      </p:sp>
+      <p:sp>
+        <p:nvSpPr>
+          <p:cNvPr id="9" name="TextBox 8"/>
+          <p:cNvSpPr txBox="1"/>
+          <p:nvPr/>
+        </p:nvSpPr>
+        <p:spPr>
+          <a:xfrm>
+            <a:off x="1234440" y="2556662"/>
+            <a:ext cx="10408615" cy="791870"/>
+          </a:xfrm>
+          <a:prstGeom prst="rect">
+            <a:avLst/>
+          </a:prstGeom>
+          <a:noFill/>
+        </p:spPr>
+        <p:txBody>
+          <a:bodyPr wrap="square" anchor="t" lIns="0" rIns="0" tIns="0" bIns="0"/>
+          <a:lstStyle/>
+          <a:p>
+            <a:pPr algn="l"/>
+            <a:r>
+              <a:rPr sz="1800" b="0" i="0">
+                <a:solidFill>
+                  <a:srgbClr val="54595D"/>
+                </a:solidFill>
+                <a:latin typeface="Calibri"/>
+              </a:rPr>
+              <a:t>Two 10 ohm resistors in series: total resistance?</a:t>
+            </a:r>
+          </a:p>
+          <a:p>
+            <a:r>
+              <a:rPr sz="1800" b="1">
+                <a:solidFill>
+                  <a:srgbClr val="03306E"/>
+                </a:solidFill>
+                <a:latin typeface="Calibri"/>
+              </a:rPr>
+              <a:t>20 ohms.</a:t>
+            </a:r>
+          </a:p>
+        </p:txBody>
+      </p:sp>
+      <p:sp>
+        <p:nvSpPr>
+          <p:cNvPr id="10" name="Oval 9"/>
+          <p:cNvSpPr/>
+          <p:nvPr/>
+        </p:nvSpPr>
+        <p:spPr>
+          <a:xfrm>
+            <a:off x="548640" y="3531412"/>
+            <a:ext cx="411480" cy="411480"/>
+          </a:xfrm>
+          <a:prstGeom prst="ellipse">
+            <a:avLst/>
+          </a:prstGeom>
+          <a:solidFill>
+            <a:srgbClr val="F2B705"/>
+          </a:solidFill>
+          <a:ln>
+            <a:noFill/>
+          </a:ln>
+          <a:effectLst/>
+        </p:spPr>
+        <p:style>
+          <a:lnRef idx="1">
+            <a:schemeClr val="accent1"/>
+          </a:lnRef>
+          <a:fillRef idx="3">
+            <a:schemeClr val="accent1"/>
+          </a:fillRef>
+          <a:effectRef idx="2">
+            <a:schemeClr val="accent1"/>
+          </a:effectRef>
+          <a:fontRef idx="minor">
+            <a:schemeClr val="lt1"/>
+          </a:fontRef>
+        </p:style>
+        <p:txBody>
+          <a:bodyPr rtlCol="0" anchor="ctr" lIns="0" rIns="0" tIns="0" bIns="0"/>
+          <a:lstStyle/>
+          <a:p>
+            <a:pPr algn="ctr"/>
+            <a:r>
+              <a:rPr sz="1400" b="1">
+                <a:solidFill>
+                  <a:srgbClr val="202122"/>
+                </a:solidFill>
+                <a:latin typeface="Calibri"/>
+              </a:rPr>
+              <a:t>3</a:t>
+            </a:r>
+          </a:p>
+        </p:txBody>
+      </p:sp>
+      <p:sp>
+        <p:nvSpPr>
+          <p:cNvPr id="11" name="TextBox 10"/>
+          <p:cNvSpPr txBox="1"/>
+          <p:nvPr/>
+        </p:nvSpPr>
+        <p:spPr>
+          <a:xfrm>
+            <a:off x="1234440" y="3513124"/>
+            <a:ext cx="10408615" cy="791870"/>
+          </a:xfrm>
+          <a:prstGeom prst="rect">
+            <a:avLst/>
+          </a:prstGeom>
+          <a:noFill/>
+        </p:spPr>
+        <p:txBody>
+          <a:bodyPr wrap="square" anchor="t" lIns="0" rIns="0" tIns="0" bIns="0"/>
+          <a:lstStyle/>
+          <a:p>
+            <a:pPr algn="l"/>
+            <a:r>
+              <a:rPr sz="1800" b="0" i="0">
+                <a:solidFill>
+                  <a:srgbClr val="54595D"/>
+                </a:solidFill>
+                <a:latin typeface="Calibri"/>
+              </a:rPr>
+              <a:t>Two 10 ohm resistors in parallel: total resistance?</a:t>
+            </a:r>
+          </a:p>
+          <a:p>
+            <a:r>
+              <a:rPr sz="1800" b="1">
+                <a:solidFill>
+                  <a:srgbClr val="03306E"/>
+                </a:solidFill>
+                <a:latin typeface="Calibri"/>
+              </a:rPr>
+              <a:t>5 ohms.</a:t>
+            </a:r>
+          </a:p>
+        </p:txBody>
+      </p:sp>
+      <p:sp>
+        <p:nvSpPr>
+          <p:cNvPr id="12" name="Oval 11"/>
+          <p:cNvSpPr/>
+          <p:nvPr/>
+        </p:nvSpPr>
+        <p:spPr>
+          <a:xfrm>
+            <a:off x="548640" y="4487875"/>
+            <a:ext cx="411480" cy="411480"/>
+          </a:xfrm>
+          <a:prstGeom prst="ellipse">
+            <a:avLst/>
+          </a:prstGeom>
+          <a:solidFill>
+            <a:srgbClr val="F2B705"/>
+          </a:solidFill>
+          <a:ln>
+            <a:noFill/>
+          </a:ln>
+          <a:effectLst/>
+        </p:spPr>
+        <p:style>
+          <a:lnRef idx="1">
+            <a:schemeClr val="accent1"/>
+          </a:lnRef>
+          <a:fillRef idx="3">
+            <a:schemeClr val="accent1"/>
+          </a:fillRef>
+          <a:effectRef idx="2">
+            <a:schemeClr val="accent1"/>
+          </a:effectRef>
+          <a:fontRef idx="minor">
+            <a:schemeClr val="lt1"/>
+          </a:fontRef>
+        </p:style>
+        <p:txBody>
+          <a:bodyPr rtlCol="0" anchor="ctr" lIns="0" rIns="0" tIns="0" bIns="0"/>
+          <a:lstStyle/>
+          <a:p>
+            <a:pPr algn="ctr"/>
+            <a:r>
+              <a:rPr sz="1400" b="1">
+                <a:solidFill>
+                  <a:srgbClr val="202122"/>
+                </a:solidFill>
+                <a:latin typeface="Calibri"/>
+              </a:rPr>
+              <a:t>4</a:t>
+            </a:r>
+          </a:p>
+        </p:txBody>
+      </p:sp>
+      <p:sp>
+        <p:nvSpPr>
+          <p:cNvPr id="13" name="TextBox 12"/>
+          <p:cNvSpPr txBox="1"/>
+          <p:nvPr/>
+        </p:nvSpPr>
+        <p:spPr>
+          <a:xfrm>
+            <a:off x="1234440" y="4469587"/>
+            <a:ext cx="10408615" cy="791870"/>
+          </a:xfrm>
+          <a:prstGeom prst="rect">
+            <a:avLst/>
+          </a:prstGeom>
+          <a:noFill/>
+        </p:spPr>
+        <p:txBody>
+          <a:bodyPr wrap="square" anchor="t" lIns="0" rIns="0" tIns="0" bIns="0"/>
+          <a:lstStyle/>
+          <a:p>
+            <a:pPr algn="l"/>
+            <a:r>
+              <a:rPr sz="1800" b="0" i="0">
+                <a:solidFill>
+                  <a:srgbClr val="54595D"/>
+                </a:solidFill>
+                <a:latin typeface="Calibri"/>
+              </a:rPr>
+              <a:t>What does an RCD do?</a:t>
+            </a:r>
+          </a:p>
+          <a:p>
+            <a:r>
+              <a:rPr sz="1800" b="1">
+                <a:solidFill>
+                  <a:srgbClr val="03306E"/>
+                </a:solidFill>
+                <a:latin typeface="Calibri"/>
+              </a:rPr>
+              <a:t>Cuts the supply when it detects a current imbalance (leakage).</a:t>
+            </a:r>
+          </a:p>
+        </p:txBody>
+      </p:sp>
+      <p:sp>
+        <p:nvSpPr>
+          <p:cNvPr id="14" name="Oval 13"/>
+          <p:cNvSpPr/>
+          <p:nvPr/>
+        </p:nvSpPr>
+        <p:spPr>
+          <a:xfrm>
+            <a:off x="548640" y="5444337"/>
+            <a:ext cx="411480" cy="411480"/>
+          </a:xfrm>
+          <a:prstGeom prst="ellipse">
+            <a:avLst/>
+          </a:prstGeom>
+          <a:solidFill>
+            <a:srgbClr val="F2B705"/>
+          </a:solidFill>
+          <a:ln>
+            <a:noFill/>
+          </a:ln>
+          <a:effectLst/>
+        </p:spPr>
+        <p:style>
+          <a:lnRef idx="1">
+            <a:schemeClr val="accent1"/>
+          </a:lnRef>
+          <a:fillRef idx="3">
+            <a:schemeClr val="accent1"/>
+          </a:fillRef>
+          <a:effectRef idx="2">
+            <a:schemeClr val="accent1"/>
+          </a:effectRef>
+          <a:fontRef idx="minor">
+            <a:schemeClr val="lt1"/>
+          </a:fontRef>
+        </p:style>
+        <p:txBody>
+          <a:bodyPr rtlCol="0" anchor="ctr" lIns="0" rIns="0" tIns="0" bIns="0"/>
+          <a:lstStyle/>
+          <a:p>
+            <a:pPr algn="ctr"/>
+            <a:r>
+              <a:rPr sz="1400" b="1">
+                <a:solidFill>
+                  <a:srgbClr val="202122"/>
+                </a:solidFill>
+                <a:latin typeface="Calibri"/>
+              </a:rPr>
+              <a:t>5</a:t>
+            </a:r>
+          </a:p>
+        </p:txBody>
+      </p:sp>
+      <p:sp>
+        <p:nvSpPr>
+          <p:cNvPr id="15" name="TextBox 14"/>
+          <p:cNvSpPr txBox="1"/>
+          <p:nvPr/>
+        </p:nvSpPr>
+        <p:spPr>
+          <a:xfrm>
+            <a:off x="1234440" y="5426049"/>
+            <a:ext cx="10408615" cy="791870"/>
+          </a:xfrm>
+          <a:prstGeom prst="rect">
+            <a:avLst/>
+          </a:prstGeom>
+          <a:noFill/>
+        </p:spPr>
+        <p:txBody>
+          <a:bodyPr wrap="square" anchor="t" lIns="0" rIns="0" tIns="0" bIns="0"/>
+          <a:lstStyle/>
+          <a:p>
+            <a:pPr algn="l"/>
+            <a:r>
+              <a:rPr sz="1800" b="0" i="0">
+                <a:solidFill>
+                  <a:srgbClr val="54595D"/>
+                </a:solidFill>
+                <a:latin typeface="Calibri"/>
+              </a:rPr>
+              <a:t>What does a diode do?</a:t>
+            </a:r>
+          </a:p>
+          <a:p>
+            <a:r>
+              <a:rPr sz="1800" b="1">
+                <a:solidFill>
+                  <a:srgbClr val="03306E"/>
+                </a:solidFill>
+                <a:latin typeface="Calibri"/>
+              </a:rPr>
+              <a:t>Lets current flow in one direction only.</a:t>
+            </a:r>
+          </a:p>
+        </p:txBody>
+      </p:sp>
+    </p:spTree>
+  </p:cSld>
+  <p:clrMapOvr>
+    <a:masterClrMapping/>
+  </p:clrMapOvr>
+</p:sld>
+</file>
+
+<file path=ppt/slides/slide15.xml><?xml version="1.0" encoding="utf-8"?>
+<p:sld xmlns:a="http://schemas.openxmlformats.org/drawingml/2006/main" xmlns:p="http://schemas.openxmlformats.org/presentationml/2006/main" xmlns:r="http://schemas.openxmlformats.org/officeDocument/2006/relationships">
+  <p:cSld>
+    <p:bg>
+      <p:bgPr>
+        <a:solidFill>
+          <a:srgbClr val="FFFFFF"/>
+        </a:solidFill>
+        <a:effectLst/>
+      </p:bgPr>
+    </p:bg>
+    <p:spTree>
+      <p:nvGrpSpPr>
+        <p:cNvPr id="1" name=""/>
+        <p:cNvGrpSpPr/>
+        <p:nvPr/>
+      </p:nvGrpSpPr>
+      <p:grpSpPr/>
+      <p:sp>
+        <p:nvSpPr>
+          <p:cNvPr id="2" name="TextBox 1"/>
+          <p:cNvSpPr txBox="1"/>
+          <p:nvPr/>
+        </p:nvSpPr>
+        <p:spPr>
+          <a:xfrm>
+            <a:off x="548640" y="320040"/>
+            <a:ext cx="11094415" cy="274320"/>
+          </a:xfrm>
+          <a:prstGeom prst="rect">
+            <a:avLst/>
+          </a:prstGeom>
+          <a:noFill/>
+        </p:spPr>
+        <p:txBody>
+          <a:bodyPr wrap="square" anchor="t" lIns="0" rIns="0" tIns="0" bIns="0"/>
+          <a:lstStyle/>
+          <a:p>
+            <a:pPr algn="l"/>
+            <a:r>
+              <a:rPr sz="1100" b="1" i="0">
+                <a:solidFill>
+                  <a:srgbClr val="54595D"/>
+                </a:solidFill>
+                <a:latin typeface="Calibri"/>
+              </a:rPr>
+              <a:t>ENGINEERING CORE  ·  Core topic 8</a:t>
+            </a:r>
+          </a:p>
+        </p:txBody>
+      </p:sp>
+      <p:sp>
+        <p:nvSpPr>
+          <p:cNvPr id="3" name="TextBox 2"/>
+          <p:cNvSpPr txBox="1"/>
+          <p:nvPr/>
+        </p:nvSpPr>
+        <p:spPr>
+          <a:xfrm>
+            <a:off x="548640" y="566928"/>
+            <a:ext cx="11094415" cy="822960"/>
+          </a:xfrm>
+          <a:prstGeom prst="rect">
+            <a:avLst/>
+          </a:prstGeom>
+          <a:noFill/>
+        </p:spPr>
+        <p:txBody>
+          <a:bodyPr wrap="square" anchor="ctr" lIns="0" rIns="0" tIns="0" bIns="0"/>
+          <a:lstStyle/>
+          <a:p>
+            <a:pPr algn="l"/>
+            <a:r>
+              <a:rPr sz="3200" b="1" i="0">
+                <a:solidFill>
+                  <a:srgbClr val="03306E"/>
+                </a:solidFill>
+                <a:latin typeface="Cambria"/>
+              </a:rPr>
+              <a:t>Activity: Circuit calculations</a:t>
+            </a:r>
+          </a:p>
+        </p:txBody>
+      </p:sp>
+      <p:sp>
+        <p:nvSpPr>
+          <p:cNvPr id="4" name="TextBox 3"/>
+          <p:cNvSpPr txBox="1"/>
+          <p:nvPr/>
+        </p:nvSpPr>
+        <p:spPr>
+          <a:xfrm>
+            <a:off x="548640" y="6446520"/>
+            <a:ext cx="8229600" cy="274320"/>
+          </a:xfrm>
+          <a:prstGeom prst="rect">
+            <a:avLst/>
+          </a:prstGeom>
+          <a:noFill/>
+        </p:spPr>
+        <p:txBody>
+          <a:bodyPr wrap="square" anchor="t" lIns="0" rIns="0" tIns="0" bIns="0"/>
+          <a:lstStyle/>
+          <a:p>
+            <a:pPr algn="l"/>
+            <a:r>
+              <a:rPr sz="1000" b="0" i="0">
+                <a:solidFill>
+                  <a:srgbClr val="54595D"/>
+                </a:solidFill>
+                <a:latin typeface="Calibri"/>
+              </a:rPr>
+              <a:t>Design and Development for Engineering and Manufacturing T Level  ·  Electrical and Electronic Principles</a:t>
+            </a:r>
+          </a:p>
+        </p:txBody>
+      </p:sp>
+      <p:sp>
+        <p:nvSpPr>
+          <p:cNvPr id="5" name="TextBox 4"/>
+          <p:cNvSpPr txBox="1"/>
+          <p:nvPr/>
+        </p:nvSpPr>
+        <p:spPr>
+          <a:xfrm>
+            <a:off x="10728655" y="6446520"/>
+            <a:ext cx="914400" cy="274320"/>
+          </a:xfrm>
+          <a:prstGeom prst="rect">
+            <a:avLst/>
+          </a:prstGeom>
+          <a:noFill/>
+        </p:spPr>
+        <p:txBody>
+          <a:bodyPr wrap="square" anchor="t" lIns="0" rIns="0" tIns="0" bIns="0"/>
+          <a:lstStyle/>
+          <a:p>
+            <a:pPr algn="r"/>
+            <a:r>
+              <a:rPr sz="1000" b="0" i="0">
+                <a:solidFill>
+                  <a:srgbClr val="54595D"/>
+                </a:solidFill>
+                <a:latin typeface="Calibri"/>
+              </a:rPr>
+              <a:t>15</a:t>
+            </a:r>
+          </a:p>
+        </p:txBody>
+      </p:sp>
+      <p:sp>
+        <p:nvSpPr>
+          <p:cNvPr id="6" name="Rounded Rectangle 5"/>
+          <p:cNvSpPr/>
+          <p:nvPr/>
+        </p:nvSpPr>
+        <p:spPr>
+          <a:xfrm>
+            <a:off x="548640" y="1508760"/>
+            <a:ext cx="2011680" cy="457200"/>
+          </a:xfrm>
+          <a:prstGeom prst="roundRect">
+            <a:avLst>
+              <a:gd name="adj" fmla="val 50000"/>
+            </a:avLst>
+          </a:prstGeom>
+          <a:solidFill>
+            <a:srgbClr val="F2B705"/>
+          </a:solidFill>
+          <a:ln>
+            <a:noFill/>
+          </a:ln>
+          <a:effectLst/>
+        </p:spPr>
+        <p:style>
+          <a:lnRef idx="1">
+            <a:schemeClr val="accent1"/>
+          </a:lnRef>
+          <a:fillRef idx="3">
+            <a:schemeClr val="accent1"/>
+          </a:fillRef>
+          <a:effectRef idx="2">
+            <a:schemeClr val="accent1"/>
+          </a:effectRef>
+          <a:fontRef idx="minor">
+            <a:schemeClr val="lt1"/>
+          </a:fontRef>
+        </p:style>
+        <p:txBody>
+          <a:bodyPr rtlCol="0" anchor="ctr"/>
+          <a:lstStyle/>
+          <a:p/>
+        </p:txBody>
+      </p:sp>
+      <p:sp>
+        <p:nvSpPr>
+          <p:cNvPr id="7" name="TextBox 6"/>
+          <p:cNvSpPr txBox="1"/>
+          <p:nvPr/>
+        </p:nvSpPr>
+        <p:spPr>
+          <a:xfrm>
+            <a:off x="548640" y="1508760"/>
+            <a:ext cx="2011680" cy="457200"/>
+          </a:xfrm>
+          <a:prstGeom prst="rect">
+            <a:avLst/>
+          </a:prstGeom>
+          <a:noFill/>
+        </p:spPr>
+        <p:txBody>
+          <a:bodyPr wrap="square" anchor="ctr" lIns="0" rIns="0" tIns="0" bIns="0"/>
+          <a:lstStyle/>
+          <a:p>
+            <a:pPr algn="ctr"/>
+            <a:r>
+              <a:rPr sz="1400" b="1" i="0">
+                <a:solidFill>
+                  <a:srgbClr val="202122"/>
+                </a:solidFill>
+                <a:latin typeface="Calibri"/>
+              </a:rPr>
+              <a:t>30 minutes</a:t>
+            </a:r>
+          </a:p>
+        </p:txBody>
+      </p:sp>
+      <p:sp>
+        <p:nvSpPr>
+          <p:cNvPr id="8" name="TextBox 7"/>
+          <p:cNvSpPr txBox="1"/>
+          <p:nvPr/>
+        </p:nvSpPr>
+        <p:spPr>
+          <a:xfrm>
+            <a:off x="2743200" y="1508760"/>
+            <a:ext cx="4754880" cy="457200"/>
+          </a:xfrm>
+          <a:prstGeom prst="rect">
+            <a:avLst/>
+          </a:prstGeom>
+          <a:noFill/>
+        </p:spPr>
+        <p:txBody>
+          <a:bodyPr wrap="square" anchor="ctr" lIns="0" rIns="0" tIns="0" bIns="0"/>
+          <a:lstStyle/>
+          <a:p>
+            <a:pPr algn="l"/>
+            <a:r>
+              <a:rPr sz="1400" b="0" i="1">
+                <a:solidFill>
+                  <a:srgbClr val="54595D"/>
+                </a:solidFill>
+                <a:latin typeface="Calibri"/>
+              </a:rPr>
+              <a:t>Pairs, with breadboards if available</a:t>
+            </a:r>
+          </a:p>
+        </p:txBody>
+      </p:sp>
+      <p:sp>
+        <p:nvSpPr>
+          <p:cNvPr id="9" name="Oval 8"/>
+          <p:cNvSpPr/>
+          <p:nvPr/>
+        </p:nvSpPr>
+        <p:spPr>
+          <a:xfrm>
+            <a:off x="548640" y="2482596"/>
+            <a:ext cx="384048" cy="384048"/>
+          </a:xfrm>
+          <a:prstGeom prst="ellipse">
+            <a:avLst/>
+          </a:prstGeom>
+          <a:solidFill>
+            <a:srgbClr val="0645AD"/>
+          </a:solidFill>
+          <a:ln>
+            <a:noFill/>
+          </a:ln>
+          <a:effectLst/>
+        </p:spPr>
+        <p:style>
+          <a:lnRef idx="1">
+            <a:schemeClr val="accent1"/>
+          </a:lnRef>
+          <a:fillRef idx="3">
+            <a:schemeClr val="accent1"/>
+          </a:fillRef>
+          <a:effectRef idx="2">
+            <a:schemeClr val="accent1"/>
+          </a:effectRef>
+          <a:fontRef idx="minor">
+            <a:schemeClr val="lt1"/>
+          </a:fontRef>
+        </p:style>
+        <p:txBody>
+          <a:bodyPr rtlCol="0" anchor="ctr" lIns="0" rIns="0" tIns="0" bIns="0"/>
+          <a:lstStyle/>
+          <a:p>
+            <a:pPr algn="ctr"/>
+            <a:r>
+              <a:rPr sz="1300" b="1">
+                <a:solidFill>
+                  <a:srgbClr val="FFFFFF"/>
+                </a:solidFill>
+                <a:latin typeface="Calibri"/>
+              </a:rPr>
+              <a:t>1</a:t>
+            </a:r>
+          </a:p>
+        </p:txBody>
+      </p:sp>
+      <p:sp>
+        <p:nvSpPr>
+          <p:cNvPr id="10" name="TextBox 9"/>
+          <p:cNvSpPr txBox="1"/>
+          <p:nvPr/>
+        </p:nvSpPr>
+        <p:spPr>
+          <a:xfrm>
+            <a:off x="1143000" y="2240280"/>
+            <a:ext cx="5943600" cy="868680"/>
+          </a:xfrm>
+          <a:prstGeom prst="rect">
+            <a:avLst/>
+          </a:prstGeom>
+          <a:noFill/>
+        </p:spPr>
+        <p:txBody>
+          <a:bodyPr wrap="square" anchor="ctr" lIns="0" rIns="0" tIns="0" bIns="0"/>
+          <a:lstStyle/>
+          <a:p>
+            <a:pPr algn="l"/>
+            <a:r>
+              <a:rPr sz="1700" b="0" i="0">
+                <a:solidFill>
+                  <a:srgbClr val="202122"/>
+                </a:solidFill>
+                <a:latin typeface="Calibri"/>
+              </a:rPr>
+              <a:t>Build (or sketch) a series and a parallel circuit with two resistors.</a:t>
+            </a:r>
+          </a:p>
+        </p:txBody>
+      </p:sp>
+      <p:sp>
+        <p:nvSpPr>
+          <p:cNvPr id="11" name="Oval 10"/>
+          <p:cNvSpPr/>
+          <p:nvPr/>
+        </p:nvSpPr>
+        <p:spPr>
+          <a:xfrm>
+            <a:off x="548640" y="3461004"/>
+            <a:ext cx="384048" cy="384048"/>
+          </a:xfrm>
+          <a:prstGeom prst="ellipse">
+            <a:avLst/>
+          </a:prstGeom>
+          <a:solidFill>
+            <a:srgbClr val="0645AD"/>
+          </a:solidFill>
+          <a:ln>
+            <a:noFill/>
+          </a:ln>
+          <a:effectLst/>
+        </p:spPr>
+        <p:style>
+          <a:lnRef idx="1">
+            <a:schemeClr val="accent1"/>
+          </a:lnRef>
+          <a:fillRef idx="3">
+            <a:schemeClr val="accent1"/>
+          </a:fillRef>
+          <a:effectRef idx="2">
+            <a:schemeClr val="accent1"/>
+          </a:effectRef>
+          <a:fontRef idx="minor">
+            <a:schemeClr val="lt1"/>
+          </a:fontRef>
+        </p:style>
+        <p:txBody>
+          <a:bodyPr rtlCol="0" anchor="ctr" lIns="0" rIns="0" tIns="0" bIns="0"/>
+          <a:lstStyle/>
+          <a:p>
+            <a:pPr algn="ctr"/>
+            <a:r>
+              <a:rPr sz="1300" b="1">
+                <a:solidFill>
+                  <a:srgbClr val="FFFFFF"/>
+                </a:solidFill>
+                <a:latin typeface="Calibri"/>
+              </a:rPr>
+              <a:t>2</a:t>
+            </a:r>
+          </a:p>
+        </p:txBody>
+      </p:sp>
+      <p:sp>
+        <p:nvSpPr>
+          <p:cNvPr id="12" name="TextBox 11"/>
+          <p:cNvSpPr txBox="1"/>
+          <p:nvPr/>
+        </p:nvSpPr>
+        <p:spPr>
+          <a:xfrm>
+            <a:off x="1143000" y="3218688"/>
+            <a:ext cx="5943600" cy="868680"/>
+          </a:xfrm>
+          <a:prstGeom prst="rect">
+            <a:avLst/>
+          </a:prstGeom>
+          <a:noFill/>
+        </p:spPr>
+        <p:txBody>
+          <a:bodyPr wrap="square" anchor="ctr" lIns="0" rIns="0" tIns="0" bIns="0"/>
+          <a:lstStyle/>
+          <a:p>
+            <a:pPr algn="l"/>
+            <a:r>
+              <a:rPr sz="1700" b="0" i="0">
+                <a:solidFill>
+                  <a:srgbClr val="202122"/>
+                </a:solidFill>
+                <a:latin typeface="Calibri"/>
+              </a:rPr>
+              <a:t>Predict currents and voltages using Ohm's law.</a:t>
+            </a:r>
+          </a:p>
+        </p:txBody>
+      </p:sp>
+      <p:sp>
+        <p:nvSpPr>
+          <p:cNvPr id="13" name="Oval 12"/>
+          <p:cNvSpPr/>
+          <p:nvPr/>
+        </p:nvSpPr>
+        <p:spPr>
+          <a:xfrm>
+            <a:off x="548640" y="4439412"/>
+            <a:ext cx="384048" cy="384048"/>
+          </a:xfrm>
+          <a:prstGeom prst="ellipse">
+            <a:avLst/>
+          </a:prstGeom>
+          <a:solidFill>
+            <a:srgbClr val="0645AD"/>
+          </a:solidFill>
+          <a:ln>
+            <a:noFill/>
+          </a:ln>
+          <a:effectLst/>
+        </p:spPr>
+        <p:style>
+          <a:lnRef idx="1">
+            <a:schemeClr val="accent1"/>
+          </a:lnRef>
+          <a:fillRef idx="3">
+            <a:schemeClr val="accent1"/>
+          </a:fillRef>
+          <a:effectRef idx="2">
+            <a:schemeClr val="accent1"/>
+          </a:effectRef>
+          <a:fontRef idx="minor">
+            <a:schemeClr val="lt1"/>
+          </a:fontRef>
+        </p:style>
+        <p:txBody>
+          <a:bodyPr rtlCol="0" anchor="ctr" lIns="0" rIns="0" tIns="0" bIns="0"/>
+          <a:lstStyle/>
+          <a:p>
+            <a:pPr algn="ctr"/>
+            <a:r>
+              <a:rPr sz="1300" b="1">
+                <a:solidFill>
+                  <a:srgbClr val="FFFFFF"/>
+                </a:solidFill>
+                <a:latin typeface="Calibri"/>
+              </a:rPr>
+              <a:t>3</a:t>
+            </a:r>
+          </a:p>
+        </p:txBody>
+      </p:sp>
+      <p:sp>
+        <p:nvSpPr>
+          <p:cNvPr id="14" name="TextBox 13"/>
+          <p:cNvSpPr txBox="1"/>
+          <p:nvPr/>
+        </p:nvSpPr>
+        <p:spPr>
+          <a:xfrm>
+            <a:off x="1143000" y="4197096"/>
+            <a:ext cx="5943600" cy="868680"/>
+          </a:xfrm>
+          <a:prstGeom prst="rect">
+            <a:avLst/>
+          </a:prstGeom>
+          <a:noFill/>
+        </p:spPr>
+        <p:txBody>
+          <a:bodyPr wrap="square" anchor="ctr" lIns="0" rIns="0" tIns="0" bIns="0"/>
+          <a:lstStyle/>
+          <a:p>
+            <a:pPr algn="l"/>
+            <a:r>
+              <a:rPr sz="1700" b="0" i="0">
+                <a:solidFill>
+                  <a:srgbClr val="202122"/>
+                </a:solidFill>
+                <a:latin typeface="Calibri"/>
+              </a:rPr>
+              <a:t>Measure them with a multimeter.</a:t>
+            </a:r>
+          </a:p>
+        </p:txBody>
+      </p:sp>
+      <p:sp>
+        <p:nvSpPr>
+          <p:cNvPr id="15" name="Oval 14"/>
+          <p:cNvSpPr/>
+          <p:nvPr/>
+        </p:nvSpPr>
+        <p:spPr>
+          <a:xfrm>
+            <a:off x="548640" y="5417820"/>
+            <a:ext cx="384048" cy="384048"/>
+          </a:xfrm>
+          <a:prstGeom prst="ellipse">
+            <a:avLst/>
+          </a:prstGeom>
+          <a:solidFill>
+            <a:srgbClr val="0645AD"/>
+          </a:solidFill>
+          <a:ln>
+            <a:noFill/>
+          </a:ln>
+          <a:effectLst/>
+        </p:spPr>
+        <p:style>
+          <a:lnRef idx="1">
+            <a:schemeClr val="accent1"/>
+          </a:lnRef>
+          <a:fillRef idx="3">
+            <a:schemeClr val="accent1"/>
+          </a:fillRef>
+          <a:effectRef idx="2">
+            <a:schemeClr val="accent1"/>
+          </a:effectRef>
+          <a:fontRef idx="minor">
+            <a:schemeClr val="lt1"/>
+          </a:fontRef>
+        </p:style>
+        <p:txBody>
+          <a:bodyPr rtlCol="0" anchor="ctr" lIns="0" rIns="0" tIns="0" bIns="0"/>
+          <a:lstStyle/>
+          <a:p>
+            <a:pPr algn="ctr"/>
+            <a:r>
+              <a:rPr sz="1300" b="1">
+                <a:solidFill>
+                  <a:srgbClr val="FFFFFF"/>
+                </a:solidFill>
+                <a:latin typeface="Calibri"/>
+              </a:rPr>
+              <a:t>4</a:t>
+            </a:r>
+          </a:p>
+        </p:txBody>
+      </p:sp>
+      <p:sp>
+        <p:nvSpPr>
+          <p:cNvPr id="16" name="TextBox 15"/>
+          <p:cNvSpPr txBox="1"/>
+          <p:nvPr/>
+        </p:nvSpPr>
+        <p:spPr>
+          <a:xfrm>
+            <a:off x="1143000" y="5175504"/>
+            <a:ext cx="5943600" cy="868680"/>
+          </a:xfrm>
+          <a:prstGeom prst="rect">
+            <a:avLst/>
+          </a:prstGeom>
+          <a:noFill/>
+        </p:spPr>
+        <p:txBody>
+          <a:bodyPr wrap="square" anchor="ctr" lIns="0" rIns="0" tIns="0" bIns="0"/>
+          <a:lstStyle/>
+          <a:p>
+            <a:pPr algn="l"/>
+            <a:r>
+              <a:rPr sz="1700" b="0" i="0">
+                <a:solidFill>
+                  <a:srgbClr val="202122"/>
+                </a:solidFill>
+                <a:latin typeface="Calibri"/>
+              </a:rPr>
+              <a:t>Explain any differences between prediction and measurement.</a:t>
+            </a:r>
+          </a:p>
+        </p:txBody>
+      </p:sp>
+      <p:sp>
+        <p:nvSpPr>
+          <p:cNvPr id="17" name="Rounded Rectangle 16"/>
+          <p:cNvSpPr/>
+          <p:nvPr/>
+        </p:nvSpPr>
+        <p:spPr>
+          <a:xfrm>
+            <a:off x="7772400" y="1508760"/>
+            <a:ext cx="3867912" cy="4572000"/>
+          </a:xfrm>
+          <a:prstGeom prst="roundRect">
+            <a:avLst>
+              <a:gd name="adj" fmla="val 8000"/>
+            </a:avLst>
+          </a:prstGeom>
+          <a:solidFill>
+            <a:srgbClr val="EAF3FF"/>
+          </a:solidFill>
+          <a:ln>
+            <a:noFill/>
+          </a:ln>
+          <a:effectLst/>
+        </p:spPr>
+        <p:style>
+          <a:lnRef idx="1">
+            <a:schemeClr val="accent1"/>
+          </a:lnRef>
+          <a:fillRef idx="3">
+            <a:schemeClr val="accent1"/>
+          </a:fillRef>
+          <a:effectRef idx="2">
+            <a:schemeClr val="accent1"/>
+          </a:effectRef>
+          <a:fontRef idx="minor">
+            <a:schemeClr val="lt1"/>
+          </a:fontRef>
+        </p:style>
+        <p:txBody>
+          <a:bodyPr rtlCol="0" anchor="ctr"/>
+          <a:lstStyle/>
+          <a:p/>
+        </p:txBody>
+      </p:sp>
+      <p:sp>
+        <p:nvSpPr>
+          <p:cNvPr id="18" name="TextBox 17"/>
+          <p:cNvSpPr txBox="1"/>
+          <p:nvPr/>
+        </p:nvSpPr>
+        <p:spPr>
+          <a:xfrm>
+            <a:off x="8046720" y="1737360"/>
+            <a:ext cx="3291840" cy="365760"/>
+          </a:xfrm>
+          <a:prstGeom prst="rect">
+            <a:avLst/>
+          </a:prstGeom>
+          <a:noFill/>
+        </p:spPr>
+        <p:txBody>
+          <a:bodyPr wrap="square" anchor="t" lIns="0" rIns="0" tIns="0" bIns="0"/>
+          <a:lstStyle/>
+          <a:p>
+            <a:pPr algn="l"/>
+            <a:r>
+              <a:rPr sz="1300" b="1" i="0">
+                <a:solidFill>
+                  <a:srgbClr val="0645AD"/>
+                </a:solidFill>
+                <a:latin typeface="Calibri"/>
+              </a:rPr>
+              <a:t>SUCCESS CRITERIA</a:t>
+            </a:r>
+          </a:p>
+        </p:txBody>
+      </p:sp>
+      <p:sp>
+        <p:nvSpPr>
+          <p:cNvPr id="19" name="TextBox 18"/>
+          <p:cNvSpPr txBox="1"/>
+          <p:nvPr/>
+        </p:nvSpPr>
+        <p:spPr>
+          <a:xfrm>
+            <a:off x="8046720" y="2240280"/>
+            <a:ext cx="3337560" cy="3657600"/>
+          </a:xfrm>
+          <a:prstGeom prst="rect">
+            <a:avLst/>
+          </a:prstGeom>
+          <a:noFill/>
+        </p:spPr>
+        <p:txBody>
+          <a:bodyPr wrap="square" lIns="0" rIns="0" tIns="0" bIns="0">
+            <a:spAutoFit/>
+          </a:bodyPr>
+          <a:lstStyle/>
+          <a:p>
+            <a:pPr marL="274320" indent="-274320">
+              <a:spcAft>
+                <a:spcPts val="810"/>
+              </a:spcAft>
+              <a:buClr>
+                <a:srgbClr val="0645AD"/>
+              </a:buClr>
+              <a:buFont typeface="Arial"/>
+              <a:buChar char="•"/>
+            </a:pPr>
+            <a:r>
+              <a:rPr sz="1800" b="0">
+                <a:solidFill>
+                  <a:srgbClr val="202122"/>
+                </a:solidFill>
+                <a:latin typeface="Calibri"/>
+              </a:rPr>
+              <a:t>Predictions calculated correctly</a:t>
+            </a:r>
+          </a:p>
+          <a:p>
+            <a:pPr marL="274320" indent="-274320">
+              <a:spcAft>
+                <a:spcPts val="810"/>
+              </a:spcAft>
+              <a:buClr>
+                <a:srgbClr val="0645AD"/>
+              </a:buClr>
+              <a:buFont typeface="Arial"/>
+              <a:buChar char="•"/>
+            </a:pPr>
+            <a:r>
+              <a:rPr sz="1800" b="0">
+                <a:solidFill>
+                  <a:srgbClr val="202122"/>
+                </a:solidFill>
+                <a:latin typeface="Calibri"/>
+              </a:rPr>
+              <a:t>Meter used safely</a:t>
+            </a:r>
+          </a:p>
+          <a:p>
+            <a:pPr marL="274320" indent="-274320">
+              <a:spcAft>
+                <a:spcPts val="810"/>
+              </a:spcAft>
+              <a:buClr>
+                <a:srgbClr val="0645AD"/>
+              </a:buClr>
+              <a:buFont typeface="Arial"/>
+              <a:buChar char="•"/>
+            </a:pPr>
+            <a:r>
+              <a:rPr sz="1800" b="0">
+                <a:solidFill>
+                  <a:srgbClr val="202122"/>
+                </a:solidFill>
+                <a:latin typeface="Calibri"/>
+              </a:rPr>
+              <a:t>Differences explained (tolerance, meter resistance)</a:t>
+            </a:r>
+          </a:p>
+        </p:txBody>
+      </p:sp>
+    </p:spTree>
+  </p:cSld>
+  <p:clrMapOvr>
+    <a:masterClrMapping/>
+  </p:clrMapOvr>
+</p:sld>
+</file>
+
+<file path=ppt/slides/slide16.xml><?xml version="1.0" encoding="utf-8"?>
+<p:sld xmlns:a="http://schemas.openxmlformats.org/drawingml/2006/main" xmlns:p="http://schemas.openxmlformats.org/presentationml/2006/main" xmlns:r="http://schemas.openxmlformats.org/officeDocument/2006/relationships">
+  <p:cSld>
+    <p:bg>
+      <p:bgPr>
+        <a:solidFill>
           <a:srgbClr val="03306E"/>
         </a:solidFill>
         <a:effectLst/>
@@ -5363,6 +9073,416 @@
                 <a:latin typeface="Calibri"/>
               </a:rPr>
               <a:t>3</a:t>
+            </a:r>
+          </a:p>
+        </p:txBody>
+      </p:sp>
+      <p:sp>
+        <p:nvSpPr>
+          <p:cNvPr id="6" name="TextBox 5"/>
+          <p:cNvSpPr txBox="1"/>
+          <p:nvPr/>
+        </p:nvSpPr>
+        <p:spPr>
+          <a:xfrm>
+            <a:off x="548640" y="1554480"/>
+            <a:ext cx="6720840" cy="4617720"/>
+          </a:xfrm>
+          <a:prstGeom prst="rect">
+            <a:avLst/>
+          </a:prstGeom>
+          <a:noFill/>
+        </p:spPr>
+        <p:txBody>
+          <a:bodyPr wrap="square" lIns="0" rIns="0" tIns="0" bIns="0">
+            <a:spAutoFit/>
+          </a:bodyPr>
+          <a:lstStyle/>
+          <a:p>
+            <a:pPr>
+              <a:spcAft>
+                <a:spcPts val="1320"/>
+              </a:spcAft>
+            </a:pPr>
+            <a:r>
+              <a:rPr sz="2200" b="0">
+                <a:solidFill>
+                  <a:srgbClr val="202122"/>
+                </a:solidFill>
+                <a:latin typeface="Calibri"/>
+              </a:rPr>
+              <a:t>Current (I) is the flow of charge, measured in amps. Voltage (V) is the push that drives it, in volts. Resistance (R) opposes the flow, in ohms. Power (P) is the rate energy is used, in watts.</a:t>
+            </a:r>
+          </a:p>
+          <a:p>
+            <a:pPr>
+              <a:spcAft>
+                <a:spcPts val="1320"/>
+              </a:spcAft>
+            </a:pPr>
+            <a:r>
+              <a:rPr sz="2200" b="1">
+                <a:solidFill>
+                  <a:srgbClr val="202122"/>
+                </a:solidFill>
+                <a:latin typeface="Calibri"/>
+              </a:rPr>
+              <a:t>Ohm's law:</a:t>
+            </a:r>
+            <a:r>
+              <a:rPr sz="2200" b="0">
+                <a:solidFill>
+                  <a:srgbClr val="202122"/>
+                </a:solidFill>
+                <a:latin typeface="Calibri"/>
+              </a:rPr>
+              <a:t> V = I x R. Power: P = V x I.</a:t>
+            </a:r>
+          </a:p>
+          <a:p>
+            <a:pPr>
+              <a:spcAft>
+                <a:spcPts val="1320"/>
+              </a:spcAft>
+            </a:pPr>
+            <a:r>
+              <a:rPr sz="2200" b="1">
+                <a:solidFill>
+                  <a:srgbClr val="202122"/>
+                </a:solidFill>
+                <a:latin typeface="Calibri"/>
+              </a:rPr>
+              <a:t>Other key ideas:</a:t>
+            </a:r>
+            <a:r>
+              <a:rPr sz="2200" b="0">
+                <a:solidFill>
+                  <a:srgbClr val="202122"/>
+                </a:solidFill>
+                <a:latin typeface="Calibri"/>
+              </a:rPr>
+              <a:t> capacitance (storing charge), inductance (opposing changes in current), magnetism and electromagnetism (used in motors and relays), and measuring these quantities with a multimeter.</a:t>
+            </a:r>
+          </a:p>
+        </p:txBody>
+      </p:sp>
+      <p:sp>
+        <p:nvSpPr>
+          <p:cNvPr id="7" name="Rounded Rectangle 6"/>
+          <p:cNvSpPr/>
+          <p:nvPr/>
+        </p:nvSpPr>
+        <p:spPr>
+          <a:xfrm>
+            <a:off x="7772400" y="1554480"/>
+            <a:ext cx="3867912" cy="4526280"/>
+          </a:xfrm>
+          <a:prstGeom prst="roundRect">
+            <a:avLst>
+              <a:gd name="adj" fmla="val 8000"/>
+            </a:avLst>
+          </a:prstGeom>
+          <a:solidFill>
+            <a:srgbClr val="03306E"/>
+          </a:solidFill>
+          <a:ln>
+            <a:noFill/>
+          </a:ln>
+          <a:effectLst/>
+        </p:spPr>
+        <p:style>
+          <a:lnRef idx="1">
+            <a:schemeClr val="accent1"/>
+          </a:lnRef>
+          <a:fillRef idx="3">
+            <a:schemeClr val="accent1"/>
+          </a:fillRef>
+          <a:effectRef idx="2">
+            <a:schemeClr val="accent1"/>
+          </a:effectRef>
+          <a:fontRef idx="minor">
+            <a:schemeClr val="lt1"/>
+          </a:fontRef>
+        </p:style>
+        <p:txBody>
+          <a:bodyPr rtlCol="0" anchor="ctr"/>
+          <a:lstStyle/>
+          <a:p/>
+        </p:txBody>
+      </p:sp>
+      <p:sp>
+        <p:nvSpPr>
+          <p:cNvPr id="8" name="Oval 7"/>
+          <p:cNvSpPr/>
+          <p:nvPr/>
+        </p:nvSpPr>
+        <p:spPr>
+          <a:xfrm>
+            <a:off x="8046720" y="1828800"/>
+            <a:ext cx="548640" cy="548640"/>
+          </a:xfrm>
+          <a:prstGeom prst="ellipse">
+            <a:avLst/>
+          </a:prstGeom>
+          <a:solidFill>
+            <a:srgbClr val="F2B705"/>
+          </a:solidFill>
+          <a:ln>
+            <a:noFill/>
+          </a:ln>
+          <a:effectLst/>
+        </p:spPr>
+        <p:style>
+          <a:lnRef idx="1">
+            <a:schemeClr val="accent1"/>
+          </a:lnRef>
+          <a:fillRef idx="3">
+            <a:schemeClr val="accent1"/>
+          </a:fillRef>
+          <a:effectRef idx="2">
+            <a:schemeClr val="accent1"/>
+          </a:effectRef>
+          <a:fontRef idx="minor">
+            <a:schemeClr val="lt1"/>
+          </a:fontRef>
+        </p:style>
+        <p:txBody>
+          <a:bodyPr rtlCol="0" anchor="ctr" lIns="0" rIns="0" tIns="0" bIns="0"/>
+          <a:lstStyle/>
+          <a:p>
+            <a:pPr algn="ctr"/>
+            <a:r>
+              <a:rPr sz="1300" b="1">
+                <a:solidFill>
+                  <a:srgbClr val="202122"/>
+                </a:solidFill>
+                <a:latin typeface="Calibri"/>
+              </a:rPr>
+              <a:t>e.g.</a:t>
+            </a:r>
+          </a:p>
+        </p:txBody>
+      </p:sp>
+      <p:sp>
+        <p:nvSpPr>
+          <p:cNvPr id="9" name="TextBox 8"/>
+          <p:cNvSpPr txBox="1"/>
+          <p:nvPr/>
+        </p:nvSpPr>
+        <p:spPr>
+          <a:xfrm>
+            <a:off x="8046720" y="2560320"/>
+            <a:ext cx="3291840" cy="365760"/>
+          </a:xfrm>
+          <a:prstGeom prst="rect">
+            <a:avLst/>
+          </a:prstGeom>
+          <a:noFill/>
+        </p:spPr>
+        <p:txBody>
+          <a:bodyPr wrap="square" anchor="t" lIns="0" rIns="0" tIns="0" bIns="0"/>
+          <a:lstStyle/>
+          <a:p>
+            <a:pPr algn="l"/>
+            <a:r>
+              <a:rPr sz="1300" b="1" i="0">
+                <a:solidFill>
+                  <a:srgbClr val="A9C8F0"/>
+                </a:solidFill>
+                <a:latin typeface="Calibri"/>
+              </a:rPr>
+              <a:t>EXAMPLE</a:t>
+            </a:r>
+          </a:p>
+        </p:txBody>
+      </p:sp>
+      <p:sp>
+        <p:nvSpPr>
+          <p:cNvPr id="10" name="TextBox 9"/>
+          <p:cNvSpPr txBox="1"/>
+          <p:nvPr/>
+        </p:nvSpPr>
+        <p:spPr>
+          <a:xfrm>
+            <a:off x="8046720" y="2971800"/>
+            <a:ext cx="3291840" cy="2971800"/>
+          </a:xfrm>
+          <a:prstGeom prst="rect">
+            <a:avLst/>
+          </a:prstGeom>
+          <a:noFill/>
+        </p:spPr>
+        <p:txBody>
+          <a:bodyPr wrap="square" anchor="t" lIns="0" rIns="0" tIns="0" bIns="0"/>
+          <a:lstStyle/>
+          <a:p>
+            <a:pPr algn="l"/>
+            <a:r>
+              <a:rPr sz="1900" b="0" i="0">
+                <a:solidFill>
+                  <a:srgbClr val="FFFFFF"/>
+                </a:solidFill>
+                <a:latin typeface="Cambria"/>
+              </a:rPr>
+              <a:t>A 12 V supply across a 4 ohm resistor gives I = 12 / 4 = 3 A, and P = 12 x 3 = 36 W.</a:t>
+            </a:r>
+          </a:p>
+        </p:txBody>
+      </p:sp>
+    </p:spTree>
+  </p:cSld>
+  <p:clrMapOvr>
+    <a:masterClrMapping/>
+  </p:clrMapOvr>
+</p:sld>
+</file>
+
+<file path=ppt/slides/slide4.xml><?xml version="1.0" encoding="utf-8"?>
+<p:sld xmlns:a="http://schemas.openxmlformats.org/drawingml/2006/main" xmlns:p="http://schemas.openxmlformats.org/presentationml/2006/main" xmlns:r="http://schemas.openxmlformats.org/officeDocument/2006/relationships">
+  <p:cSld>
+    <p:bg>
+      <p:bgPr>
+        <a:solidFill>
+          <a:srgbClr val="FFFFFF"/>
+        </a:solidFill>
+        <a:effectLst/>
+      </p:bgPr>
+    </p:bg>
+    <p:spTree>
+      <p:nvGrpSpPr>
+        <p:cNvPr id="1" name=""/>
+        <p:cNvGrpSpPr/>
+        <p:nvPr/>
+      </p:nvGrpSpPr>
+      <p:grpSpPr/>
+      <p:sp>
+        <p:nvSpPr>
+          <p:cNvPr id="2" name="TextBox 1"/>
+          <p:cNvSpPr txBox="1"/>
+          <p:nvPr/>
+        </p:nvSpPr>
+        <p:spPr>
+          <a:xfrm>
+            <a:off x="548640" y="320040"/>
+            <a:ext cx="11094415" cy="274320"/>
+          </a:xfrm>
+          <a:prstGeom prst="rect">
+            <a:avLst/>
+          </a:prstGeom>
+          <a:noFill/>
+        </p:spPr>
+        <p:txBody>
+          <a:bodyPr wrap="square" anchor="t" lIns="0" rIns="0" tIns="0" bIns="0"/>
+          <a:lstStyle/>
+          <a:p>
+            <a:pPr algn="l"/>
+            <a:r>
+              <a:rPr sz="1100" b="1" i="0">
+                <a:solidFill>
+                  <a:srgbClr val="54595D"/>
+                </a:solidFill>
+                <a:latin typeface="Calibri"/>
+              </a:rPr>
+              <a:t>ENGINEERING CORE  ·  Core topic 8</a:t>
+            </a:r>
+          </a:p>
+        </p:txBody>
+      </p:sp>
+      <p:sp>
+        <p:nvSpPr>
+          <p:cNvPr id="3" name="TextBox 2"/>
+          <p:cNvSpPr txBox="1"/>
+          <p:nvPr/>
+        </p:nvSpPr>
+        <p:spPr>
+          <a:xfrm>
+            <a:off x="548640" y="566928"/>
+            <a:ext cx="11094415" cy="822960"/>
+          </a:xfrm>
+          <a:prstGeom prst="rect">
+            <a:avLst/>
+          </a:prstGeom>
+          <a:noFill/>
+        </p:spPr>
+        <p:txBody>
+          <a:bodyPr wrap="square" anchor="ctr" lIns="0" rIns="0" tIns="0" bIns="0"/>
+          <a:lstStyle/>
+          <a:p>
+            <a:pPr algn="l"/>
+            <a:r>
+              <a:rPr sz="3200" b="1" i="0">
+                <a:solidFill>
+                  <a:srgbClr val="03306E"/>
+                </a:solidFill>
+                <a:latin typeface="Cambria"/>
+              </a:rPr>
+              <a:t>Key quantities</a:t>
+            </a:r>
+          </a:p>
+        </p:txBody>
+      </p:sp>
+      <p:sp>
+        <p:nvSpPr>
+          <p:cNvPr id="4" name="TextBox 3"/>
+          <p:cNvSpPr txBox="1"/>
+          <p:nvPr/>
+        </p:nvSpPr>
+        <p:spPr>
+          <a:xfrm>
+            <a:off x="548640" y="6446520"/>
+            <a:ext cx="8229600" cy="274320"/>
+          </a:xfrm>
+          <a:prstGeom prst="rect">
+            <a:avLst/>
+          </a:prstGeom>
+          <a:noFill/>
+        </p:spPr>
+        <p:txBody>
+          <a:bodyPr wrap="square" anchor="t" lIns="0" rIns="0" tIns="0" bIns="0"/>
+          <a:lstStyle/>
+          <a:p>
+            <a:pPr algn="l"/>
+            <a:r>
+              <a:rPr sz="1000" b="0" i="0">
+                <a:solidFill>
+                  <a:srgbClr val="54595D"/>
+                </a:solidFill>
+                <a:latin typeface="Calibri"/>
+              </a:rPr>
+              <a:t>Design and Development for Engineering and Manufacturing T Level  ·  Electrical and Electronic Principles</a:t>
+            </a:r>
+          </a:p>
+        </p:txBody>
+      </p:sp>
+      <p:sp>
+        <p:nvSpPr>
+          <p:cNvPr id="5" name="TextBox 4"/>
+          <p:cNvSpPr txBox="1"/>
+          <p:nvPr/>
+        </p:nvSpPr>
+        <p:spPr>
+          <a:xfrm>
+            <a:off x="10728655" y="6446520"/>
+            <a:ext cx="914400" cy="274320"/>
+          </a:xfrm>
+          <a:prstGeom prst="rect">
+            <a:avLst/>
+          </a:prstGeom>
+          <a:noFill/>
+        </p:spPr>
+        <p:txBody>
+          <a:bodyPr wrap="square" anchor="t" lIns="0" rIns="0" tIns="0" bIns="0"/>
+          <a:lstStyle/>
+          <a:p>
+            <a:pPr algn="r"/>
+            <a:r>
+              <a:rPr sz="1000" b="0" i="0">
+                <a:solidFill>
+                  <a:srgbClr val="54595D"/>
+                </a:solidFill>
+                <a:latin typeface="Calibri"/>
+              </a:rPr>
+              <a:t>4</a:t>
             </a:r>
           </a:p>
         </p:txBody>
@@ -5742,578 +9862,6 @@
 </p:sld>
 </file>
 
-<file path=ppt/slides/slide4.xml><?xml version="1.0" encoding="utf-8"?>
-<p:sld xmlns:a="http://schemas.openxmlformats.org/drawingml/2006/main" xmlns:p="http://schemas.openxmlformats.org/presentationml/2006/main" xmlns:r="http://schemas.openxmlformats.org/officeDocument/2006/relationships">
-  <p:cSld>
-    <p:bg>
-      <p:bgPr>
-        <a:solidFill>
-          <a:srgbClr val="FFFFFF"/>
-        </a:solidFill>
-        <a:effectLst/>
-      </p:bgPr>
-    </p:bg>
-    <p:spTree>
-      <p:nvGrpSpPr>
-        <p:cNvPr id="1" name=""/>
-        <p:cNvGrpSpPr/>
-        <p:nvPr/>
-      </p:nvGrpSpPr>
-      <p:grpSpPr/>
-      <p:sp>
-        <p:nvSpPr>
-          <p:cNvPr id="2" name="TextBox 1"/>
-          <p:cNvSpPr txBox="1"/>
-          <p:nvPr/>
-        </p:nvSpPr>
-        <p:spPr>
-          <a:xfrm>
-            <a:off x="548640" y="320040"/>
-            <a:ext cx="11094415" cy="274320"/>
-          </a:xfrm>
-          <a:prstGeom prst="rect">
-            <a:avLst/>
-          </a:prstGeom>
-          <a:noFill/>
-        </p:spPr>
-        <p:txBody>
-          <a:bodyPr wrap="square" anchor="t" lIns="0" rIns="0" tIns="0" bIns="0"/>
-          <a:lstStyle/>
-          <a:p>
-            <a:pPr algn="l"/>
-            <a:r>
-              <a:rPr sz="1100" b="1" i="0">
-                <a:solidFill>
-                  <a:srgbClr val="54595D"/>
-                </a:solidFill>
-                <a:latin typeface="Calibri"/>
-              </a:rPr>
-              <a:t>ENGINEERING CORE  ·  Core topic 8</a:t>
-            </a:r>
-          </a:p>
-        </p:txBody>
-      </p:sp>
-      <p:sp>
-        <p:nvSpPr>
-          <p:cNvPr id="3" name="TextBox 2"/>
-          <p:cNvSpPr txBox="1"/>
-          <p:nvPr/>
-        </p:nvSpPr>
-        <p:spPr>
-          <a:xfrm>
-            <a:off x="548640" y="566928"/>
-            <a:ext cx="11094415" cy="822960"/>
-          </a:xfrm>
-          <a:prstGeom prst="rect">
-            <a:avLst/>
-          </a:prstGeom>
-          <a:noFill/>
-        </p:spPr>
-        <p:txBody>
-          <a:bodyPr wrap="square" anchor="ctr" lIns="0" rIns="0" tIns="0" bIns="0"/>
-          <a:lstStyle/>
-          <a:p>
-            <a:pPr algn="l"/>
-            <a:r>
-              <a:rPr sz="3200" b="1" i="0">
-                <a:solidFill>
-                  <a:srgbClr val="03306E"/>
-                </a:solidFill>
-                <a:latin typeface="Cambria"/>
-              </a:rPr>
-              <a:t>Series and parallel</a:t>
-            </a:r>
-          </a:p>
-        </p:txBody>
-      </p:sp>
-      <p:sp>
-        <p:nvSpPr>
-          <p:cNvPr id="4" name="TextBox 3"/>
-          <p:cNvSpPr txBox="1"/>
-          <p:nvPr/>
-        </p:nvSpPr>
-        <p:spPr>
-          <a:xfrm>
-            <a:off x="548640" y="6446520"/>
-            <a:ext cx="8229600" cy="274320"/>
-          </a:xfrm>
-          <a:prstGeom prst="rect">
-            <a:avLst/>
-          </a:prstGeom>
-          <a:noFill/>
-        </p:spPr>
-        <p:txBody>
-          <a:bodyPr wrap="square" anchor="t" lIns="0" rIns="0" tIns="0" bIns="0"/>
-          <a:lstStyle/>
-          <a:p>
-            <a:pPr algn="l"/>
-            <a:r>
-              <a:rPr sz="1000" b="0" i="0">
-                <a:solidFill>
-                  <a:srgbClr val="54595D"/>
-                </a:solidFill>
-                <a:latin typeface="Calibri"/>
-              </a:rPr>
-              <a:t>Design and Development for Engineering and Manufacturing T Level  ·  Electrical and Electronic Principles</a:t>
-            </a:r>
-          </a:p>
-        </p:txBody>
-      </p:sp>
-      <p:sp>
-        <p:nvSpPr>
-          <p:cNvPr id="5" name="TextBox 4"/>
-          <p:cNvSpPr txBox="1"/>
-          <p:nvPr/>
-        </p:nvSpPr>
-        <p:spPr>
-          <a:xfrm>
-            <a:off x="10728655" y="6446520"/>
-            <a:ext cx="914400" cy="274320"/>
-          </a:xfrm>
-          <a:prstGeom prst="rect">
-            <a:avLst/>
-          </a:prstGeom>
-          <a:noFill/>
-        </p:spPr>
-        <p:txBody>
-          <a:bodyPr wrap="square" anchor="t" lIns="0" rIns="0" tIns="0" bIns="0"/>
-          <a:lstStyle/>
-          <a:p>
-            <a:pPr algn="r"/>
-            <a:r>
-              <a:rPr sz="1000" b="0" i="0">
-                <a:solidFill>
-                  <a:srgbClr val="54595D"/>
-                </a:solidFill>
-                <a:latin typeface="Calibri"/>
-              </a:rPr>
-              <a:t>4</a:t>
-            </a:r>
-          </a:p>
-        </p:txBody>
-      </p:sp>
-      <p:sp>
-        <p:nvSpPr>
-          <p:cNvPr id="6" name="Rounded Rectangle 5"/>
-          <p:cNvSpPr/>
-          <p:nvPr/>
-        </p:nvSpPr>
-        <p:spPr>
-          <a:xfrm>
-            <a:off x="548640" y="1600200"/>
-            <a:ext cx="5364327" cy="640080"/>
-          </a:xfrm>
-          <a:prstGeom prst="roundRect">
-            <a:avLst>
-              <a:gd name="adj" fmla="val 15000"/>
-            </a:avLst>
-          </a:prstGeom>
-          <a:solidFill>
-            <a:srgbClr val="03306E"/>
-          </a:solidFill>
-          <a:ln>
-            <a:noFill/>
-          </a:ln>
-          <a:effectLst/>
-        </p:spPr>
-        <p:style>
-          <a:lnRef idx="1">
-            <a:schemeClr val="accent1"/>
-          </a:lnRef>
-          <a:fillRef idx="3">
-            <a:schemeClr val="accent1"/>
-          </a:fillRef>
-          <a:effectRef idx="2">
-            <a:schemeClr val="accent1"/>
-          </a:effectRef>
-          <a:fontRef idx="minor">
-            <a:schemeClr val="lt1"/>
-          </a:fontRef>
-        </p:style>
-        <p:txBody>
-          <a:bodyPr rtlCol="0" anchor="ctr"/>
-          <a:lstStyle/>
-          <a:p/>
-        </p:txBody>
-      </p:sp>
-      <p:sp>
-        <p:nvSpPr>
-          <p:cNvPr id="7" name="TextBox 6"/>
-          <p:cNvSpPr txBox="1"/>
-          <p:nvPr/>
-        </p:nvSpPr>
-        <p:spPr>
-          <a:xfrm>
-            <a:off x="777240" y="1600200"/>
-            <a:ext cx="4907127" cy="640080"/>
-          </a:xfrm>
-          <a:prstGeom prst="rect">
-            <a:avLst/>
-          </a:prstGeom>
-          <a:noFill/>
-        </p:spPr>
-        <p:txBody>
-          <a:bodyPr wrap="square" anchor="ctr" lIns="0" rIns="0" tIns="0" bIns="0"/>
-          <a:lstStyle/>
-          <a:p>
-            <a:pPr algn="l"/>
-            <a:r>
-              <a:rPr sz="2000" b="1" i="0">
-                <a:solidFill>
-                  <a:srgbClr val="FFFFFF"/>
-                </a:solidFill>
-                <a:latin typeface="Calibri"/>
-              </a:rPr>
-              <a:t>Series</a:t>
-            </a:r>
-          </a:p>
-        </p:txBody>
-      </p:sp>
-      <p:sp>
-        <p:nvSpPr>
-          <p:cNvPr id="8" name="Rounded Rectangle 7"/>
-          <p:cNvSpPr/>
-          <p:nvPr/>
-        </p:nvSpPr>
-        <p:spPr>
-          <a:xfrm>
-            <a:off x="548640" y="2377440"/>
-            <a:ext cx="5364327" cy="3794760"/>
-          </a:xfrm>
-          <a:prstGeom prst="roundRect">
-            <a:avLst>
-              <a:gd name="adj" fmla="val 4000"/>
-            </a:avLst>
-          </a:prstGeom>
-          <a:solidFill>
-            <a:srgbClr val="EAF3FF"/>
-          </a:solidFill>
-          <a:ln>
-            <a:noFill/>
-          </a:ln>
-          <a:effectLst/>
-        </p:spPr>
-        <p:style>
-          <a:lnRef idx="1">
-            <a:schemeClr val="accent1"/>
-          </a:lnRef>
-          <a:fillRef idx="3">
-            <a:schemeClr val="accent1"/>
-          </a:fillRef>
-          <a:effectRef idx="2">
-            <a:schemeClr val="accent1"/>
-          </a:effectRef>
-          <a:fontRef idx="minor">
-            <a:schemeClr val="lt1"/>
-          </a:fontRef>
-        </p:style>
-        <p:txBody>
-          <a:bodyPr rtlCol="0" anchor="ctr"/>
-          <a:lstStyle/>
-          <a:p/>
-        </p:txBody>
-      </p:sp>
-      <p:sp>
-        <p:nvSpPr>
-          <p:cNvPr id="9" name="TextBox 8"/>
-          <p:cNvSpPr txBox="1"/>
-          <p:nvPr/>
-        </p:nvSpPr>
-        <p:spPr>
-          <a:xfrm>
-            <a:off x="822959" y="2606040"/>
-            <a:ext cx="4815687" cy="3337560"/>
-          </a:xfrm>
-          <a:prstGeom prst="rect">
-            <a:avLst/>
-          </a:prstGeom>
-          <a:noFill/>
-        </p:spPr>
-        <p:txBody>
-          <a:bodyPr wrap="square" lIns="0" rIns="0" tIns="0" bIns="0">
-            <a:spAutoFit/>
-          </a:bodyPr>
-          <a:lstStyle/>
-          <a:p>
-            <a:pPr marL="274320" indent="-274320">
-              <a:spcAft>
-                <a:spcPts val="990"/>
-              </a:spcAft>
-              <a:buClr>
-                <a:srgbClr val="0645AD"/>
-              </a:buClr>
-              <a:buFont typeface="Arial"/>
-              <a:buChar char="•"/>
-            </a:pPr>
-            <a:r>
-              <a:rPr sz="2200" b="0">
-                <a:solidFill>
-                  <a:srgbClr val="202122"/>
-                </a:solidFill>
-                <a:latin typeface="Calibri"/>
-              </a:rPr>
-              <a:t>Same current through every component</a:t>
-            </a:r>
-          </a:p>
-          <a:p>
-            <a:pPr marL="274320" indent="-274320">
-              <a:spcAft>
-                <a:spcPts val="990"/>
-              </a:spcAft>
-              <a:buClr>
-                <a:srgbClr val="0645AD"/>
-              </a:buClr>
-              <a:buFont typeface="Arial"/>
-              <a:buChar char="•"/>
-            </a:pPr>
-            <a:r>
-              <a:rPr sz="2200" b="0">
-                <a:solidFill>
-                  <a:srgbClr val="202122"/>
-                </a:solidFill>
-                <a:latin typeface="Calibri"/>
-              </a:rPr>
-              <a:t>Voltages add up to the supply</a:t>
-            </a:r>
-          </a:p>
-          <a:p>
-            <a:pPr marL="274320" indent="-274320">
-              <a:spcAft>
-                <a:spcPts val="990"/>
-              </a:spcAft>
-              <a:buClr>
-                <a:srgbClr val="0645AD"/>
-              </a:buClr>
-              <a:buFont typeface="Arial"/>
-              <a:buChar char="•"/>
-            </a:pPr>
-            <a:r>
-              <a:rPr sz="2200" b="0">
-                <a:solidFill>
-                  <a:srgbClr val="202122"/>
-                </a:solidFill>
-                <a:latin typeface="Calibri"/>
-              </a:rPr>
-              <a:t>Total R = R1 + R2 + ...</a:t>
-            </a:r>
-          </a:p>
-        </p:txBody>
-      </p:sp>
-      <p:sp>
-        <p:nvSpPr>
-          <p:cNvPr id="10" name="Rounded Rectangle 9"/>
-          <p:cNvSpPr/>
-          <p:nvPr/>
-        </p:nvSpPr>
-        <p:spPr>
-          <a:xfrm>
-            <a:off x="6278727" y="1600200"/>
-            <a:ext cx="5364327" cy="640080"/>
-          </a:xfrm>
-          <a:prstGeom prst="roundRect">
-            <a:avLst>
-              <a:gd name="adj" fmla="val 15000"/>
-            </a:avLst>
-          </a:prstGeom>
-          <a:solidFill>
-            <a:srgbClr val="0645AD"/>
-          </a:solidFill>
-          <a:ln>
-            <a:noFill/>
-          </a:ln>
-          <a:effectLst/>
-        </p:spPr>
-        <p:style>
-          <a:lnRef idx="1">
-            <a:schemeClr val="accent1"/>
-          </a:lnRef>
-          <a:fillRef idx="3">
-            <a:schemeClr val="accent1"/>
-          </a:fillRef>
-          <a:effectRef idx="2">
-            <a:schemeClr val="accent1"/>
-          </a:effectRef>
-          <a:fontRef idx="minor">
-            <a:schemeClr val="lt1"/>
-          </a:fontRef>
-        </p:style>
-        <p:txBody>
-          <a:bodyPr rtlCol="0" anchor="ctr"/>
-          <a:lstStyle/>
-          <a:p/>
-        </p:txBody>
-      </p:sp>
-      <p:sp>
-        <p:nvSpPr>
-          <p:cNvPr id="11" name="TextBox 10"/>
-          <p:cNvSpPr txBox="1"/>
-          <p:nvPr/>
-        </p:nvSpPr>
-        <p:spPr>
-          <a:xfrm>
-            <a:off x="6507327" y="1600200"/>
-            <a:ext cx="4907127" cy="640080"/>
-          </a:xfrm>
-          <a:prstGeom prst="rect">
-            <a:avLst/>
-          </a:prstGeom>
-          <a:noFill/>
-        </p:spPr>
-        <p:txBody>
-          <a:bodyPr wrap="square" anchor="ctr" lIns="0" rIns="0" tIns="0" bIns="0"/>
-          <a:lstStyle/>
-          <a:p>
-            <a:pPr algn="l"/>
-            <a:r>
-              <a:rPr sz="2000" b="1" i="0">
-                <a:solidFill>
-                  <a:srgbClr val="FFFFFF"/>
-                </a:solidFill>
-                <a:latin typeface="Calibri"/>
-              </a:rPr>
-              <a:t>Parallel</a:t>
-            </a:r>
-          </a:p>
-        </p:txBody>
-      </p:sp>
-      <p:sp>
-        <p:nvSpPr>
-          <p:cNvPr id="12" name="Rounded Rectangle 11"/>
-          <p:cNvSpPr/>
-          <p:nvPr/>
-        </p:nvSpPr>
-        <p:spPr>
-          <a:xfrm>
-            <a:off x="6278727" y="2377440"/>
-            <a:ext cx="5364327" cy="3794760"/>
-          </a:xfrm>
-          <a:prstGeom prst="roundRect">
-            <a:avLst>
-              <a:gd name="adj" fmla="val 4000"/>
-            </a:avLst>
-          </a:prstGeom>
-          <a:solidFill>
-            <a:srgbClr val="EAF3FF"/>
-          </a:solidFill>
-          <a:ln>
-            <a:noFill/>
-          </a:ln>
-          <a:effectLst/>
-        </p:spPr>
-        <p:style>
-          <a:lnRef idx="1">
-            <a:schemeClr val="accent1"/>
-          </a:lnRef>
-          <a:fillRef idx="3">
-            <a:schemeClr val="accent1"/>
-          </a:fillRef>
-          <a:effectRef idx="2">
-            <a:schemeClr val="accent1"/>
-          </a:effectRef>
-          <a:fontRef idx="minor">
-            <a:schemeClr val="lt1"/>
-          </a:fontRef>
-        </p:style>
-        <p:txBody>
-          <a:bodyPr rtlCol="0" anchor="ctr"/>
-          <a:lstStyle/>
-          <a:p/>
-        </p:txBody>
-      </p:sp>
-      <p:sp>
-        <p:nvSpPr>
-          <p:cNvPr id="13" name="TextBox 12"/>
-          <p:cNvSpPr txBox="1"/>
-          <p:nvPr/>
-        </p:nvSpPr>
-        <p:spPr>
-          <a:xfrm>
-            <a:off x="6553047" y="2606040"/>
-            <a:ext cx="4815687" cy="3337560"/>
-          </a:xfrm>
-          <a:prstGeom prst="rect">
-            <a:avLst/>
-          </a:prstGeom>
-          <a:noFill/>
-        </p:spPr>
-        <p:txBody>
-          <a:bodyPr wrap="square" lIns="0" rIns="0" tIns="0" bIns="0">
-            <a:spAutoFit/>
-          </a:bodyPr>
-          <a:lstStyle/>
-          <a:p>
-            <a:pPr marL="274320" indent="-274320">
-              <a:spcAft>
-                <a:spcPts val="990"/>
-              </a:spcAft>
-              <a:buClr>
-                <a:srgbClr val="0645AD"/>
-              </a:buClr>
-              <a:buFont typeface="Arial"/>
-              <a:buChar char="•"/>
-            </a:pPr>
-            <a:r>
-              <a:rPr sz="2200" b="0">
-                <a:solidFill>
-                  <a:srgbClr val="202122"/>
-                </a:solidFill>
-                <a:latin typeface="Calibri"/>
-              </a:rPr>
-              <a:t>Same voltage across each branch</a:t>
-            </a:r>
-          </a:p>
-          <a:p>
-            <a:pPr marL="274320" indent="-274320">
-              <a:spcAft>
-                <a:spcPts val="990"/>
-              </a:spcAft>
-              <a:buClr>
-                <a:srgbClr val="0645AD"/>
-              </a:buClr>
-              <a:buFont typeface="Arial"/>
-              <a:buChar char="•"/>
-            </a:pPr>
-            <a:r>
-              <a:rPr sz="2200" b="0">
-                <a:solidFill>
-                  <a:srgbClr val="202122"/>
-                </a:solidFill>
-                <a:latin typeface="Calibri"/>
-              </a:rPr>
-              <a:t>Currents add up to the total</a:t>
-            </a:r>
-          </a:p>
-          <a:p>
-            <a:pPr marL="274320" indent="-274320">
-              <a:spcAft>
-                <a:spcPts val="990"/>
-              </a:spcAft>
-              <a:buClr>
-                <a:srgbClr val="0645AD"/>
-              </a:buClr>
-              <a:buFont typeface="Arial"/>
-              <a:buChar char="•"/>
-            </a:pPr>
-            <a:r>
-              <a:rPr sz="2200" b="0">
-                <a:solidFill>
-                  <a:srgbClr val="202122"/>
-                </a:solidFill>
-                <a:latin typeface="Calibri"/>
-              </a:rPr>
-              <a:t>1 / R total = 1 / R1 + 1 / R2 + ...</a:t>
-            </a:r>
-          </a:p>
-        </p:txBody>
-      </p:sp>
-    </p:spTree>
-  </p:cSld>
-  <p:clrMapOvr>
-    <a:masterClrMapping/>
-  </p:clrMapOvr>
-</p:sld>
-</file>
-
 <file path=ppt/slides/slide5.xml><?xml version="1.0" encoding="utf-8"?>
 <p:sld xmlns:a="http://schemas.openxmlformats.org/drawingml/2006/main" xmlns:p="http://schemas.openxmlformats.org/presentationml/2006/main" xmlns:r="http://schemas.openxmlformats.org/officeDocument/2006/relationships">
   <p:cSld>
@@ -6393,7 +9941,7 @@
                 </a:solidFill>
                 <a:latin typeface="Cambria"/>
               </a:rPr>
-              <a:t>AC, protection and components</a:t>
+              <a:t>Quick check: Key quantities</a:t>
             </a:r>
           </a:p>
         </p:txBody>
@@ -6466,58 +10014,14 @@
       </p:sp>
       <p:sp>
         <p:nvSpPr>
-          <p:cNvPr id="6" name="Rounded Rectangle 5"/>
+          <p:cNvPr id="6" name="Oval 5"/>
           <p:cNvSpPr/>
           <p:nvPr/>
         </p:nvSpPr>
         <p:spPr>
           <a:xfrm>
-            <a:off x="548640" y="1600200"/>
-            <a:ext cx="5410047" cy="2148840"/>
-          </a:xfrm>
-          <a:prstGeom prst="roundRect">
-            <a:avLst>
-              <a:gd name="adj" fmla="val 6000"/>
-            </a:avLst>
-          </a:prstGeom>
-          <a:solidFill>
-            <a:srgbClr val="EAF3FF"/>
-          </a:solidFill>
-          <a:ln>
-            <a:noFill/>
-          </a:ln>
-          <a:effectLst/>
-        </p:spPr>
-        <p:style>
-          <a:lnRef idx="1">
-            <a:schemeClr val="accent1"/>
-          </a:lnRef>
-          <a:fillRef idx="3">
-            <a:schemeClr val="accent1"/>
-          </a:fillRef>
-          <a:effectRef idx="2">
-            <a:schemeClr val="accent1"/>
-          </a:effectRef>
-          <a:fontRef idx="minor">
-            <a:schemeClr val="lt1"/>
-          </a:fontRef>
-        </p:style>
-        <p:txBody>
-          <a:bodyPr rtlCol="0" anchor="ctr"/>
-          <a:lstStyle/>
-          <a:p/>
-        </p:txBody>
-      </p:sp>
-      <p:sp>
-        <p:nvSpPr>
-          <p:cNvPr id="7" name="Oval 6"/>
-          <p:cNvSpPr/>
-          <p:nvPr/>
-        </p:nvSpPr>
-        <p:spPr>
-          <a:xfrm>
-            <a:off x="777240" y="1828800"/>
-            <a:ext cx="457200" cy="457200"/>
+            <a:off x="548640" y="1691640"/>
+            <a:ext cx="502920" cy="502920"/>
           </a:xfrm>
           <a:prstGeom prst="ellipse">
             <a:avLst/>
@@ -6550,7 +10054,7 @@
           <a:p>
             <a:pPr algn="ctr"/>
             <a:r>
-              <a:rPr sz="1500" b="1">
+              <a:rPr sz="1600" b="1">
                 <a:solidFill>
                   <a:srgbClr val="202122"/>
                 </a:solidFill>
@@ -6563,124 +10067,47 @@
       </p:sp>
       <p:sp>
         <p:nvSpPr>
-          <p:cNvPr id="8" name="TextBox 7"/>
+          <p:cNvPr id="7" name="TextBox 6"/>
           <p:cNvSpPr txBox="1"/>
           <p:nvPr/>
         </p:nvSpPr>
         <p:spPr>
           <a:xfrm>
-            <a:off x="1371600" y="1801368"/>
-            <a:ext cx="4404207" cy="512064"/>
-          </a:xfrm>
-          <a:prstGeom prst="rect">
-            <a:avLst/>
-          </a:prstGeom>
-          <a:noFill/>
-        </p:spPr>
-        <p:txBody>
-          <a:bodyPr wrap="square" anchor="ctr" lIns="0" rIns="0" tIns="0" bIns="0"/>
+            <a:off x="1371600" y="1645920"/>
+            <a:ext cx="10271455" cy="1188720"/>
+          </a:xfrm>
+          <a:prstGeom prst="rect">
+            <a:avLst/>
+          </a:prstGeom>
+          <a:noFill/>
+        </p:spPr>
+        <p:txBody>
+          <a:bodyPr wrap="square" anchor="t" lIns="0" rIns="0" tIns="0" bIns="0"/>
           <a:lstStyle/>
           <a:p>
             <a:pPr algn="l"/>
             <a:r>
-              <a:rPr sz="1900" b="1" i="0">
-                <a:solidFill>
-                  <a:srgbClr val="03306E"/>
-                </a:solidFill>
-                <a:latin typeface="Calibri"/>
-              </a:rPr>
-              <a:t>AC and DC</a:t>
-            </a:r>
-          </a:p>
-        </p:txBody>
-      </p:sp>
-      <p:sp>
-        <p:nvSpPr>
-          <p:cNvPr id="9" name="TextBox 8"/>
-          <p:cNvSpPr txBox="1"/>
-          <p:nvPr/>
-        </p:nvSpPr>
-        <p:spPr>
-          <a:xfrm>
-            <a:off x="777240" y="2468880"/>
-            <a:ext cx="4952847" cy="1143000"/>
-          </a:xfrm>
-          <a:prstGeom prst="rect">
-            <a:avLst/>
-          </a:prstGeom>
-          <a:noFill/>
-        </p:spPr>
-        <p:txBody>
-          <a:bodyPr wrap="square" anchor="t" lIns="0" rIns="0" tIns="0" bIns="0"/>
-          <a:lstStyle/>
-          <a:p>
-            <a:pPr algn="l"/>
-            <a:r>
-              <a:rPr sz="2000" b="0" i="0">
+              <a:rPr sz="2400" b="0" i="0">
                 <a:solidFill>
                   <a:srgbClr val="202122"/>
                 </a:solidFill>
                 <a:latin typeface="Calibri"/>
               </a:rPr>
-              <a:t>AC reverses direction (mains); DC flows one way (batteries). Phasor diagrams show AC phase.</a:t>
-            </a:r>
-          </a:p>
-        </p:txBody>
-      </p:sp>
-      <p:sp>
-        <p:nvSpPr>
-          <p:cNvPr id="10" name="Rounded Rectangle 9"/>
+              <a:t>State Ohm's law.</a:t>
+            </a:r>
+          </a:p>
+        </p:txBody>
+      </p:sp>
+      <p:sp>
+        <p:nvSpPr>
+          <p:cNvPr id="8" name="Oval 7"/>
           <p:cNvSpPr/>
           <p:nvPr/>
         </p:nvSpPr>
         <p:spPr>
           <a:xfrm>
-            <a:off x="6233007" y="1600200"/>
-            <a:ext cx="5410047" cy="2148840"/>
-          </a:xfrm>
-          <a:prstGeom prst="roundRect">
-            <a:avLst>
-              <a:gd name="adj" fmla="val 6000"/>
-            </a:avLst>
-          </a:prstGeom>
-          <a:solidFill>
-            <a:srgbClr val="EAF3FF"/>
-          </a:solidFill>
-          <a:ln>
-            <a:noFill/>
-          </a:ln>
-          <a:effectLst/>
-        </p:spPr>
-        <p:style>
-          <a:lnRef idx="1">
-            <a:schemeClr val="accent1"/>
-          </a:lnRef>
-          <a:fillRef idx="3">
-            <a:schemeClr val="accent1"/>
-          </a:fillRef>
-          <a:effectRef idx="2">
-            <a:schemeClr val="accent1"/>
-          </a:effectRef>
-          <a:fontRef idx="minor">
-            <a:schemeClr val="lt1"/>
-          </a:fontRef>
-        </p:style>
-        <p:txBody>
-          <a:bodyPr rtlCol="0" anchor="ctr"/>
-          <a:lstStyle/>
-          <a:p/>
-        </p:txBody>
-      </p:sp>
-      <p:sp>
-        <p:nvSpPr>
-          <p:cNvPr id="11" name="Oval 10"/>
-          <p:cNvSpPr/>
-          <p:nvPr/>
-        </p:nvSpPr>
-        <p:spPr>
-          <a:xfrm>
-            <a:off x="6461607" y="1828800"/>
-            <a:ext cx="457200" cy="457200"/>
+            <a:off x="548640" y="3108960"/>
+            <a:ext cx="502920" cy="502920"/>
           </a:xfrm>
           <a:prstGeom prst="ellipse">
             <a:avLst/>
@@ -6713,7 +10140,7 @@
           <a:p>
             <a:pPr algn="ctr"/>
             <a:r>
-              <a:rPr sz="1500" b="1">
+              <a:rPr sz="1600" b="1">
                 <a:solidFill>
                   <a:srgbClr val="202122"/>
                 </a:solidFill>
@@ -6726,124 +10153,47 @@
       </p:sp>
       <p:sp>
         <p:nvSpPr>
-          <p:cNvPr id="12" name="TextBox 11"/>
+          <p:cNvPr id="9" name="TextBox 8"/>
           <p:cNvSpPr txBox="1"/>
           <p:nvPr/>
         </p:nvSpPr>
         <p:spPr>
           <a:xfrm>
-            <a:off x="7055967" y="1801368"/>
-            <a:ext cx="4404207" cy="512064"/>
-          </a:xfrm>
-          <a:prstGeom prst="rect">
-            <a:avLst/>
-          </a:prstGeom>
-          <a:noFill/>
-        </p:spPr>
-        <p:txBody>
-          <a:bodyPr wrap="square" anchor="ctr" lIns="0" rIns="0" tIns="0" bIns="0"/>
+            <a:off x="1371600" y="3063240"/>
+            <a:ext cx="10271455" cy="1188720"/>
+          </a:xfrm>
+          <a:prstGeom prst="rect">
+            <a:avLst/>
+          </a:prstGeom>
+          <a:noFill/>
+        </p:spPr>
+        <p:txBody>
+          <a:bodyPr wrap="square" anchor="t" lIns="0" rIns="0" tIns="0" bIns="0"/>
           <a:lstStyle/>
           <a:p>
             <a:pPr algn="l"/>
             <a:r>
-              <a:rPr sz="1900" b="1" i="0">
-                <a:solidFill>
-                  <a:srgbClr val="03306E"/>
-                </a:solidFill>
-                <a:latin typeface="Calibri"/>
-              </a:rPr>
-              <a:t>Protection</a:t>
-            </a:r>
-          </a:p>
-        </p:txBody>
-      </p:sp>
-      <p:sp>
-        <p:nvSpPr>
-          <p:cNvPr id="13" name="TextBox 12"/>
-          <p:cNvSpPr txBox="1"/>
-          <p:nvPr/>
-        </p:nvSpPr>
-        <p:spPr>
-          <a:xfrm>
-            <a:off x="6461607" y="2468880"/>
-            <a:ext cx="4952847" cy="1143000"/>
-          </a:xfrm>
-          <a:prstGeom prst="rect">
-            <a:avLst/>
-          </a:prstGeom>
-          <a:noFill/>
-        </p:spPr>
-        <p:txBody>
-          <a:bodyPr wrap="square" anchor="t" lIns="0" rIns="0" tIns="0" bIns="0"/>
-          <a:lstStyle/>
-          <a:p>
-            <a:pPr algn="l"/>
-            <a:r>
-              <a:rPr sz="2000" b="0" i="0">
+              <a:rPr sz="2400" b="0" i="0">
                 <a:solidFill>
                   <a:srgbClr val="202122"/>
                 </a:solidFill>
                 <a:latin typeface="Calibri"/>
               </a:rPr>
-              <a:t>Fuses, RCDs and lightning arrestors; differential and transformer protection.</a:t>
-            </a:r>
-          </a:p>
-        </p:txBody>
-      </p:sp>
-      <p:sp>
-        <p:nvSpPr>
-          <p:cNvPr id="14" name="Rounded Rectangle 13"/>
+              <a:t>What is the unit of resistance?</a:t>
+            </a:r>
+          </a:p>
+        </p:txBody>
+      </p:sp>
+      <p:sp>
+        <p:nvSpPr>
+          <p:cNvPr id="10" name="Oval 9"/>
           <p:cNvSpPr/>
           <p:nvPr/>
         </p:nvSpPr>
         <p:spPr>
           <a:xfrm>
-            <a:off x="548640" y="4023360"/>
-            <a:ext cx="5410047" cy="2148840"/>
-          </a:xfrm>
-          <a:prstGeom prst="roundRect">
-            <a:avLst>
-              <a:gd name="adj" fmla="val 6000"/>
-            </a:avLst>
-          </a:prstGeom>
-          <a:solidFill>
-            <a:srgbClr val="EAF3FF"/>
-          </a:solidFill>
-          <a:ln>
-            <a:noFill/>
-          </a:ln>
-          <a:effectLst/>
-        </p:spPr>
-        <p:style>
-          <a:lnRef idx="1">
-            <a:schemeClr val="accent1"/>
-          </a:lnRef>
-          <a:fillRef idx="3">
-            <a:schemeClr val="accent1"/>
-          </a:fillRef>
-          <a:effectRef idx="2">
-            <a:schemeClr val="accent1"/>
-          </a:effectRef>
-          <a:fontRef idx="minor">
-            <a:schemeClr val="lt1"/>
-          </a:fontRef>
-        </p:style>
-        <p:txBody>
-          <a:bodyPr rtlCol="0" anchor="ctr"/>
-          <a:lstStyle/>
-          <a:p/>
-        </p:txBody>
-      </p:sp>
-      <p:sp>
-        <p:nvSpPr>
-          <p:cNvPr id="15" name="Oval 14"/>
-          <p:cNvSpPr/>
-          <p:nvPr/>
-        </p:nvSpPr>
-        <p:spPr>
-          <a:xfrm>
-            <a:off x="777240" y="4251960"/>
-            <a:ext cx="457200" cy="457200"/>
+            <a:off x="548640" y="4526280"/>
+            <a:ext cx="502920" cy="502920"/>
           </a:xfrm>
           <a:prstGeom prst="ellipse">
             <a:avLst/>
@@ -6876,7 +10226,7 @@
           <a:p>
             <a:pPr algn="ctr"/>
             <a:r>
-              <a:rPr sz="1500" b="1">
+              <a:rPr sz="1600" b="1">
                 <a:solidFill>
                   <a:srgbClr val="202122"/>
                 </a:solidFill>
@@ -6889,47 +10239,47 @@
       </p:sp>
       <p:sp>
         <p:nvSpPr>
-          <p:cNvPr id="16" name="TextBox 15"/>
+          <p:cNvPr id="11" name="TextBox 10"/>
           <p:cNvSpPr txBox="1"/>
           <p:nvPr/>
         </p:nvSpPr>
         <p:spPr>
           <a:xfrm>
-            <a:off x="1371600" y="4224528"/>
-            <a:ext cx="4404207" cy="512064"/>
-          </a:xfrm>
-          <a:prstGeom prst="rect">
-            <a:avLst/>
-          </a:prstGeom>
-          <a:noFill/>
-        </p:spPr>
-        <p:txBody>
-          <a:bodyPr wrap="square" anchor="ctr" lIns="0" rIns="0" tIns="0" bIns="0"/>
+            <a:off x="1371600" y="4480560"/>
+            <a:ext cx="10271455" cy="1188720"/>
+          </a:xfrm>
+          <a:prstGeom prst="rect">
+            <a:avLst/>
+          </a:prstGeom>
+          <a:noFill/>
+        </p:spPr>
+        <p:txBody>
+          <a:bodyPr wrap="square" anchor="t" lIns="0" rIns="0" tIns="0" bIns="0"/>
           <a:lstStyle/>
           <a:p>
             <a:pPr algn="l"/>
             <a:r>
-              <a:rPr sz="1900" b="1" i="0">
-                <a:solidFill>
-                  <a:srgbClr val="03306E"/>
-                </a:solidFill>
-                <a:latin typeface="Calibri"/>
-              </a:rPr>
-              <a:t>Capacitors and inductors</a:t>
-            </a:r>
-          </a:p>
-        </p:txBody>
-      </p:sp>
-      <p:sp>
-        <p:nvSpPr>
-          <p:cNvPr id="17" name="TextBox 16"/>
+              <a:rPr sz="2400" b="0" i="0">
+                <a:solidFill>
+                  <a:srgbClr val="202122"/>
+                </a:solidFill>
+                <a:latin typeface="Calibri"/>
+              </a:rPr>
+              <a:t>A device draws 2 A at 230 V. What is its power?</a:t>
+            </a:r>
+          </a:p>
+        </p:txBody>
+      </p:sp>
+      <p:sp>
+        <p:nvSpPr>
+          <p:cNvPr id="12" name="TextBox 11"/>
           <p:cNvSpPr txBox="1"/>
           <p:nvPr/>
         </p:nvSpPr>
         <p:spPr>
           <a:xfrm>
-            <a:off x="777240" y="4892040"/>
-            <a:ext cx="4952847" cy="1143000"/>
+            <a:off x="548640" y="5852160"/>
+            <a:ext cx="11094415" cy="365760"/>
           </a:xfrm>
           <a:prstGeom prst="rect">
             <a:avLst/>
@@ -6942,176 +10292,13 @@
           <a:p>
             <a:pPr algn="l"/>
             <a:r>
-              <a:rPr sz="2000" b="0" i="0">
-                <a:solidFill>
-                  <a:srgbClr val="202122"/>
-                </a:solidFill>
-                <a:latin typeface="Calibri"/>
-              </a:rPr>
-              <a:t>Store energy in electric and magnetic fields; time constants in DC circuits.</a:t>
-            </a:r>
-          </a:p>
-        </p:txBody>
-      </p:sp>
-      <p:sp>
-        <p:nvSpPr>
-          <p:cNvPr id="18" name="Rounded Rectangle 17"/>
-          <p:cNvSpPr/>
-          <p:nvPr/>
-        </p:nvSpPr>
-        <p:spPr>
-          <a:xfrm>
-            <a:off x="6233007" y="4023360"/>
-            <a:ext cx="5410047" cy="2148840"/>
-          </a:xfrm>
-          <a:prstGeom prst="roundRect">
-            <a:avLst>
-              <a:gd name="adj" fmla="val 6000"/>
-            </a:avLst>
-          </a:prstGeom>
-          <a:solidFill>
-            <a:srgbClr val="EAF3FF"/>
-          </a:solidFill>
-          <a:ln>
-            <a:noFill/>
-          </a:ln>
-          <a:effectLst/>
-        </p:spPr>
-        <p:style>
-          <a:lnRef idx="1">
-            <a:schemeClr val="accent1"/>
-          </a:lnRef>
-          <a:fillRef idx="3">
-            <a:schemeClr val="accent1"/>
-          </a:fillRef>
-          <a:effectRef idx="2">
-            <a:schemeClr val="accent1"/>
-          </a:effectRef>
-          <a:fontRef idx="minor">
-            <a:schemeClr val="lt1"/>
-          </a:fontRef>
-        </p:style>
-        <p:txBody>
-          <a:bodyPr rtlCol="0" anchor="ctr"/>
-          <a:lstStyle/>
-          <a:p/>
-        </p:txBody>
-      </p:sp>
-      <p:sp>
-        <p:nvSpPr>
-          <p:cNvPr id="19" name="Oval 18"/>
-          <p:cNvSpPr/>
-          <p:nvPr/>
-        </p:nvSpPr>
-        <p:spPr>
-          <a:xfrm>
-            <a:off x="6461607" y="4251960"/>
-            <a:ext cx="457200" cy="457200"/>
-          </a:xfrm>
-          <a:prstGeom prst="ellipse">
-            <a:avLst/>
-          </a:prstGeom>
-          <a:solidFill>
-            <a:srgbClr val="F2B705"/>
-          </a:solidFill>
-          <a:ln>
-            <a:noFill/>
-          </a:ln>
-          <a:effectLst/>
-        </p:spPr>
-        <p:style>
-          <a:lnRef idx="1">
-            <a:schemeClr val="accent1"/>
-          </a:lnRef>
-          <a:fillRef idx="3">
-            <a:schemeClr val="accent1"/>
-          </a:fillRef>
-          <a:effectRef idx="2">
-            <a:schemeClr val="accent1"/>
-          </a:effectRef>
-          <a:fontRef idx="minor">
-            <a:schemeClr val="lt1"/>
-          </a:fontRef>
-        </p:style>
-        <p:txBody>
-          <a:bodyPr rtlCol="0" anchor="ctr" lIns="0" rIns="0" tIns="0" bIns="0"/>
-          <a:lstStyle/>
-          <a:p>
-            <a:pPr algn="ctr"/>
-            <a:r>
-              <a:rPr sz="1500" b="1">
-                <a:solidFill>
-                  <a:srgbClr val="202122"/>
-                </a:solidFill>
-                <a:latin typeface="Calibri"/>
-              </a:rPr>
-              <a:t>4</a:t>
-            </a:r>
-          </a:p>
-        </p:txBody>
-      </p:sp>
-      <p:sp>
-        <p:nvSpPr>
-          <p:cNvPr id="20" name="TextBox 19"/>
-          <p:cNvSpPr txBox="1"/>
-          <p:nvPr/>
-        </p:nvSpPr>
-        <p:spPr>
-          <a:xfrm>
-            <a:off x="7055967" y="4224528"/>
-            <a:ext cx="4404207" cy="512064"/>
-          </a:xfrm>
-          <a:prstGeom prst="rect">
-            <a:avLst/>
-          </a:prstGeom>
-          <a:noFill/>
-        </p:spPr>
-        <p:txBody>
-          <a:bodyPr wrap="square" anchor="ctr" lIns="0" rIns="0" tIns="0" bIns="0"/>
-          <a:lstStyle/>
-          <a:p>
-            <a:pPr algn="l"/>
-            <a:r>
-              <a:rPr sz="1900" b="1" i="0">
-                <a:solidFill>
-                  <a:srgbClr val="03306E"/>
-                </a:solidFill>
-                <a:latin typeface="Calibri"/>
-              </a:rPr>
-              <a:t>Semiconductors</a:t>
-            </a:r>
-          </a:p>
-        </p:txBody>
-      </p:sp>
-      <p:sp>
-        <p:nvSpPr>
-          <p:cNvPr id="21" name="TextBox 20"/>
-          <p:cNvSpPr txBox="1"/>
-          <p:nvPr/>
-        </p:nvSpPr>
-        <p:spPr>
-          <a:xfrm>
-            <a:off x="6461607" y="4892040"/>
-            <a:ext cx="4952847" cy="1143000"/>
-          </a:xfrm>
-          <a:prstGeom prst="rect">
-            <a:avLst/>
-          </a:prstGeom>
-          <a:noFill/>
-        </p:spPr>
-        <p:txBody>
-          <a:bodyPr wrap="square" anchor="t" lIns="0" rIns="0" tIns="0" bIns="0"/>
-          <a:lstStyle/>
-          <a:p>
-            <a:pPr algn="l"/>
-            <a:r>
-              <a:rPr sz="2000" b="0" i="0">
-                <a:solidFill>
-                  <a:srgbClr val="202122"/>
-                </a:solidFill>
-                <a:latin typeface="Calibri"/>
-              </a:rPr>
-              <a:t>Diodes let current flow one way; transistors switch and amplify.</a:t>
+              <a:rPr sz="1300" b="0" i="1">
+                <a:solidFill>
+                  <a:srgbClr val="54595D"/>
+                </a:solidFill>
+                <a:latin typeface="Calibri"/>
+              </a:rPr>
+              <a:t>Answer on mini whiteboards or in your book. Answers are in the speaker notes.</a:t>
             </a:r>
           </a:p>
         </p:txBody>
@@ -7203,7 +10390,7 @@
                 </a:solidFill>
                 <a:latin typeface="Cambria"/>
               </a:rPr>
-              <a:t>Signals</a:t>
+              <a:t>Series and parallel</a:t>
             </a:r>
           </a:p>
         </p:txBody>
@@ -7276,18 +10463,98 @@
       </p:sp>
       <p:sp>
         <p:nvSpPr>
-          <p:cNvPr id="6" name="Rounded Rectangle 5"/>
+          <p:cNvPr id="6" name="TextBox 5"/>
+          <p:cNvSpPr txBox="1"/>
+          <p:nvPr/>
+        </p:nvSpPr>
+        <p:spPr>
+          <a:xfrm>
+            <a:off x="548640" y="1554480"/>
+            <a:ext cx="6720840" cy="4617720"/>
+          </a:xfrm>
+          <a:prstGeom prst="rect">
+            <a:avLst/>
+          </a:prstGeom>
+          <a:noFill/>
+        </p:spPr>
+        <p:txBody>
+          <a:bodyPr wrap="square" lIns="0" rIns="0" tIns="0" bIns="0">
+            <a:spAutoFit/>
+          </a:bodyPr>
+          <a:lstStyle/>
+          <a:p>
+            <a:pPr>
+              <a:spcAft>
+                <a:spcPts val="1260"/>
+              </a:spcAft>
+            </a:pPr>
+            <a:r>
+              <a:rPr sz="2100" b="0">
+                <a:solidFill>
+                  <a:srgbClr val="202122"/>
+                </a:solidFill>
+                <a:latin typeface="Calibri"/>
+              </a:rPr>
+              <a:t>In a series circuit, components are in one loop. The same current flows through each, the voltages across them add up to the supply voltage, and total resistance = R1 + R2 + ... If one component fails, the whole circuit stops.</a:t>
+            </a:r>
+          </a:p>
+          <a:p>
+            <a:pPr>
+              <a:spcAft>
+                <a:spcPts val="1260"/>
+              </a:spcAft>
+            </a:pPr>
+            <a:r>
+              <a:rPr sz="2100" b="0">
+                <a:solidFill>
+                  <a:srgbClr val="202122"/>
+                </a:solidFill>
+                <a:latin typeface="Calibri"/>
+              </a:rPr>
+              <a:t>In a parallel circuit, each component has its own branch. Each gets the full supply voltage, the branch currents add up to the total, and 1 / R total = 1 / R1 + 1 / R2 + ... One failure doesn't stop the others.</a:t>
+            </a:r>
+          </a:p>
+          <a:p>
+            <a:pPr>
+              <a:spcAft>
+                <a:spcPts val="1260"/>
+              </a:spcAft>
+            </a:pPr>
+            <a:r>
+              <a:rPr sz="2100" b="1">
+                <a:solidFill>
+                  <a:srgbClr val="202122"/>
+                </a:solidFill>
+                <a:latin typeface="Calibri"/>
+              </a:rPr>
+              <a:t>Kirchhoff's laws:</a:t>
+            </a:r>
+            <a:r>
+              <a:rPr sz="2100" b="0">
+                <a:solidFill>
+                  <a:srgbClr val="202122"/>
+                </a:solidFill>
+                <a:latin typeface="Calibri"/>
+              </a:rPr>
+              <a:t> current into a junction equals current out; voltages around a loop sum to zero.</a:t>
+            </a:r>
+          </a:p>
+        </p:txBody>
+      </p:sp>
+      <p:sp>
+        <p:nvSpPr>
+          <p:cNvPr id="7" name="Rounded Rectangle 6"/>
           <p:cNvSpPr/>
           <p:nvPr/>
         </p:nvSpPr>
         <p:spPr>
           <a:xfrm>
-            <a:off x="548640" y="1600200"/>
-            <a:ext cx="5364327" cy="640080"/>
+            <a:off x="7772400" y="1554480"/>
+            <a:ext cx="3867912" cy="4526280"/>
           </a:xfrm>
           <a:prstGeom prst="roundRect">
             <a:avLst>
-              <a:gd name="adj" fmla="val 15000"/>
+              <a:gd name="adj" fmla="val 8000"/>
             </a:avLst>
           </a:prstGeom>
           <a:solidFill>
@@ -7320,55 +10587,20 @@
       </p:sp>
       <p:sp>
         <p:nvSpPr>
-          <p:cNvPr id="7" name="TextBox 6"/>
-          <p:cNvSpPr txBox="1"/>
-          <p:nvPr/>
-        </p:nvSpPr>
-        <p:spPr>
-          <a:xfrm>
-            <a:off x="777240" y="1600200"/>
-            <a:ext cx="4907127" cy="640080"/>
-          </a:xfrm>
-          <a:prstGeom prst="rect">
-            <a:avLst/>
-          </a:prstGeom>
-          <a:noFill/>
-        </p:spPr>
-        <p:txBody>
-          <a:bodyPr wrap="square" anchor="ctr" lIns="0" rIns="0" tIns="0" bIns="0"/>
-          <a:lstStyle/>
-          <a:p>
-            <a:pPr algn="l"/>
-            <a:r>
-              <a:rPr sz="2000" b="1" i="0">
-                <a:solidFill>
-                  <a:srgbClr val="FFFFFF"/>
-                </a:solidFill>
-                <a:latin typeface="Calibri"/>
-              </a:rPr>
-              <a:t>Analogue</a:t>
-            </a:r>
-          </a:p>
-        </p:txBody>
-      </p:sp>
-      <p:sp>
-        <p:nvSpPr>
-          <p:cNvPr id="8" name="Rounded Rectangle 7"/>
+          <p:cNvPr id="8" name="Oval 7"/>
           <p:cNvSpPr/>
           <p:nvPr/>
         </p:nvSpPr>
         <p:spPr>
           <a:xfrm>
-            <a:off x="548640" y="2377440"/>
-            <a:ext cx="5364327" cy="3794760"/>
-          </a:xfrm>
-          <a:prstGeom prst="roundRect">
-            <a:avLst>
-              <a:gd name="adj" fmla="val 4000"/>
-            </a:avLst>
+            <a:off x="8046720" y="1828800"/>
+            <a:ext cx="548640" cy="548640"/>
+          </a:xfrm>
+          <a:prstGeom prst="ellipse">
+            <a:avLst/>
           </a:prstGeom>
           <a:solidFill>
-            <a:srgbClr val="EAF3FF"/>
+            <a:srgbClr val="F2B705"/>
           </a:solidFill>
           <a:ln>
             <a:noFill/>
@@ -7390,9 +10622,20 @@
           </a:fontRef>
         </p:style>
         <p:txBody>
-          <a:bodyPr rtlCol="0" anchor="ctr"/>
-          <a:lstStyle/>
-          <a:p/>
+          <a:bodyPr rtlCol="0" anchor="ctr" lIns="0" rIns="0" tIns="0" bIns="0"/>
+          <a:lstStyle/>
+          <a:p>
+            <a:pPr algn="ctr"/>
+            <a:r>
+              <a:rPr sz="1300" b="1">
+                <a:solidFill>
+                  <a:srgbClr val="202122"/>
+                </a:solidFill>
+                <a:latin typeface="Calibri"/>
+              </a:rPr>
+              <a:t>e.g.</a:t>
+            </a:r>
+          </a:p>
         </p:txBody>
       </p:sp>
       <p:sp>
@@ -7403,317 +10646,60 @@
         </p:nvSpPr>
         <p:spPr>
           <a:xfrm>
-            <a:off x="822959" y="2606040"/>
-            <a:ext cx="4815687" cy="3337560"/>
-          </a:xfrm>
-          <a:prstGeom prst="rect">
-            <a:avLst/>
-          </a:prstGeom>
-          <a:noFill/>
-        </p:spPr>
-        <p:txBody>
-          <a:bodyPr wrap="square" lIns="0" rIns="0" tIns="0" bIns="0">
-            <a:spAutoFit/>
-          </a:bodyPr>
-          <a:lstStyle/>
-          <a:p>
-            <a:pPr marL="274320" indent="-274320">
-              <a:spcAft>
-                <a:spcPts val="990"/>
-              </a:spcAft>
-              <a:buClr>
-                <a:srgbClr val="0645AD"/>
-              </a:buClr>
-              <a:buFont typeface="Arial"/>
-              <a:buChar char="•"/>
-            </a:pPr>
-            <a:r>
-              <a:rPr sz="2200" b="0">
-                <a:solidFill>
-                  <a:srgbClr val="202122"/>
-                </a:solidFill>
-                <a:latin typeface="Calibri"/>
-              </a:rPr>
-              <a:t>Continuously variable</a:t>
-            </a:r>
-          </a:p>
-          <a:p>
-            <a:pPr marL="274320" indent="-274320">
-              <a:spcAft>
-                <a:spcPts val="990"/>
-              </a:spcAft>
-              <a:buClr>
-                <a:srgbClr val="0645AD"/>
-              </a:buClr>
-              <a:buFont typeface="Arial"/>
-              <a:buChar char="•"/>
-            </a:pPr>
-            <a:r>
-              <a:rPr sz="2200" b="0">
-                <a:solidFill>
-                  <a:srgbClr val="202122"/>
-                </a:solidFill>
-                <a:latin typeface="Calibri"/>
-              </a:rPr>
-              <a:t>e.g. a thermistor's voltage</a:t>
-            </a:r>
-          </a:p>
-          <a:p>
-            <a:pPr marL="274320" indent="-274320">
-              <a:spcAft>
-                <a:spcPts val="990"/>
-              </a:spcAft>
-              <a:buClr>
-                <a:srgbClr val="0645AD"/>
-              </a:buClr>
-              <a:buFont typeface="Arial"/>
-              <a:buChar char="•"/>
-            </a:pPr>
-            <a:r>
-              <a:rPr sz="2200" b="0">
-                <a:solidFill>
-                  <a:srgbClr val="202122"/>
-                </a:solidFill>
-                <a:latin typeface="Calibri"/>
-              </a:rPr>
-              <a:t>Affected by noise</a:t>
-            </a:r>
-          </a:p>
-        </p:txBody>
-      </p:sp>
-      <p:sp>
-        <p:nvSpPr>
-          <p:cNvPr id="10" name="Rounded Rectangle 9"/>
-          <p:cNvSpPr/>
-          <p:nvPr/>
-        </p:nvSpPr>
-        <p:spPr>
-          <a:xfrm>
-            <a:off x="6278727" y="1600200"/>
-            <a:ext cx="5364327" cy="640080"/>
-          </a:xfrm>
-          <a:prstGeom prst="roundRect">
-            <a:avLst>
-              <a:gd name="adj" fmla="val 15000"/>
-            </a:avLst>
-          </a:prstGeom>
-          <a:solidFill>
-            <a:srgbClr val="0645AD"/>
-          </a:solidFill>
-          <a:ln>
-            <a:noFill/>
-          </a:ln>
-          <a:effectLst/>
-        </p:spPr>
-        <p:style>
-          <a:lnRef idx="1">
-            <a:schemeClr val="accent1"/>
-          </a:lnRef>
-          <a:fillRef idx="3">
-            <a:schemeClr val="accent1"/>
-          </a:fillRef>
-          <a:effectRef idx="2">
-            <a:schemeClr val="accent1"/>
-          </a:effectRef>
-          <a:fontRef idx="minor">
-            <a:schemeClr val="lt1"/>
-          </a:fontRef>
-        </p:style>
-        <p:txBody>
-          <a:bodyPr rtlCol="0" anchor="ctr"/>
-          <a:lstStyle/>
-          <a:p/>
-        </p:txBody>
-      </p:sp>
-      <p:sp>
-        <p:nvSpPr>
-          <p:cNvPr id="11" name="TextBox 10"/>
+            <a:off x="8046720" y="2560320"/>
+            <a:ext cx="3291840" cy="365760"/>
+          </a:xfrm>
+          <a:prstGeom prst="rect">
+            <a:avLst/>
+          </a:prstGeom>
+          <a:noFill/>
+        </p:spPr>
+        <p:txBody>
+          <a:bodyPr wrap="square" anchor="t" lIns="0" rIns="0" tIns="0" bIns="0"/>
+          <a:lstStyle/>
+          <a:p>
+            <a:pPr algn="l"/>
+            <a:r>
+              <a:rPr sz="1300" b="1" i="0">
+                <a:solidFill>
+                  <a:srgbClr val="A9C8F0"/>
+                </a:solidFill>
+                <a:latin typeface="Calibri"/>
+              </a:rPr>
+              <a:t>EXAMPLE</a:t>
+            </a:r>
+          </a:p>
+        </p:txBody>
+      </p:sp>
+      <p:sp>
+        <p:nvSpPr>
+          <p:cNvPr id="10" name="TextBox 9"/>
           <p:cNvSpPr txBox="1"/>
           <p:nvPr/>
         </p:nvSpPr>
         <p:spPr>
           <a:xfrm>
-            <a:off x="6507327" y="1600200"/>
-            <a:ext cx="4907127" cy="640080"/>
-          </a:xfrm>
-          <a:prstGeom prst="rect">
-            <a:avLst/>
-          </a:prstGeom>
-          <a:noFill/>
-        </p:spPr>
-        <p:txBody>
-          <a:bodyPr wrap="square" anchor="ctr" lIns="0" rIns="0" tIns="0" bIns="0"/>
+            <a:off x="8046720" y="2971800"/>
+            <a:ext cx="3291840" cy="2971800"/>
+          </a:xfrm>
+          <a:prstGeom prst="rect">
+            <a:avLst/>
+          </a:prstGeom>
+          <a:noFill/>
+        </p:spPr>
+        <p:txBody>
+          <a:bodyPr wrap="square" anchor="t" lIns="0" rIns="0" tIns="0" bIns="0"/>
           <a:lstStyle/>
           <a:p>
             <a:pPr algn="l"/>
             <a:r>
-              <a:rPr sz="2000" b="1" i="0">
+              <a:rPr sz="1900" b="0" i="0">
                 <a:solidFill>
                   <a:srgbClr val="FFFFFF"/>
                 </a:solidFill>
-                <a:latin typeface="Calibri"/>
-              </a:rPr>
-              <a:t>Digital</a:t>
-            </a:r>
-          </a:p>
-        </p:txBody>
-      </p:sp>
-      <p:sp>
-        <p:nvSpPr>
-          <p:cNvPr id="12" name="Rounded Rectangle 11"/>
-          <p:cNvSpPr/>
-          <p:nvPr/>
-        </p:nvSpPr>
-        <p:spPr>
-          <a:xfrm>
-            <a:off x="6278727" y="2377440"/>
-            <a:ext cx="5364327" cy="3794760"/>
-          </a:xfrm>
-          <a:prstGeom prst="roundRect">
-            <a:avLst>
-              <a:gd name="adj" fmla="val 4000"/>
-            </a:avLst>
-          </a:prstGeom>
-          <a:solidFill>
-            <a:srgbClr val="EAF3FF"/>
-          </a:solidFill>
-          <a:ln>
-            <a:noFill/>
-          </a:ln>
-          <a:effectLst/>
-        </p:spPr>
-        <p:style>
-          <a:lnRef idx="1">
-            <a:schemeClr val="accent1"/>
-          </a:lnRef>
-          <a:fillRef idx="3">
-            <a:schemeClr val="accent1"/>
-          </a:fillRef>
-          <a:effectRef idx="2">
-            <a:schemeClr val="accent1"/>
-          </a:effectRef>
-          <a:fontRef idx="minor">
-            <a:schemeClr val="lt1"/>
-          </a:fontRef>
-        </p:style>
-        <p:txBody>
-          <a:bodyPr rtlCol="0" anchor="ctr"/>
-          <a:lstStyle/>
-          <a:p/>
-        </p:txBody>
-      </p:sp>
-      <p:sp>
-        <p:nvSpPr>
-          <p:cNvPr id="13" name="TextBox 12"/>
-          <p:cNvSpPr txBox="1"/>
-          <p:nvPr/>
-        </p:nvSpPr>
-        <p:spPr>
-          <a:xfrm>
-            <a:off x="6553047" y="2606040"/>
-            <a:ext cx="4815687" cy="3337560"/>
-          </a:xfrm>
-          <a:prstGeom prst="rect">
-            <a:avLst/>
-          </a:prstGeom>
-          <a:noFill/>
-        </p:spPr>
-        <p:txBody>
-          <a:bodyPr wrap="square" lIns="0" rIns="0" tIns="0" bIns="0">
-            <a:spAutoFit/>
-          </a:bodyPr>
-          <a:lstStyle/>
-          <a:p>
-            <a:pPr marL="274320" indent="-274320">
-              <a:spcAft>
-                <a:spcPts val="990"/>
-              </a:spcAft>
-              <a:buClr>
-                <a:srgbClr val="0645AD"/>
-              </a:buClr>
-              <a:buFont typeface="Arial"/>
-              <a:buChar char="•"/>
-            </a:pPr>
-            <a:r>
-              <a:rPr sz="2200" b="1">
-                <a:solidFill>
-                  <a:srgbClr val="202122"/>
-                </a:solidFill>
-                <a:latin typeface="Calibri"/>
-              </a:rPr>
-              <a:t>Discrete levels:</a:t>
-            </a:r>
-            <a:r>
-              <a:rPr sz="2200" b="0">
-                <a:solidFill>
-                  <a:srgbClr val="202122"/>
-                </a:solidFill>
-                <a:latin typeface="Calibri"/>
-              </a:rPr>
-              <a:t> on or off</a:t>
-            </a:r>
-          </a:p>
-          <a:p>
-            <a:pPr marL="274320" indent="-274320">
-              <a:spcAft>
-                <a:spcPts val="990"/>
-              </a:spcAft>
-              <a:buClr>
-                <a:srgbClr val="0645AD"/>
-              </a:buClr>
-              <a:buFont typeface="Arial"/>
-              <a:buChar char="•"/>
-            </a:pPr>
-            <a:r>
-              <a:rPr sz="2200" b="0">
-                <a:solidFill>
-                  <a:srgbClr val="202122"/>
-                </a:solidFill>
-                <a:latin typeface="Calibri"/>
-              </a:rPr>
-              <a:t>e.g. a limit switch</a:t>
-            </a:r>
-          </a:p>
-          <a:p>
-            <a:pPr marL="274320" indent="-274320">
-              <a:spcAft>
-                <a:spcPts val="990"/>
-              </a:spcAft>
-              <a:buClr>
-                <a:srgbClr val="0645AD"/>
-              </a:buClr>
-              <a:buFont typeface="Arial"/>
-              <a:buChar char="•"/>
-            </a:pPr>
-            <a:r>
-              <a:rPr sz="2200" b="0">
-                <a:solidFill>
-                  <a:srgbClr val="202122"/>
-                </a:solidFill>
-                <a:latin typeface="Calibri"/>
-              </a:rPr>
-              <a:t>Robust, easy to process</a:t>
-            </a:r>
-          </a:p>
-          <a:p>
-            <a:pPr marL="274320" indent="-274320">
-              <a:spcAft>
-                <a:spcPts val="990"/>
-              </a:spcAft>
-              <a:buClr>
-                <a:srgbClr val="0645AD"/>
-              </a:buClr>
-              <a:buFont typeface="Arial"/>
-              <a:buChar char="•"/>
-            </a:pPr>
-            <a:r>
-              <a:rPr sz="2200" b="0">
-                <a:solidFill>
-                  <a:srgbClr val="202122"/>
-                </a:solidFill>
-                <a:latin typeface="Calibri"/>
-              </a:rPr>
-              <a:t>Fan in / fan out limits how many gates connect</a:t>
+                <a:latin typeface="Cambria"/>
+              </a:rPr>
+              <a:t>Two 10 ohm resistors: in series, 20 ohms; in parallel, 5 ohms. Household sockets are wired in parallel.</a:t>
             </a:r>
           </a:p>
         </p:txBody>
@@ -7805,7 +10791,7 @@
                 </a:solidFill>
                 <a:latin typeface="Cambria"/>
               </a:rPr>
-              <a:t>Check your understanding</a:t>
+              <a:t>Series and parallel</a:t>
             </a:r>
           </a:p>
         </p:txBody>
@@ -7878,20 +10864,22 @@
       </p:sp>
       <p:sp>
         <p:nvSpPr>
-          <p:cNvPr id="6" name="Oval 5"/>
+          <p:cNvPr id="6" name="Rounded Rectangle 5"/>
           <p:cNvSpPr/>
           <p:nvPr/>
         </p:nvSpPr>
         <p:spPr>
           <a:xfrm>
-            <a:off x="548640" y="1618488"/>
-            <a:ext cx="411480" cy="411480"/>
-          </a:xfrm>
-          <a:prstGeom prst="ellipse">
-            <a:avLst/>
+            <a:off x="548640" y="1600200"/>
+            <a:ext cx="5364327" cy="640080"/>
+          </a:xfrm>
+          <a:prstGeom prst="roundRect">
+            <a:avLst>
+              <a:gd name="adj" fmla="val 15000"/>
+            </a:avLst>
           </a:prstGeom>
           <a:solidFill>
-            <a:srgbClr val="F2B705"/>
+            <a:srgbClr val="03306E"/>
           </a:solidFill>
           <a:ln>
             <a:noFill/>
@@ -7913,20 +10901,9 @@
           </a:fontRef>
         </p:style>
         <p:txBody>
-          <a:bodyPr rtlCol="0" anchor="ctr" lIns="0" rIns="0" tIns="0" bIns="0"/>
-          <a:lstStyle/>
-          <a:p>
-            <a:pPr algn="ctr"/>
-            <a:r>
-              <a:rPr sz="1400" b="1">
-                <a:solidFill>
-                  <a:srgbClr val="202122"/>
-                </a:solidFill>
-                <a:latin typeface="Calibri"/>
-              </a:rPr>
-              <a:t>1</a:t>
-            </a:r>
-          </a:p>
+          <a:bodyPr rtlCol="0" anchor="ctr"/>
+          <a:lstStyle/>
+          <a:p/>
         </p:txBody>
       </p:sp>
       <p:sp>
@@ -7937,47 +10914,49 @@
         </p:nvSpPr>
         <p:spPr>
           <a:xfrm>
-            <a:off x="1234440" y="1600200"/>
-            <a:ext cx="10408615" cy="791870"/>
-          </a:xfrm>
-          <a:prstGeom prst="rect">
-            <a:avLst/>
-          </a:prstGeom>
-          <a:noFill/>
-        </p:spPr>
-        <p:txBody>
-          <a:bodyPr wrap="square" anchor="t" lIns="0" rIns="0" tIns="0" bIns="0"/>
+            <a:off x="777240" y="1600200"/>
+            <a:ext cx="4907127" cy="640080"/>
+          </a:xfrm>
+          <a:prstGeom prst="rect">
+            <a:avLst/>
+          </a:prstGeom>
+          <a:noFill/>
+        </p:spPr>
+        <p:txBody>
+          <a:bodyPr wrap="square" anchor="ctr" lIns="0" rIns="0" tIns="0" bIns="0"/>
           <a:lstStyle/>
           <a:p>
             <a:pPr algn="l"/>
             <a:r>
-              <a:rPr sz="2200" b="0" i="0">
-                <a:solidFill>
-                  <a:srgbClr val="202122"/>
-                </a:solidFill>
-                <a:latin typeface="Calibri"/>
-              </a:rPr>
-              <a:t>A 12 V supply drives 2 A. What is the resistance?</a:t>
-            </a:r>
-          </a:p>
-        </p:txBody>
-      </p:sp>
-      <p:sp>
-        <p:nvSpPr>
-          <p:cNvPr id="8" name="Oval 7"/>
+              <a:rPr sz="2000" b="1" i="0">
+                <a:solidFill>
+                  <a:srgbClr val="FFFFFF"/>
+                </a:solidFill>
+                <a:latin typeface="Calibri"/>
+              </a:rPr>
+              <a:t>Series</a:t>
+            </a:r>
+          </a:p>
+        </p:txBody>
+      </p:sp>
+      <p:sp>
+        <p:nvSpPr>
+          <p:cNvPr id="8" name="Rounded Rectangle 7"/>
           <p:cNvSpPr/>
           <p:nvPr/>
         </p:nvSpPr>
         <p:spPr>
           <a:xfrm>
-            <a:off x="548640" y="2574950"/>
-            <a:ext cx="411480" cy="411480"/>
-          </a:xfrm>
-          <a:prstGeom prst="ellipse">
-            <a:avLst/>
+            <a:off x="548640" y="2377440"/>
+            <a:ext cx="5364327" cy="3794760"/>
+          </a:xfrm>
+          <a:prstGeom prst="roundRect">
+            <a:avLst>
+              <a:gd name="adj" fmla="val 4000"/>
+            </a:avLst>
           </a:prstGeom>
           <a:solidFill>
-            <a:srgbClr val="F2B705"/>
+            <a:srgbClr val="EAF3FF"/>
           </a:solidFill>
           <a:ln>
             <a:noFill/>
@@ -7999,20 +10978,9 @@
           </a:fontRef>
         </p:style>
         <p:txBody>
-          <a:bodyPr rtlCol="0" anchor="ctr" lIns="0" rIns="0" tIns="0" bIns="0"/>
-          <a:lstStyle/>
-          <a:p>
-            <a:pPr algn="ctr"/>
-            <a:r>
-              <a:rPr sz="1400" b="1">
-                <a:solidFill>
-                  <a:srgbClr val="202122"/>
-                </a:solidFill>
-                <a:latin typeface="Calibri"/>
-              </a:rPr>
-              <a:t>2</a:t>
-            </a:r>
-          </a:p>
+          <a:bodyPr rtlCol="0" anchor="ctr"/>
+          <a:lstStyle/>
+          <a:p/>
         </p:txBody>
       </p:sp>
       <p:sp>
@@ -8023,47 +10991,102 @@
         </p:nvSpPr>
         <p:spPr>
           <a:xfrm>
-            <a:off x="1234440" y="2556662"/>
-            <a:ext cx="10408615" cy="791870"/>
-          </a:xfrm>
-          <a:prstGeom prst="rect">
-            <a:avLst/>
-          </a:prstGeom>
-          <a:noFill/>
-        </p:spPr>
-        <p:txBody>
-          <a:bodyPr wrap="square" anchor="t" lIns="0" rIns="0" tIns="0" bIns="0"/>
-          <a:lstStyle/>
-          <a:p>
-            <a:pPr algn="l"/>
-            <a:r>
-              <a:rPr sz="2200" b="0" i="0">
+            <a:off x="822959" y="2606040"/>
+            <a:ext cx="4815687" cy="3337560"/>
+          </a:xfrm>
+          <a:prstGeom prst="rect">
+            <a:avLst/>
+          </a:prstGeom>
+          <a:noFill/>
+        </p:spPr>
+        <p:txBody>
+          <a:bodyPr wrap="square" lIns="0" rIns="0" tIns="0" bIns="0">
+            <a:spAutoFit/>
+          </a:bodyPr>
+          <a:lstStyle/>
+          <a:p>
+            <a:pPr marL="274320" indent="-274320">
+              <a:spcAft>
+                <a:spcPts val="990"/>
+              </a:spcAft>
+              <a:buClr>
+                <a:srgbClr val="0645AD"/>
+              </a:buClr>
+              <a:buFont typeface="Arial"/>
+              <a:buChar char="•"/>
+            </a:pPr>
+            <a:r>
+              <a:rPr sz="2200" b="0">
                 <a:solidFill>
                   <a:srgbClr val="202122"/>
                 </a:solidFill>
                 <a:latin typeface="Calibri"/>
               </a:rPr>
-              <a:t>Two 10 ohm resistors in series: total resistance?</a:t>
-            </a:r>
-          </a:p>
-        </p:txBody>
-      </p:sp>
-      <p:sp>
-        <p:nvSpPr>
-          <p:cNvPr id="10" name="Oval 9"/>
+              <a:t>Same current through every component</a:t>
+            </a:r>
+          </a:p>
+          <a:p>
+            <a:pPr marL="274320" indent="-274320">
+              <a:spcAft>
+                <a:spcPts val="990"/>
+              </a:spcAft>
+              <a:buClr>
+                <a:srgbClr val="0645AD"/>
+              </a:buClr>
+              <a:buFont typeface="Arial"/>
+              <a:buChar char="•"/>
+            </a:pPr>
+            <a:r>
+              <a:rPr sz="2200" b="0">
+                <a:solidFill>
+                  <a:srgbClr val="202122"/>
+                </a:solidFill>
+                <a:latin typeface="Calibri"/>
+              </a:rPr>
+              <a:t>Voltages add up to the supply</a:t>
+            </a:r>
+          </a:p>
+          <a:p>
+            <a:pPr marL="274320" indent="-274320">
+              <a:spcAft>
+                <a:spcPts val="990"/>
+              </a:spcAft>
+              <a:buClr>
+                <a:srgbClr val="0645AD"/>
+              </a:buClr>
+              <a:buFont typeface="Arial"/>
+              <a:buChar char="•"/>
+            </a:pPr>
+            <a:r>
+              <a:rPr sz="2200" b="0">
+                <a:solidFill>
+                  <a:srgbClr val="202122"/>
+                </a:solidFill>
+                <a:latin typeface="Calibri"/>
+              </a:rPr>
+              <a:t>Total R = R1 + R2 + ...</a:t>
+            </a:r>
+          </a:p>
+        </p:txBody>
+      </p:sp>
+      <p:sp>
+        <p:nvSpPr>
+          <p:cNvPr id="10" name="Rounded Rectangle 9"/>
           <p:cNvSpPr/>
           <p:nvPr/>
         </p:nvSpPr>
         <p:spPr>
           <a:xfrm>
-            <a:off x="548640" y="3531412"/>
-            <a:ext cx="411480" cy="411480"/>
-          </a:xfrm>
-          <a:prstGeom prst="ellipse">
-            <a:avLst/>
+            <a:off x="6278727" y="1600200"/>
+            <a:ext cx="5364327" cy="640080"/>
+          </a:xfrm>
+          <a:prstGeom prst="roundRect">
+            <a:avLst>
+              <a:gd name="adj" fmla="val 15000"/>
+            </a:avLst>
           </a:prstGeom>
           <a:solidFill>
-            <a:srgbClr val="F2B705"/>
+            <a:srgbClr val="0645AD"/>
           </a:solidFill>
           <a:ln>
             <a:noFill/>
@@ -8085,20 +11108,9 @@
           </a:fontRef>
         </p:style>
         <p:txBody>
-          <a:bodyPr rtlCol="0" anchor="ctr" lIns="0" rIns="0" tIns="0" bIns="0"/>
-          <a:lstStyle/>
-          <a:p>
-            <a:pPr algn="ctr"/>
-            <a:r>
-              <a:rPr sz="1400" b="1">
-                <a:solidFill>
-                  <a:srgbClr val="202122"/>
-                </a:solidFill>
-                <a:latin typeface="Calibri"/>
-              </a:rPr>
-              <a:t>3</a:t>
-            </a:r>
-          </a:p>
+          <a:bodyPr rtlCol="0" anchor="ctr"/>
+          <a:lstStyle/>
+          <a:p/>
         </p:txBody>
       </p:sp>
       <p:sp>
@@ -8109,47 +11121,49 @@
         </p:nvSpPr>
         <p:spPr>
           <a:xfrm>
-            <a:off x="1234440" y="3513124"/>
-            <a:ext cx="10408615" cy="791870"/>
-          </a:xfrm>
-          <a:prstGeom prst="rect">
-            <a:avLst/>
-          </a:prstGeom>
-          <a:noFill/>
-        </p:spPr>
-        <p:txBody>
-          <a:bodyPr wrap="square" anchor="t" lIns="0" rIns="0" tIns="0" bIns="0"/>
+            <a:off x="6507327" y="1600200"/>
+            <a:ext cx="4907127" cy="640080"/>
+          </a:xfrm>
+          <a:prstGeom prst="rect">
+            <a:avLst/>
+          </a:prstGeom>
+          <a:noFill/>
+        </p:spPr>
+        <p:txBody>
+          <a:bodyPr wrap="square" anchor="ctr" lIns="0" rIns="0" tIns="0" bIns="0"/>
           <a:lstStyle/>
           <a:p>
             <a:pPr algn="l"/>
             <a:r>
-              <a:rPr sz="2200" b="0" i="0">
-                <a:solidFill>
-                  <a:srgbClr val="202122"/>
-                </a:solidFill>
-                <a:latin typeface="Calibri"/>
-              </a:rPr>
-              <a:t>Two 10 ohm resistors in parallel: total resistance?</a:t>
-            </a:r>
-          </a:p>
-        </p:txBody>
-      </p:sp>
-      <p:sp>
-        <p:nvSpPr>
-          <p:cNvPr id="12" name="Oval 11"/>
+              <a:rPr sz="2000" b="1" i="0">
+                <a:solidFill>
+                  <a:srgbClr val="FFFFFF"/>
+                </a:solidFill>
+                <a:latin typeface="Calibri"/>
+              </a:rPr>
+              <a:t>Parallel</a:t>
+            </a:r>
+          </a:p>
+        </p:txBody>
+      </p:sp>
+      <p:sp>
+        <p:nvSpPr>
+          <p:cNvPr id="12" name="Rounded Rectangle 11"/>
           <p:cNvSpPr/>
           <p:nvPr/>
         </p:nvSpPr>
         <p:spPr>
           <a:xfrm>
-            <a:off x="548640" y="4487875"/>
-            <a:ext cx="411480" cy="411480"/>
-          </a:xfrm>
-          <a:prstGeom prst="ellipse">
-            <a:avLst/>
+            <a:off x="6278727" y="2377440"/>
+            <a:ext cx="5364327" cy="3794760"/>
+          </a:xfrm>
+          <a:prstGeom prst="roundRect">
+            <a:avLst>
+              <a:gd name="adj" fmla="val 4000"/>
+            </a:avLst>
           </a:prstGeom>
           <a:solidFill>
-            <a:srgbClr val="F2B705"/>
+            <a:srgbClr val="EAF3FF"/>
           </a:solidFill>
           <a:ln>
             <a:noFill/>
@@ -8171,20 +11185,9 @@
           </a:fontRef>
         </p:style>
         <p:txBody>
-          <a:bodyPr rtlCol="0" anchor="ctr" lIns="0" rIns="0" tIns="0" bIns="0"/>
-          <a:lstStyle/>
-          <a:p>
-            <a:pPr algn="ctr"/>
-            <a:r>
-              <a:rPr sz="1400" b="1">
-                <a:solidFill>
-                  <a:srgbClr val="202122"/>
-                </a:solidFill>
-                <a:latin typeface="Calibri"/>
-              </a:rPr>
-              <a:t>4</a:t>
-            </a:r>
-          </a:p>
+          <a:bodyPr rtlCol="0" anchor="ctr"/>
+          <a:lstStyle/>
+          <a:p/>
         </p:txBody>
       </p:sp>
       <p:sp>
@@ -8195,113 +11198,80 @@
         </p:nvSpPr>
         <p:spPr>
           <a:xfrm>
-            <a:off x="1234440" y="4469587"/>
-            <a:ext cx="10408615" cy="791870"/>
-          </a:xfrm>
-          <a:prstGeom prst="rect">
-            <a:avLst/>
-          </a:prstGeom>
-          <a:noFill/>
-        </p:spPr>
-        <p:txBody>
-          <a:bodyPr wrap="square" anchor="t" lIns="0" rIns="0" tIns="0" bIns="0"/>
-          <a:lstStyle/>
-          <a:p>
-            <a:pPr algn="l"/>
-            <a:r>
-              <a:rPr sz="2200" b="0" i="0">
+            <a:off x="6553047" y="2606040"/>
+            <a:ext cx="4815687" cy="3337560"/>
+          </a:xfrm>
+          <a:prstGeom prst="rect">
+            <a:avLst/>
+          </a:prstGeom>
+          <a:noFill/>
+        </p:spPr>
+        <p:txBody>
+          <a:bodyPr wrap="square" lIns="0" rIns="0" tIns="0" bIns="0">
+            <a:spAutoFit/>
+          </a:bodyPr>
+          <a:lstStyle/>
+          <a:p>
+            <a:pPr marL="274320" indent="-274320">
+              <a:spcAft>
+                <a:spcPts val="990"/>
+              </a:spcAft>
+              <a:buClr>
+                <a:srgbClr val="0645AD"/>
+              </a:buClr>
+              <a:buFont typeface="Arial"/>
+              <a:buChar char="•"/>
+            </a:pPr>
+            <a:r>
+              <a:rPr sz="2200" b="0">
                 <a:solidFill>
                   <a:srgbClr val="202122"/>
                 </a:solidFill>
                 <a:latin typeface="Calibri"/>
               </a:rPr>
-              <a:t>What does an RCD do?</a:t>
-            </a:r>
-          </a:p>
-        </p:txBody>
-      </p:sp>
-      <p:sp>
-        <p:nvSpPr>
-          <p:cNvPr id="14" name="Oval 13"/>
-          <p:cNvSpPr/>
-          <p:nvPr/>
-        </p:nvSpPr>
-        <p:spPr>
-          <a:xfrm>
-            <a:off x="548640" y="5444337"/>
-            <a:ext cx="411480" cy="411480"/>
-          </a:xfrm>
-          <a:prstGeom prst="ellipse">
-            <a:avLst/>
-          </a:prstGeom>
-          <a:solidFill>
-            <a:srgbClr val="F2B705"/>
-          </a:solidFill>
-          <a:ln>
-            <a:noFill/>
-          </a:ln>
-          <a:effectLst/>
-        </p:spPr>
-        <p:style>
-          <a:lnRef idx="1">
-            <a:schemeClr val="accent1"/>
-          </a:lnRef>
-          <a:fillRef idx="3">
-            <a:schemeClr val="accent1"/>
-          </a:fillRef>
-          <a:effectRef idx="2">
-            <a:schemeClr val="accent1"/>
-          </a:effectRef>
-          <a:fontRef idx="minor">
-            <a:schemeClr val="lt1"/>
-          </a:fontRef>
-        </p:style>
-        <p:txBody>
-          <a:bodyPr rtlCol="0" anchor="ctr" lIns="0" rIns="0" tIns="0" bIns="0"/>
-          <a:lstStyle/>
-          <a:p>
-            <a:pPr algn="ctr"/>
-            <a:r>
-              <a:rPr sz="1400" b="1">
+              <a:t>Same voltage across each branch</a:t>
+            </a:r>
+          </a:p>
+          <a:p>
+            <a:pPr marL="274320" indent="-274320">
+              <a:spcAft>
+                <a:spcPts val="990"/>
+              </a:spcAft>
+              <a:buClr>
+                <a:srgbClr val="0645AD"/>
+              </a:buClr>
+              <a:buFont typeface="Arial"/>
+              <a:buChar char="•"/>
+            </a:pPr>
+            <a:r>
+              <a:rPr sz="2200" b="0">
                 <a:solidFill>
                   <a:srgbClr val="202122"/>
                 </a:solidFill>
                 <a:latin typeface="Calibri"/>
               </a:rPr>
-              <a:t>5</a:t>
-            </a:r>
-          </a:p>
-        </p:txBody>
-      </p:sp>
-      <p:sp>
-        <p:nvSpPr>
-          <p:cNvPr id="15" name="TextBox 14"/>
-          <p:cNvSpPr txBox="1"/>
-          <p:nvPr/>
-        </p:nvSpPr>
-        <p:spPr>
-          <a:xfrm>
-            <a:off x="1234440" y="5426049"/>
-            <a:ext cx="10408615" cy="791870"/>
-          </a:xfrm>
-          <a:prstGeom prst="rect">
-            <a:avLst/>
-          </a:prstGeom>
-          <a:noFill/>
-        </p:spPr>
-        <p:txBody>
-          <a:bodyPr wrap="square" anchor="t" lIns="0" rIns="0" tIns="0" bIns="0"/>
-          <a:lstStyle/>
-          <a:p>
-            <a:pPr algn="l"/>
-            <a:r>
-              <a:rPr sz="2200" b="0" i="0">
+              <a:t>Currents add up to the total</a:t>
+            </a:r>
+          </a:p>
+          <a:p>
+            <a:pPr marL="274320" indent="-274320">
+              <a:spcAft>
+                <a:spcPts val="990"/>
+              </a:spcAft>
+              <a:buClr>
+                <a:srgbClr val="0645AD"/>
+              </a:buClr>
+              <a:buFont typeface="Arial"/>
+              <a:buChar char="•"/>
+            </a:pPr>
+            <a:r>
+              <a:rPr sz="2200" b="0">
                 <a:solidFill>
                   <a:srgbClr val="202122"/>
                 </a:solidFill>
                 <a:latin typeface="Calibri"/>
               </a:rPr>
-              <a:t>What does a diode do?</a:t>
+              <a:t>1 / R total = 1 / R1 + 1 / R2 + ...</a:t>
             </a:r>
           </a:p>
         </p:txBody>
@@ -8393,7 +11363,7 @@
                 </a:solidFill>
                 <a:latin typeface="Cambria"/>
               </a:rPr>
-              <a:t>Answers</a:t>
+              <a:t>Quick check: Series and parallel</a:t>
             </a:r>
           </a:p>
         </p:txBody>
@@ -8472,8 +11442,8 @@
         </p:nvSpPr>
         <p:spPr>
           <a:xfrm>
-            <a:off x="548640" y="1618488"/>
-            <a:ext cx="411480" cy="411480"/>
+            <a:off x="548640" y="1691640"/>
+            <a:ext cx="502920" cy="502920"/>
           </a:xfrm>
           <a:prstGeom prst="ellipse">
             <a:avLst/>
@@ -8506,7 +11476,7 @@
           <a:p>
             <a:pPr algn="ctr"/>
             <a:r>
-              <a:rPr sz="1400" b="1">
+              <a:rPr sz="1600" b="1">
                 <a:solidFill>
                   <a:srgbClr val="202122"/>
                 </a:solidFill>
@@ -8525,8 +11495,8 @@
         </p:nvSpPr>
         <p:spPr>
           <a:xfrm>
-            <a:off x="1234440" y="1600200"/>
-            <a:ext cx="10408615" cy="791870"/>
+            <a:off x="1371600" y="1645920"/>
+            <a:ext cx="10271455" cy="1188720"/>
           </a:xfrm>
           <a:prstGeom prst="rect">
             <a:avLst/>
@@ -8539,24 +11509,13 @@
           <a:p>
             <a:pPr algn="l"/>
             <a:r>
-              <a:rPr sz="1800" b="0" i="0">
-                <a:solidFill>
-                  <a:srgbClr val="54595D"/>
-                </a:solidFill>
-                <a:latin typeface="Calibri"/>
-              </a:rPr>
-              <a:t>A 12 V supply drives 2 A. What is the resistance?</a:t>
-            </a:r>
-          </a:p>
-          <a:p>
-            <a:r>
-              <a:rPr sz="1800" b="1">
-                <a:solidFill>
-                  <a:srgbClr val="03306E"/>
-                </a:solidFill>
-                <a:latin typeface="Calibri"/>
-              </a:rPr>
-              <a:t>6 ohms.</a:t>
+              <a:rPr sz="2400" b="0" i="0">
+                <a:solidFill>
+                  <a:srgbClr val="202122"/>
+                </a:solidFill>
+                <a:latin typeface="Calibri"/>
+              </a:rPr>
+              <a:t>In series, what is the same through every component?</a:t>
             </a:r>
           </a:p>
         </p:txBody>
@@ -8569,8 +11528,8 @@
         </p:nvSpPr>
         <p:spPr>
           <a:xfrm>
-            <a:off x="548640" y="2574950"/>
-            <a:ext cx="411480" cy="411480"/>
+            <a:off x="548640" y="3108960"/>
+            <a:ext cx="502920" cy="502920"/>
           </a:xfrm>
           <a:prstGeom prst="ellipse">
             <a:avLst/>
@@ -8603,7 +11562,7 @@
           <a:p>
             <a:pPr algn="ctr"/>
             <a:r>
-              <a:rPr sz="1400" b="1">
+              <a:rPr sz="1600" b="1">
                 <a:solidFill>
                   <a:srgbClr val="202122"/>
                 </a:solidFill>
@@ -8622,8 +11581,8 @@
         </p:nvSpPr>
         <p:spPr>
           <a:xfrm>
-            <a:off x="1234440" y="2556662"/>
-            <a:ext cx="10408615" cy="791870"/>
+            <a:off x="1371600" y="3063240"/>
+            <a:ext cx="10271455" cy="1188720"/>
           </a:xfrm>
           <a:prstGeom prst="rect">
             <a:avLst/>
@@ -8636,24 +11595,13 @@
           <a:p>
             <a:pPr algn="l"/>
             <a:r>
-              <a:rPr sz="1800" b="0" i="0">
-                <a:solidFill>
-                  <a:srgbClr val="54595D"/>
-                </a:solidFill>
-                <a:latin typeface="Calibri"/>
-              </a:rPr>
-              <a:t>Two 10 ohm resistors in series: total resistance?</a:t>
-            </a:r>
-          </a:p>
-          <a:p>
-            <a:r>
-              <a:rPr sz="1800" b="1">
-                <a:solidFill>
-                  <a:srgbClr val="03306E"/>
-                </a:solidFill>
-                <a:latin typeface="Calibri"/>
-              </a:rPr>
-              <a:t>20 ohms.</a:t>
+              <a:rPr sz="2400" b="0" i="0">
+                <a:solidFill>
+                  <a:srgbClr val="202122"/>
+                </a:solidFill>
+                <a:latin typeface="Calibri"/>
+              </a:rPr>
+              <a:t>Two 6 ohm resistors in parallel give what total?</a:t>
             </a:r>
           </a:p>
         </p:txBody>
@@ -8666,8 +11614,8 @@
         </p:nvSpPr>
         <p:spPr>
           <a:xfrm>
-            <a:off x="548640" y="3531412"/>
-            <a:ext cx="411480" cy="411480"/>
+            <a:off x="548640" y="4526280"/>
+            <a:ext cx="502920" cy="502920"/>
           </a:xfrm>
           <a:prstGeom prst="ellipse">
             <a:avLst/>
@@ -8700,7 +11648,7 @@
           <a:p>
             <a:pPr algn="ctr"/>
             <a:r>
-              <a:rPr sz="1400" b="1">
+              <a:rPr sz="1600" b="1">
                 <a:solidFill>
                   <a:srgbClr val="202122"/>
                 </a:solidFill>
@@ -8719,8 +11667,8 @@
         </p:nvSpPr>
         <p:spPr>
           <a:xfrm>
-            <a:off x="1234440" y="3513124"/>
-            <a:ext cx="10408615" cy="791870"/>
+            <a:off x="1371600" y="4480560"/>
+            <a:ext cx="10271455" cy="1188720"/>
           </a:xfrm>
           <a:prstGeom prst="rect">
             <a:avLst/>
@@ -8733,218 +11681,46 @@
           <a:p>
             <a:pPr algn="l"/>
             <a:r>
-              <a:rPr sz="1800" b="0" i="0">
+              <a:rPr sz="2400" b="0" i="0">
+                <a:solidFill>
+                  <a:srgbClr val="202122"/>
+                </a:solidFill>
+                <a:latin typeface="Calibri"/>
+              </a:rPr>
+              <a:t>Why are house circuits in parallel?</a:t>
+            </a:r>
+          </a:p>
+        </p:txBody>
+      </p:sp>
+      <p:sp>
+        <p:nvSpPr>
+          <p:cNvPr id="12" name="TextBox 11"/>
+          <p:cNvSpPr txBox="1"/>
+          <p:nvPr/>
+        </p:nvSpPr>
+        <p:spPr>
+          <a:xfrm>
+            <a:off x="548640" y="5852160"/>
+            <a:ext cx="11094415" cy="365760"/>
+          </a:xfrm>
+          <a:prstGeom prst="rect">
+            <a:avLst/>
+          </a:prstGeom>
+          <a:noFill/>
+        </p:spPr>
+        <p:txBody>
+          <a:bodyPr wrap="square" anchor="t" lIns="0" rIns="0" tIns="0" bIns="0"/>
+          <a:lstStyle/>
+          <a:p>
+            <a:pPr algn="l"/>
+            <a:r>
+              <a:rPr sz="1300" b="0" i="1">
                 <a:solidFill>
                   <a:srgbClr val="54595D"/>
                 </a:solidFill>
                 <a:latin typeface="Calibri"/>
               </a:rPr>
-              <a:t>Two 10 ohm resistors in parallel: total resistance?</a:t>
-            </a:r>
-          </a:p>
-          <a:p>
-            <a:r>
-              <a:rPr sz="1800" b="1">
-                <a:solidFill>
-                  <a:srgbClr val="03306E"/>
-                </a:solidFill>
-                <a:latin typeface="Calibri"/>
-              </a:rPr>
-              <a:t>5 ohms.</a:t>
-            </a:r>
-          </a:p>
-        </p:txBody>
-      </p:sp>
-      <p:sp>
-        <p:nvSpPr>
-          <p:cNvPr id="12" name="Oval 11"/>
-          <p:cNvSpPr/>
-          <p:nvPr/>
-        </p:nvSpPr>
-        <p:spPr>
-          <a:xfrm>
-            <a:off x="548640" y="4487875"/>
-            <a:ext cx="411480" cy="411480"/>
-          </a:xfrm>
-          <a:prstGeom prst="ellipse">
-            <a:avLst/>
-          </a:prstGeom>
-          <a:solidFill>
-            <a:srgbClr val="F2B705"/>
-          </a:solidFill>
-          <a:ln>
-            <a:noFill/>
-          </a:ln>
-          <a:effectLst/>
-        </p:spPr>
-        <p:style>
-          <a:lnRef idx="1">
-            <a:schemeClr val="accent1"/>
-          </a:lnRef>
-          <a:fillRef idx="3">
-            <a:schemeClr val="accent1"/>
-          </a:fillRef>
-          <a:effectRef idx="2">
-            <a:schemeClr val="accent1"/>
-          </a:effectRef>
-          <a:fontRef idx="minor">
-            <a:schemeClr val="lt1"/>
-          </a:fontRef>
-        </p:style>
-        <p:txBody>
-          <a:bodyPr rtlCol="0" anchor="ctr" lIns="0" rIns="0" tIns="0" bIns="0"/>
-          <a:lstStyle/>
-          <a:p>
-            <a:pPr algn="ctr"/>
-            <a:r>
-              <a:rPr sz="1400" b="1">
-                <a:solidFill>
-                  <a:srgbClr val="202122"/>
-                </a:solidFill>
-                <a:latin typeface="Calibri"/>
-              </a:rPr>
-              <a:t>4</a:t>
-            </a:r>
-          </a:p>
-        </p:txBody>
-      </p:sp>
-      <p:sp>
-        <p:nvSpPr>
-          <p:cNvPr id="13" name="TextBox 12"/>
-          <p:cNvSpPr txBox="1"/>
-          <p:nvPr/>
-        </p:nvSpPr>
-        <p:spPr>
-          <a:xfrm>
-            <a:off x="1234440" y="4469587"/>
-            <a:ext cx="10408615" cy="791870"/>
-          </a:xfrm>
-          <a:prstGeom prst="rect">
-            <a:avLst/>
-          </a:prstGeom>
-          <a:noFill/>
-        </p:spPr>
-        <p:txBody>
-          <a:bodyPr wrap="square" anchor="t" lIns="0" rIns="0" tIns="0" bIns="0"/>
-          <a:lstStyle/>
-          <a:p>
-            <a:pPr algn="l"/>
-            <a:r>
-              <a:rPr sz="1800" b="0" i="0">
-                <a:solidFill>
-                  <a:srgbClr val="54595D"/>
-                </a:solidFill>
-                <a:latin typeface="Calibri"/>
-              </a:rPr>
-              <a:t>What does an RCD do?</a:t>
-            </a:r>
-          </a:p>
-          <a:p>
-            <a:r>
-              <a:rPr sz="1800" b="1">
-                <a:solidFill>
-                  <a:srgbClr val="03306E"/>
-                </a:solidFill>
-                <a:latin typeface="Calibri"/>
-              </a:rPr>
-              <a:t>Cuts the supply when it detects a current imbalance (leakage).</a:t>
-            </a:r>
-          </a:p>
-        </p:txBody>
-      </p:sp>
-      <p:sp>
-        <p:nvSpPr>
-          <p:cNvPr id="14" name="Oval 13"/>
-          <p:cNvSpPr/>
-          <p:nvPr/>
-        </p:nvSpPr>
-        <p:spPr>
-          <a:xfrm>
-            <a:off x="548640" y="5444337"/>
-            <a:ext cx="411480" cy="411480"/>
-          </a:xfrm>
-          <a:prstGeom prst="ellipse">
-            <a:avLst/>
-          </a:prstGeom>
-          <a:solidFill>
-            <a:srgbClr val="F2B705"/>
-          </a:solidFill>
-          <a:ln>
-            <a:noFill/>
-          </a:ln>
-          <a:effectLst/>
-        </p:spPr>
-        <p:style>
-          <a:lnRef idx="1">
-            <a:schemeClr val="accent1"/>
-          </a:lnRef>
-          <a:fillRef idx="3">
-            <a:schemeClr val="accent1"/>
-          </a:fillRef>
-          <a:effectRef idx="2">
-            <a:schemeClr val="accent1"/>
-          </a:effectRef>
-          <a:fontRef idx="minor">
-            <a:schemeClr val="lt1"/>
-          </a:fontRef>
-        </p:style>
-        <p:txBody>
-          <a:bodyPr rtlCol="0" anchor="ctr" lIns="0" rIns="0" tIns="0" bIns="0"/>
-          <a:lstStyle/>
-          <a:p>
-            <a:pPr algn="ctr"/>
-            <a:r>
-              <a:rPr sz="1400" b="1">
-                <a:solidFill>
-                  <a:srgbClr val="202122"/>
-                </a:solidFill>
-                <a:latin typeface="Calibri"/>
-              </a:rPr>
-              <a:t>5</a:t>
-            </a:r>
-          </a:p>
-        </p:txBody>
-      </p:sp>
-      <p:sp>
-        <p:nvSpPr>
-          <p:cNvPr id="15" name="TextBox 14"/>
-          <p:cNvSpPr txBox="1"/>
-          <p:nvPr/>
-        </p:nvSpPr>
-        <p:spPr>
-          <a:xfrm>
-            <a:off x="1234440" y="5426049"/>
-            <a:ext cx="10408615" cy="791870"/>
-          </a:xfrm>
-          <a:prstGeom prst="rect">
-            <a:avLst/>
-          </a:prstGeom>
-          <a:noFill/>
-        </p:spPr>
-        <p:txBody>
-          <a:bodyPr wrap="square" anchor="t" lIns="0" rIns="0" tIns="0" bIns="0"/>
-          <a:lstStyle/>
-          <a:p>
-            <a:pPr algn="l"/>
-            <a:r>
-              <a:rPr sz="1800" b="0" i="0">
-                <a:solidFill>
-                  <a:srgbClr val="54595D"/>
-                </a:solidFill>
-                <a:latin typeface="Calibri"/>
-              </a:rPr>
-              <a:t>What does a diode do?</a:t>
-            </a:r>
-          </a:p>
-          <a:p>
-            <a:r>
-              <a:rPr sz="1800" b="1">
-                <a:solidFill>
-                  <a:srgbClr val="03306E"/>
-                </a:solidFill>
-                <a:latin typeface="Calibri"/>
-              </a:rPr>
-              <a:t>Lets current flow in one direction only.</a:t>
+              <a:t>Answer on mini whiteboards or in your book. Answers are in the speaker notes.</a:t>
             </a:r>
           </a:p>
         </p:txBody>
@@ -9036,7 +11812,7 @@
                 </a:solidFill>
                 <a:latin typeface="Cambria"/>
               </a:rPr>
-              <a:t>Activity: Circuit calculations</a:t>
+              <a:t>AC, protection and components</a:t>
             </a:r>
           </a:p>
         </p:txBody>
@@ -9115,13 +11891,55 @@
         </p:nvSpPr>
         <p:spPr>
           <a:xfrm>
-            <a:off x="548640" y="1508760"/>
-            <a:ext cx="2011680" cy="457200"/>
+            <a:off x="548640" y="1600200"/>
+            <a:ext cx="5410047" cy="2148840"/>
           </a:xfrm>
           <a:prstGeom prst="roundRect">
             <a:avLst>
-              <a:gd name="adj" fmla="val 50000"/>
+              <a:gd name="adj" fmla="val 6000"/>
             </a:avLst>
+          </a:prstGeom>
+          <a:solidFill>
+            <a:srgbClr val="EAF3FF"/>
+          </a:solidFill>
+          <a:ln>
+            <a:noFill/>
+          </a:ln>
+          <a:effectLst/>
+        </p:spPr>
+        <p:style>
+          <a:lnRef idx="1">
+            <a:schemeClr val="accent1"/>
+          </a:lnRef>
+          <a:fillRef idx="3">
+            <a:schemeClr val="accent1"/>
+          </a:fillRef>
+          <a:effectRef idx="2">
+            <a:schemeClr val="accent1"/>
+          </a:effectRef>
+          <a:fontRef idx="minor">
+            <a:schemeClr val="lt1"/>
+          </a:fontRef>
+        </p:style>
+        <p:txBody>
+          <a:bodyPr rtlCol="0" anchor="ctr"/>
+          <a:lstStyle/>
+          <a:p/>
+        </p:txBody>
+      </p:sp>
+      <p:sp>
+        <p:nvSpPr>
+          <p:cNvPr id="7" name="Oval 6"/>
+          <p:cNvSpPr/>
+          <p:nvPr/>
+        </p:nvSpPr>
+        <p:spPr>
+          <a:xfrm>
+            <a:off x="777240" y="1828800"/>
+            <a:ext cx="457200" cy="457200"/>
+          </a:xfrm>
+          <a:prstGeom prst="ellipse">
+            <a:avLst/>
           </a:prstGeom>
           <a:solidFill>
             <a:srgbClr val="F2B705"/>
@@ -9146,40 +11964,18 @@
           </a:fontRef>
         </p:style>
         <p:txBody>
-          <a:bodyPr rtlCol="0" anchor="ctr"/>
-          <a:lstStyle/>
-          <a:p/>
-        </p:txBody>
-      </p:sp>
-      <p:sp>
-        <p:nvSpPr>
-          <p:cNvPr id="7" name="TextBox 6"/>
-          <p:cNvSpPr txBox="1"/>
-          <p:nvPr/>
-        </p:nvSpPr>
-        <p:spPr>
-          <a:xfrm>
-            <a:off x="548640" y="1508760"/>
-            <a:ext cx="2011680" cy="457200"/>
-          </a:xfrm>
-          <a:prstGeom prst="rect">
-            <a:avLst/>
-          </a:prstGeom>
-          <a:noFill/>
-        </p:spPr>
-        <p:txBody>
-          <a:bodyPr wrap="square" anchor="ctr" lIns="0" rIns="0" tIns="0" bIns="0"/>
+          <a:bodyPr rtlCol="0" anchor="ctr" lIns="0" rIns="0" tIns="0" bIns="0"/>
           <a:lstStyle/>
           <a:p>
             <a:pPr algn="ctr"/>
             <a:r>
-              <a:rPr sz="1400" b="1" i="0">
+              <a:rPr sz="1500" b="1">
                 <a:solidFill>
                   <a:srgbClr val="202122"/>
                 </a:solidFill>
                 <a:latin typeface="Calibri"/>
               </a:rPr>
-              <a:t>30 minutes</a:t>
+              <a:t>1</a:t>
             </a:r>
           </a:p>
         </p:txBody>
@@ -9192,8 +11988,8 @@
         </p:nvSpPr>
         <p:spPr>
           <a:xfrm>
-            <a:off x="2743200" y="1508760"/>
-            <a:ext cx="4754880" cy="457200"/>
+            <a:off x="1371600" y="1801368"/>
+            <a:ext cx="4404207" cy="512064"/>
           </a:xfrm>
           <a:prstGeom prst="rect">
             <a:avLst/>
@@ -9206,375 +12002,64 @@
           <a:p>
             <a:pPr algn="l"/>
             <a:r>
-              <a:rPr sz="1400" b="0" i="1">
-                <a:solidFill>
-                  <a:srgbClr val="54595D"/>
-                </a:solidFill>
-                <a:latin typeface="Calibri"/>
-              </a:rPr>
-              <a:t>Pairs, with breadboards if available</a:t>
-            </a:r>
-          </a:p>
-        </p:txBody>
-      </p:sp>
-      <p:sp>
-        <p:nvSpPr>
-          <p:cNvPr id="9" name="Oval 8"/>
+              <a:rPr sz="1900" b="1" i="0">
+                <a:solidFill>
+                  <a:srgbClr val="03306E"/>
+                </a:solidFill>
+                <a:latin typeface="Calibri"/>
+              </a:rPr>
+              <a:t>AC and DC</a:t>
+            </a:r>
+          </a:p>
+        </p:txBody>
+      </p:sp>
+      <p:sp>
+        <p:nvSpPr>
+          <p:cNvPr id="9" name="TextBox 8"/>
+          <p:cNvSpPr txBox="1"/>
+          <p:nvPr/>
+        </p:nvSpPr>
+        <p:spPr>
+          <a:xfrm>
+            <a:off x="777240" y="2468880"/>
+            <a:ext cx="4952847" cy="1143000"/>
+          </a:xfrm>
+          <a:prstGeom prst="rect">
+            <a:avLst/>
+          </a:prstGeom>
+          <a:noFill/>
+        </p:spPr>
+        <p:txBody>
+          <a:bodyPr wrap="square" anchor="t" lIns="0" rIns="0" tIns="0" bIns="0"/>
+          <a:lstStyle/>
+          <a:p>
+            <a:pPr algn="l"/>
+            <a:r>
+              <a:rPr sz="2000" b="0" i="0">
+                <a:solidFill>
+                  <a:srgbClr val="202122"/>
+                </a:solidFill>
+                <a:latin typeface="Calibri"/>
+              </a:rPr>
+              <a:t>AC reverses direction (mains); DC flows one way (batteries). Phasor diagrams show AC phase.</a:t>
+            </a:r>
+          </a:p>
+        </p:txBody>
+      </p:sp>
+      <p:sp>
+        <p:nvSpPr>
+          <p:cNvPr id="10" name="Rounded Rectangle 9"/>
           <p:cNvSpPr/>
           <p:nvPr/>
         </p:nvSpPr>
         <p:spPr>
           <a:xfrm>
-            <a:off x="548640" y="2482596"/>
-            <a:ext cx="384048" cy="384048"/>
-          </a:xfrm>
-          <a:prstGeom prst="ellipse">
-            <a:avLst/>
-          </a:prstGeom>
-          <a:solidFill>
-            <a:srgbClr val="0645AD"/>
-          </a:solidFill>
-          <a:ln>
-            <a:noFill/>
-          </a:ln>
-          <a:effectLst/>
-        </p:spPr>
-        <p:style>
-          <a:lnRef idx="1">
-            <a:schemeClr val="accent1"/>
-          </a:lnRef>
-          <a:fillRef idx="3">
-            <a:schemeClr val="accent1"/>
-          </a:fillRef>
-          <a:effectRef idx="2">
-            <a:schemeClr val="accent1"/>
-          </a:effectRef>
-          <a:fontRef idx="minor">
-            <a:schemeClr val="lt1"/>
-          </a:fontRef>
-        </p:style>
-        <p:txBody>
-          <a:bodyPr rtlCol="0" anchor="ctr" lIns="0" rIns="0" tIns="0" bIns="0"/>
-          <a:lstStyle/>
-          <a:p>
-            <a:pPr algn="ctr"/>
-            <a:r>
-              <a:rPr sz="1300" b="1">
-                <a:solidFill>
-                  <a:srgbClr val="FFFFFF"/>
-                </a:solidFill>
-                <a:latin typeface="Calibri"/>
-              </a:rPr>
-              <a:t>1</a:t>
-            </a:r>
-          </a:p>
-        </p:txBody>
-      </p:sp>
-      <p:sp>
-        <p:nvSpPr>
-          <p:cNvPr id="10" name="TextBox 9"/>
-          <p:cNvSpPr txBox="1"/>
-          <p:nvPr/>
-        </p:nvSpPr>
-        <p:spPr>
-          <a:xfrm>
-            <a:off x="1143000" y="2240280"/>
-            <a:ext cx="5943600" cy="868680"/>
-          </a:xfrm>
-          <a:prstGeom prst="rect">
-            <a:avLst/>
-          </a:prstGeom>
-          <a:noFill/>
-        </p:spPr>
-        <p:txBody>
-          <a:bodyPr wrap="square" anchor="ctr" lIns="0" rIns="0" tIns="0" bIns="0"/>
-          <a:lstStyle/>
-          <a:p>
-            <a:pPr algn="l"/>
-            <a:r>
-              <a:rPr sz="1700" b="0" i="0">
-                <a:solidFill>
-                  <a:srgbClr val="202122"/>
-                </a:solidFill>
-                <a:latin typeface="Calibri"/>
-              </a:rPr>
-              <a:t>Build (or sketch) a series and a parallel circuit with two resistors.</a:t>
-            </a:r>
-          </a:p>
-        </p:txBody>
-      </p:sp>
-      <p:sp>
-        <p:nvSpPr>
-          <p:cNvPr id="11" name="Oval 10"/>
-          <p:cNvSpPr/>
-          <p:nvPr/>
-        </p:nvSpPr>
-        <p:spPr>
-          <a:xfrm>
-            <a:off x="548640" y="3461004"/>
-            <a:ext cx="384048" cy="384048"/>
-          </a:xfrm>
-          <a:prstGeom prst="ellipse">
-            <a:avLst/>
-          </a:prstGeom>
-          <a:solidFill>
-            <a:srgbClr val="0645AD"/>
-          </a:solidFill>
-          <a:ln>
-            <a:noFill/>
-          </a:ln>
-          <a:effectLst/>
-        </p:spPr>
-        <p:style>
-          <a:lnRef idx="1">
-            <a:schemeClr val="accent1"/>
-          </a:lnRef>
-          <a:fillRef idx="3">
-            <a:schemeClr val="accent1"/>
-          </a:fillRef>
-          <a:effectRef idx="2">
-            <a:schemeClr val="accent1"/>
-          </a:effectRef>
-          <a:fontRef idx="minor">
-            <a:schemeClr val="lt1"/>
-          </a:fontRef>
-        </p:style>
-        <p:txBody>
-          <a:bodyPr rtlCol="0" anchor="ctr" lIns="0" rIns="0" tIns="0" bIns="0"/>
-          <a:lstStyle/>
-          <a:p>
-            <a:pPr algn="ctr"/>
-            <a:r>
-              <a:rPr sz="1300" b="1">
-                <a:solidFill>
-                  <a:srgbClr val="FFFFFF"/>
-                </a:solidFill>
-                <a:latin typeface="Calibri"/>
-              </a:rPr>
-              <a:t>2</a:t>
-            </a:r>
-          </a:p>
-        </p:txBody>
-      </p:sp>
-      <p:sp>
-        <p:nvSpPr>
-          <p:cNvPr id="12" name="TextBox 11"/>
-          <p:cNvSpPr txBox="1"/>
-          <p:nvPr/>
-        </p:nvSpPr>
-        <p:spPr>
-          <a:xfrm>
-            <a:off x="1143000" y="3218688"/>
-            <a:ext cx="5943600" cy="868680"/>
-          </a:xfrm>
-          <a:prstGeom prst="rect">
-            <a:avLst/>
-          </a:prstGeom>
-          <a:noFill/>
-        </p:spPr>
-        <p:txBody>
-          <a:bodyPr wrap="square" anchor="ctr" lIns="0" rIns="0" tIns="0" bIns="0"/>
-          <a:lstStyle/>
-          <a:p>
-            <a:pPr algn="l"/>
-            <a:r>
-              <a:rPr sz="1700" b="0" i="0">
-                <a:solidFill>
-                  <a:srgbClr val="202122"/>
-                </a:solidFill>
-                <a:latin typeface="Calibri"/>
-              </a:rPr>
-              <a:t>Predict currents and voltages using Ohm's law.</a:t>
-            </a:r>
-          </a:p>
-        </p:txBody>
-      </p:sp>
-      <p:sp>
-        <p:nvSpPr>
-          <p:cNvPr id="13" name="Oval 12"/>
-          <p:cNvSpPr/>
-          <p:nvPr/>
-        </p:nvSpPr>
-        <p:spPr>
-          <a:xfrm>
-            <a:off x="548640" y="4439412"/>
-            <a:ext cx="384048" cy="384048"/>
-          </a:xfrm>
-          <a:prstGeom prst="ellipse">
-            <a:avLst/>
-          </a:prstGeom>
-          <a:solidFill>
-            <a:srgbClr val="0645AD"/>
-          </a:solidFill>
-          <a:ln>
-            <a:noFill/>
-          </a:ln>
-          <a:effectLst/>
-        </p:spPr>
-        <p:style>
-          <a:lnRef idx="1">
-            <a:schemeClr val="accent1"/>
-          </a:lnRef>
-          <a:fillRef idx="3">
-            <a:schemeClr val="accent1"/>
-          </a:fillRef>
-          <a:effectRef idx="2">
-            <a:schemeClr val="accent1"/>
-          </a:effectRef>
-          <a:fontRef idx="minor">
-            <a:schemeClr val="lt1"/>
-          </a:fontRef>
-        </p:style>
-        <p:txBody>
-          <a:bodyPr rtlCol="0" anchor="ctr" lIns="0" rIns="0" tIns="0" bIns="0"/>
-          <a:lstStyle/>
-          <a:p>
-            <a:pPr algn="ctr"/>
-            <a:r>
-              <a:rPr sz="1300" b="1">
-                <a:solidFill>
-                  <a:srgbClr val="FFFFFF"/>
-                </a:solidFill>
-                <a:latin typeface="Calibri"/>
-              </a:rPr>
-              <a:t>3</a:t>
-            </a:r>
-          </a:p>
-        </p:txBody>
-      </p:sp>
-      <p:sp>
-        <p:nvSpPr>
-          <p:cNvPr id="14" name="TextBox 13"/>
-          <p:cNvSpPr txBox="1"/>
-          <p:nvPr/>
-        </p:nvSpPr>
-        <p:spPr>
-          <a:xfrm>
-            <a:off x="1143000" y="4197096"/>
-            <a:ext cx="5943600" cy="868680"/>
-          </a:xfrm>
-          <a:prstGeom prst="rect">
-            <a:avLst/>
-          </a:prstGeom>
-          <a:noFill/>
-        </p:spPr>
-        <p:txBody>
-          <a:bodyPr wrap="square" anchor="ctr" lIns="0" rIns="0" tIns="0" bIns="0"/>
-          <a:lstStyle/>
-          <a:p>
-            <a:pPr algn="l"/>
-            <a:r>
-              <a:rPr sz="1700" b="0" i="0">
-                <a:solidFill>
-                  <a:srgbClr val="202122"/>
-                </a:solidFill>
-                <a:latin typeface="Calibri"/>
-              </a:rPr>
-              <a:t>Measure them with a multimeter.</a:t>
-            </a:r>
-          </a:p>
-        </p:txBody>
-      </p:sp>
-      <p:sp>
-        <p:nvSpPr>
-          <p:cNvPr id="15" name="Oval 14"/>
-          <p:cNvSpPr/>
-          <p:nvPr/>
-        </p:nvSpPr>
-        <p:spPr>
-          <a:xfrm>
-            <a:off x="548640" y="5417820"/>
-            <a:ext cx="384048" cy="384048"/>
-          </a:xfrm>
-          <a:prstGeom prst="ellipse">
-            <a:avLst/>
-          </a:prstGeom>
-          <a:solidFill>
-            <a:srgbClr val="0645AD"/>
-          </a:solidFill>
-          <a:ln>
-            <a:noFill/>
-          </a:ln>
-          <a:effectLst/>
-        </p:spPr>
-        <p:style>
-          <a:lnRef idx="1">
-            <a:schemeClr val="accent1"/>
-          </a:lnRef>
-          <a:fillRef idx="3">
-            <a:schemeClr val="accent1"/>
-          </a:fillRef>
-          <a:effectRef idx="2">
-            <a:schemeClr val="accent1"/>
-          </a:effectRef>
-          <a:fontRef idx="minor">
-            <a:schemeClr val="lt1"/>
-          </a:fontRef>
-        </p:style>
-        <p:txBody>
-          <a:bodyPr rtlCol="0" anchor="ctr" lIns="0" rIns="0" tIns="0" bIns="0"/>
-          <a:lstStyle/>
-          <a:p>
-            <a:pPr algn="ctr"/>
-            <a:r>
-              <a:rPr sz="1300" b="1">
-                <a:solidFill>
-                  <a:srgbClr val="FFFFFF"/>
-                </a:solidFill>
-                <a:latin typeface="Calibri"/>
-              </a:rPr>
-              <a:t>4</a:t>
-            </a:r>
-          </a:p>
-        </p:txBody>
-      </p:sp>
-      <p:sp>
-        <p:nvSpPr>
-          <p:cNvPr id="16" name="TextBox 15"/>
-          <p:cNvSpPr txBox="1"/>
-          <p:nvPr/>
-        </p:nvSpPr>
-        <p:spPr>
-          <a:xfrm>
-            <a:off x="1143000" y="5175504"/>
-            <a:ext cx="5943600" cy="868680"/>
-          </a:xfrm>
-          <a:prstGeom prst="rect">
-            <a:avLst/>
-          </a:prstGeom>
-          <a:noFill/>
-        </p:spPr>
-        <p:txBody>
-          <a:bodyPr wrap="square" anchor="ctr" lIns="0" rIns="0" tIns="0" bIns="0"/>
-          <a:lstStyle/>
-          <a:p>
-            <a:pPr algn="l"/>
-            <a:r>
-              <a:rPr sz="1700" b="0" i="0">
-                <a:solidFill>
-                  <a:srgbClr val="202122"/>
-                </a:solidFill>
-                <a:latin typeface="Calibri"/>
-              </a:rPr>
-              <a:t>Explain any differences between prediction and measurement.</a:t>
-            </a:r>
-          </a:p>
-        </p:txBody>
-      </p:sp>
-      <p:sp>
-        <p:nvSpPr>
-          <p:cNvPr id="17" name="Rounded Rectangle 16"/>
-          <p:cNvSpPr/>
-          <p:nvPr/>
-        </p:nvSpPr>
-        <p:spPr>
-          <a:xfrm>
-            <a:off x="7772400" y="1508760"/>
-            <a:ext cx="3867912" cy="4572000"/>
+            <a:off x="6233007" y="1600200"/>
+            <a:ext cx="5410047" cy="2148840"/>
           </a:xfrm>
           <a:prstGeom prst="roundRect">
             <a:avLst>
-              <a:gd name="adj" fmla="val 8000"/>
+              <a:gd name="adj" fmla="val 6000"/>
             </a:avLst>
           </a:prstGeom>
           <a:solidFill>
@@ -9607,14 +12092,100 @@
       </p:sp>
       <p:sp>
         <p:nvSpPr>
-          <p:cNvPr id="18" name="TextBox 17"/>
+          <p:cNvPr id="11" name="Oval 10"/>
+          <p:cNvSpPr/>
+          <p:nvPr/>
+        </p:nvSpPr>
+        <p:spPr>
+          <a:xfrm>
+            <a:off x="6461607" y="1828800"/>
+            <a:ext cx="457200" cy="457200"/>
+          </a:xfrm>
+          <a:prstGeom prst="ellipse">
+            <a:avLst/>
+          </a:prstGeom>
+          <a:solidFill>
+            <a:srgbClr val="F2B705"/>
+          </a:solidFill>
+          <a:ln>
+            <a:noFill/>
+          </a:ln>
+          <a:effectLst/>
+        </p:spPr>
+        <p:style>
+          <a:lnRef idx="1">
+            <a:schemeClr val="accent1"/>
+          </a:lnRef>
+          <a:fillRef idx="3">
+            <a:schemeClr val="accent1"/>
+          </a:fillRef>
+          <a:effectRef idx="2">
+            <a:schemeClr val="accent1"/>
+          </a:effectRef>
+          <a:fontRef idx="minor">
+            <a:schemeClr val="lt1"/>
+          </a:fontRef>
+        </p:style>
+        <p:txBody>
+          <a:bodyPr rtlCol="0" anchor="ctr" lIns="0" rIns="0" tIns="0" bIns="0"/>
+          <a:lstStyle/>
+          <a:p>
+            <a:pPr algn="ctr"/>
+            <a:r>
+              <a:rPr sz="1500" b="1">
+                <a:solidFill>
+                  <a:srgbClr val="202122"/>
+                </a:solidFill>
+                <a:latin typeface="Calibri"/>
+              </a:rPr>
+              <a:t>2</a:t>
+            </a:r>
+          </a:p>
+        </p:txBody>
+      </p:sp>
+      <p:sp>
+        <p:nvSpPr>
+          <p:cNvPr id="12" name="TextBox 11"/>
           <p:cNvSpPr txBox="1"/>
           <p:nvPr/>
         </p:nvSpPr>
         <p:spPr>
           <a:xfrm>
-            <a:off x="8046720" y="1737360"/>
-            <a:ext cx="3291840" cy="365760"/>
+            <a:off x="7055967" y="1801368"/>
+            <a:ext cx="4404207" cy="512064"/>
+          </a:xfrm>
+          <a:prstGeom prst="rect">
+            <a:avLst/>
+          </a:prstGeom>
+          <a:noFill/>
+        </p:spPr>
+        <p:txBody>
+          <a:bodyPr wrap="square" anchor="ctr" lIns="0" rIns="0" tIns="0" bIns="0"/>
+          <a:lstStyle/>
+          <a:p>
+            <a:pPr algn="l"/>
+            <a:r>
+              <a:rPr sz="1900" b="1" i="0">
+                <a:solidFill>
+                  <a:srgbClr val="03306E"/>
+                </a:solidFill>
+                <a:latin typeface="Calibri"/>
+              </a:rPr>
+              <a:t>Protection</a:t>
+            </a:r>
+          </a:p>
+        </p:txBody>
+      </p:sp>
+      <p:sp>
+        <p:nvSpPr>
+          <p:cNvPr id="13" name="TextBox 12"/>
+          <p:cNvSpPr txBox="1"/>
+          <p:nvPr/>
+        </p:nvSpPr>
+        <p:spPr>
+          <a:xfrm>
+            <a:off x="6461607" y="2468880"/>
+            <a:ext cx="4952847" cy="1143000"/>
           </a:xfrm>
           <a:prstGeom prst="rect">
             <a:avLst/>
@@ -9627,99 +12198,339 @@
           <a:p>
             <a:pPr algn="l"/>
             <a:r>
-              <a:rPr sz="1300" b="1" i="0">
-                <a:solidFill>
-                  <a:srgbClr val="0645AD"/>
-                </a:solidFill>
-                <a:latin typeface="Calibri"/>
-              </a:rPr>
-              <a:t>SUCCESS CRITERIA</a:t>
-            </a:r>
-          </a:p>
-        </p:txBody>
-      </p:sp>
-      <p:sp>
-        <p:nvSpPr>
-          <p:cNvPr id="19" name="TextBox 18"/>
+              <a:rPr sz="2000" b="0" i="0">
+                <a:solidFill>
+                  <a:srgbClr val="202122"/>
+                </a:solidFill>
+                <a:latin typeface="Calibri"/>
+              </a:rPr>
+              <a:t>Fuses, RCDs and lightning arrestors; differential and transformer protection.</a:t>
+            </a:r>
+          </a:p>
+        </p:txBody>
+      </p:sp>
+      <p:sp>
+        <p:nvSpPr>
+          <p:cNvPr id="14" name="Rounded Rectangle 13"/>
+          <p:cNvSpPr/>
+          <p:nvPr/>
+        </p:nvSpPr>
+        <p:spPr>
+          <a:xfrm>
+            <a:off x="548640" y="4023360"/>
+            <a:ext cx="5410047" cy="2148840"/>
+          </a:xfrm>
+          <a:prstGeom prst="roundRect">
+            <a:avLst>
+              <a:gd name="adj" fmla="val 6000"/>
+            </a:avLst>
+          </a:prstGeom>
+          <a:solidFill>
+            <a:srgbClr val="EAF3FF"/>
+          </a:solidFill>
+          <a:ln>
+            <a:noFill/>
+          </a:ln>
+          <a:effectLst/>
+        </p:spPr>
+        <p:style>
+          <a:lnRef idx="1">
+            <a:schemeClr val="accent1"/>
+          </a:lnRef>
+          <a:fillRef idx="3">
+            <a:schemeClr val="accent1"/>
+          </a:fillRef>
+          <a:effectRef idx="2">
+            <a:schemeClr val="accent1"/>
+          </a:effectRef>
+          <a:fontRef idx="minor">
+            <a:schemeClr val="lt1"/>
+          </a:fontRef>
+        </p:style>
+        <p:txBody>
+          <a:bodyPr rtlCol="0" anchor="ctr"/>
+          <a:lstStyle/>
+          <a:p/>
+        </p:txBody>
+      </p:sp>
+      <p:sp>
+        <p:nvSpPr>
+          <p:cNvPr id="15" name="Oval 14"/>
+          <p:cNvSpPr/>
+          <p:nvPr/>
+        </p:nvSpPr>
+        <p:spPr>
+          <a:xfrm>
+            <a:off x="777240" y="4251960"/>
+            <a:ext cx="457200" cy="457200"/>
+          </a:xfrm>
+          <a:prstGeom prst="ellipse">
+            <a:avLst/>
+          </a:prstGeom>
+          <a:solidFill>
+            <a:srgbClr val="F2B705"/>
+          </a:solidFill>
+          <a:ln>
+            <a:noFill/>
+          </a:ln>
+          <a:effectLst/>
+        </p:spPr>
+        <p:style>
+          <a:lnRef idx="1">
+            <a:schemeClr val="accent1"/>
+          </a:lnRef>
+          <a:fillRef idx="3">
+            <a:schemeClr val="accent1"/>
+          </a:fillRef>
+          <a:effectRef idx="2">
+            <a:schemeClr val="accent1"/>
+          </a:effectRef>
+          <a:fontRef idx="minor">
+            <a:schemeClr val="lt1"/>
+          </a:fontRef>
+        </p:style>
+        <p:txBody>
+          <a:bodyPr rtlCol="0" anchor="ctr" lIns="0" rIns="0" tIns="0" bIns="0"/>
+          <a:lstStyle/>
+          <a:p>
+            <a:pPr algn="ctr"/>
+            <a:r>
+              <a:rPr sz="1500" b="1">
+                <a:solidFill>
+                  <a:srgbClr val="202122"/>
+                </a:solidFill>
+                <a:latin typeface="Calibri"/>
+              </a:rPr>
+              <a:t>3</a:t>
+            </a:r>
+          </a:p>
+        </p:txBody>
+      </p:sp>
+      <p:sp>
+        <p:nvSpPr>
+          <p:cNvPr id="16" name="TextBox 15"/>
           <p:cNvSpPr txBox="1"/>
           <p:nvPr/>
         </p:nvSpPr>
         <p:spPr>
           <a:xfrm>
-            <a:off x="8046720" y="2240280"/>
-            <a:ext cx="3337560" cy="3657600"/>
-          </a:xfrm>
-          <a:prstGeom prst="rect">
-            <a:avLst/>
-          </a:prstGeom>
-          <a:noFill/>
-        </p:spPr>
-        <p:txBody>
-          <a:bodyPr wrap="square" lIns="0" rIns="0" tIns="0" bIns="0">
-            <a:spAutoFit/>
-          </a:bodyPr>
-          <a:lstStyle/>
-          <a:p>
-            <a:pPr marL="274320" indent="-274320">
-              <a:spcAft>
-                <a:spcPts val="810"/>
-              </a:spcAft>
-              <a:buClr>
-                <a:srgbClr val="0645AD"/>
-              </a:buClr>
-              <a:buFont typeface="Arial"/>
-              <a:buChar char="•"/>
-            </a:pPr>
-            <a:r>
-              <a:rPr sz="1800" b="0">
+            <a:off x="1371600" y="4224528"/>
+            <a:ext cx="4404207" cy="512064"/>
+          </a:xfrm>
+          <a:prstGeom prst="rect">
+            <a:avLst/>
+          </a:prstGeom>
+          <a:noFill/>
+        </p:spPr>
+        <p:txBody>
+          <a:bodyPr wrap="square" anchor="ctr" lIns="0" rIns="0" tIns="0" bIns="0"/>
+          <a:lstStyle/>
+          <a:p>
+            <a:pPr algn="l"/>
+            <a:r>
+              <a:rPr sz="1900" b="1" i="0">
+                <a:solidFill>
+                  <a:srgbClr val="03306E"/>
+                </a:solidFill>
+                <a:latin typeface="Calibri"/>
+              </a:rPr>
+              <a:t>Capacitors and inductors</a:t>
+            </a:r>
+          </a:p>
+        </p:txBody>
+      </p:sp>
+      <p:sp>
+        <p:nvSpPr>
+          <p:cNvPr id="17" name="TextBox 16"/>
+          <p:cNvSpPr txBox="1"/>
+          <p:nvPr/>
+        </p:nvSpPr>
+        <p:spPr>
+          <a:xfrm>
+            <a:off x="777240" y="4892040"/>
+            <a:ext cx="4952847" cy="1143000"/>
+          </a:xfrm>
+          <a:prstGeom prst="rect">
+            <a:avLst/>
+          </a:prstGeom>
+          <a:noFill/>
+        </p:spPr>
+        <p:txBody>
+          <a:bodyPr wrap="square" anchor="t" lIns="0" rIns="0" tIns="0" bIns="0"/>
+          <a:lstStyle/>
+          <a:p>
+            <a:pPr algn="l"/>
+            <a:r>
+              <a:rPr sz="2000" b="0" i="0">
                 <a:solidFill>
                   <a:srgbClr val="202122"/>
                 </a:solidFill>
                 <a:latin typeface="Calibri"/>
               </a:rPr>
-              <a:t>Predictions calculated correctly</a:t>
-            </a:r>
-          </a:p>
-          <a:p>
-            <a:pPr marL="274320" indent="-274320">
-              <a:spcAft>
-                <a:spcPts val="810"/>
-              </a:spcAft>
-              <a:buClr>
-                <a:srgbClr val="0645AD"/>
-              </a:buClr>
-              <a:buFont typeface="Arial"/>
-              <a:buChar char="•"/>
-            </a:pPr>
-            <a:r>
-              <a:rPr sz="1800" b="0">
+              <a:t>Store energy in electric and magnetic fields; time constants in DC circuits.</a:t>
+            </a:r>
+          </a:p>
+        </p:txBody>
+      </p:sp>
+      <p:sp>
+        <p:nvSpPr>
+          <p:cNvPr id="18" name="Rounded Rectangle 17"/>
+          <p:cNvSpPr/>
+          <p:nvPr/>
+        </p:nvSpPr>
+        <p:spPr>
+          <a:xfrm>
+            <a:off x="6233007" y="4023360"/>
+            <a:ext cx="5410047" cy="2148840"/>
+          </a:xfrm>
+          <a:prstGeom prst="roundRect">
+            <a:avLst>
+              <a:gd name="adj" fmla="val 6000"/>
+            </a:avLst>
+          </a:prstGeom>
+          <a:solidFill>
+            <a:srgbClr val="EAF3FF"/>
+          </a:solidFill>
+          <a:ln>
+            <a:noFill/>
+          </a:ln>
+          <a:effectLst/>
+        </p:spPr>
+        <p:style>
+          <a:lnRef idx="1">
+            <a:schemeClr val="accent1"/>
+          </a:lnRef>
+          <a:fillRef idx="3">
+            <a:schemeClr val="accent1"/>
+          </a:fillRef>
+          <a:effectRef idx="2">
+            <a:schemeClr val="accent1"/>
+          </a:effectRef>
+          <a:fontRef idx="minor">
+            <a:schemeClr val="lt1"/>
+          </a:fontRef>
+        </p:style>
+        <p:txBody>
+          <a:bodyPr rtlCol="0" anchor="ctr"/>
+          <a:lstStyle/>
+          <a:p/>
+        </p:txBody>
+      </p:sp>
+      <p:sp>
+        <p:nvSpPr>
+          <p:cNvPr id="19" name="Oval 18"/>
+          <p:cNvSpPr/>
+          <p:nvPr/>
+        </p:nvSpPr>
+        <p:spPr>
+          <a:xfrm>
+            <a:off x="6461607" y="4251960"/>
+            <a:ext cx="457200" cy="457200"/>
+          </a:xfrm>
+          <a:prstGeom prst="ellipse">
+            <a:avLst/>
+          </a:prstGeom>
+          <a:solidFill>
+            <a:srgbClr val="F2B705"/>
+          </a:solidFill>
+          <a:ln>
+            <a:noFill/>
+          </a:ln>
+          <a:effectLst/>
+        </p:spPr>
+        <p:style>
+          <a:lnRef idx="1">
+            <a:schemeClr val="accent1"/>
+          </a:lnRef>
+          <a:fillRef idx="3">
+            <a:schemeClr val="accent1"/>
+          </a:fillRef>
+          <a:effectRef idx="2">
+            <a:schemeClr val="accent1"/>
+          </a:effectRef>
+          <a:fontRef idx="minor">
+            <a:schemeClr val="lt1"/>
+          </a:fontRef>
+        </p:style>
+        <p:txBody>
+          <a:bodyPr rtlCol="0" anchor="ctr" lIns="0" rIns="0" tIns="0" bIns="0"/>
+          <a:lstStyle/>
+          <a:p>
+            <a:pPr algn="ctr"/>
+            <a:r>
+              <a:rPr sz="1500" b="1">
                 <a:solidFill>
                   <a:srgbClr val="202122"/>
                 </a:solidFill>
                 <a:latin typeface="Calibri"/>
               </a:rPr>
-              <a:t>Meter used safely</a:t>
-            </a:r>
-          </a:p>
-          <a:p>
-            <a:pPr marL="274320" indent="-274320">
-              <a:spcAft>
-                <a:spcPts val="810"/>
-              </a:spcAft>
-              <a:buClr>
-                <a:srgbClr val="0645AD"/>
-              </a:buClr>
-              <a:buFont typeface="Arial"/>
-              <a:buChar char="•"/>
-            </a:pPr>
-            <a:r>
-              <a:rPr sz="1800" b="0">
+              <a:t>4</a:t>
+            </a:r>
+          </a:p>
+        </p:txBody>
+      </p:sp>
+      <p:sp>
+        <p:nvSpPr>
+          <p:cNvPr id="20" name="TextBox 19"/>
+          <p:cNvSpPr txBox="1"/>
+          <p:nvPr/>
+        </p:nvSpPr>
+        <p:spPr>
+          <a:xfrm>
+            <a:off x="7055967" y="4224528"/>
+            <a:ext cx="4404207" cy="512064"/>
+          </a:xfrm>
+          <a:prstGeom prst="rect">
+            <a:avLst/>
+          </a:prstGeom>
+          <a:noFill/>
+        </p:spPr>
+        <p:txBody>
+          <a:bodyPr wrap="square" anchor="ctr" lIns="0" rIns="0" tIns="0" bIns="0"/>
+          <a:lstStyle/>
+          <a:p>
+            <a:pPr algn="l"/>
+            <a:r>
+              <a:rPr sz="1900" b="1" i="0">
+                <a:solidFill>
+                  <a:srgbClr val="03306E"/>
+                </a:solidFill>
+                <a:latin typeface="Calibri"/>
+              </a:rPr>
+              <a:t>Semiconductors</a:t>
+            </a:r>
+          </a:p>
+        </p:txBody>
+      </p:sp>
+      <p:sp>
+        <p:nvSpPr>
+          <p:cNvPr id="21" name="TextBox 20"/>
+          <p:cNvSpPr txBox="1"/>
+          <p:nvPr/>
+        </p:nvSpPr>
+        <p:spPr>
+          <a:xfrm>
+            <a:off x="6461607" y="4892040"/>
+            <a:ext cx="4952847" cy="1143000"/>
+          </a:xfrm>
+          <a:prstGeom prst="rect">
+            <a:avLst/>
+          </a:prstGeom>
+          <a:noFill/>
+        </p:spPr>
+        <p:txBody>
+          <a:bodyPr wrap="square" anchor="t" lIns="0" rIns="0" tIns="0" bIns="0"/>
+          <a:lstStyle/>
+          <a:p>
+            <a:pPr algn="l"/>
+            <a:r>
+              <a:rPr sz="2000" b="0" i="0">
                 <a:solidFill>
                   <a:srgbClr val="202122"/>
                 </a:solidFill>
                 <a:latin typeface="Calibri"/>
               </a:rPr>
-              <a:t>Differences explained (tolerance, meter resistance)</a:t>
+              <a:t>Diodes let current flow one way; transistors switch and amplify.</a:t>
             </a:r>
           </a:p>
         </p:txBody>
